--- a/documentacion/fichas_curriculares/jaliscof/JALISCO.pptx
+++ b/documentacion/fichas_curriculares/jaliscof/JALISCO.pptx
@@ -2,18 +2,18 @@
 <file path=ppt/presentation.xml><?xml version="1.0" encoding="utf-8"?>
 <p:presentation xmlns:a="http://schemas.openxmlformats.org/drawingml/2006/main" xmlns:r="http://schemas.openxmlformats.org/officeDocument/2006/relationships" xmlns:p="http://schemas.openxmlformats.org/presentationml/2006/main" saveSubsetFonts="1">
   <p:sldMasterIdLst>
-    <p:sldMasterId id="2147483684" r:id="rId1"/>
+    <p:sldMasterId id="2147483696" r:id="rId1"/>
   </p:sldMasterIdLst>
   <p:sldIdLst>
     <p:sldId id="256" r:id="rId2"/>
   </p:sldIdLst>
-  <p:sldSz cx="6858000" cy="9144000" type="letter"/>
+  <p:sldSz cx="16256000" cy="9144000"/>
   <p:notesSz cx="7023100" cy="9309100"/>
   <p:defaultTextStyle>
     <a:defPPr>
-      <a:defRPr lang="es-MX"/>
+      <a:defRPr lang="en-US"/>
     </a:defPPr>
-    <a:lvl1pPr marL="0" algn="l" defTabSz="914400" rtl="0" eaLnBrk="1" latinLnBrk="0" hangingPunct="1">
+    <a:lvl1pPr marL="0" algn="l" defTabSz="457200" rtl="0" eaLnBrk="1" latinLnBrk="0" hangingPunct="1">
       <a:defRPr sz="1800" kern="1200">
         <a:solidFill>
           <a:schemeClr val="tx1"/>
@@ -23,7 +23,7 @@
         <a:cs typeface="+mn-cs"/>
       </a:defRPr>
     </a:lvl1pPr>
-    <a:lvl2pPr marL="457200" algn="l" defTabSz="914400" rtl="0" eaLnBrk="1" latinLnBrk="0" hangingPunct="1">
+    <a:lvl2pPr marL="457200" algn="l" defTabSz="457200" rtl="0" eaLnBrk="1" latinLnBrk="0" hangingPunct="1">
       <a:defRPr sz="1800" kern="1200">
         <a:solidFill>
           <a:schemeClr val="tx1"/>
@@ -33,7 +33,7 @@
         <a:cs typeface="+mn-cs"/>
       </a:defRPr>
     </a:lvl2pPr>
-    <a:lvl3pPr marL="914400" algn="l" defTabSz="914400" rtl="0" eaLnBrk="1" latinLnBrk="0" hangingPunct="1">
+    <a:lvl3pPr marL="914400" algn="l" defTabSz="457200" rtl="0" eaLnBrk="1" latinLnBrk="0" hangingPunct="1">
       <a:defRPr sz="1800" kern="1200">
         <a:solidFill>
           <a:schemeClr val="tx1"/>
@@ -43,7 +43,7 @@
         <a:cs typeface="+mn-cs"/>
       </a:defRPr>
     </a:lvl3pPr>
-    <a:lvl4pPr marL="1371600" algn="l" defTabSz="914400" rtl="0" eaLnBrk="1" latinLnBrk="0" hangingPunct="1">
+    <a:lvl4pPr marL="1371600" algn="l" defTabSz="457200" rtl="0" eaLnBrk="1" latinLnBrk="0" hangingPunct="1">
       <a:defRPr sz="1800" kern="1200">
         <a:solidFill>
           <a:schemeClr val="tx1"/>
@@ -53,7 +53,7 @@
         <a:cs typeface="+mn-cs"/>
       </a:defRPr>
     </a:lvl4pPr>
-    <a:lvl5pPr marL="1828800" algn="l" defTabSz="914400" rtl="0" eaLnBrk="1" latinLnBrk="0" hangingPunct="1">
+    <a:lvl5pPr marL="1828800" algn="l" defTabSz="457200" rtl="0" eaLnBrk="1" latinLnBrk="0" hangingPunct="1">
       <a:defRPr sz="1800" kern="1200">
         <a:solidFill>
           <a:schemeClr val="tx1"/>
@@ -63,7 +63,7 @@
         <a:cs typeface="+mn-cs"/>
       </a:defRPr>
     </a:lvl5pPr>
-    <a:lvl6pPr marL="2286000" algn="l" defTabSz="914400" rtl="0" eaLnBrk="1" latinLnBrk="0" hangingPunct="1">
+    <a:lvl6pPr marL="2286000" algn="l" defTabSz="457200" rtl="0" eaLnBrk="1" latinLnBrk="0" hangingPunct="1">
       <a:defRPr sz="1800" kern="1200">
         <a:solidFill>
           <a:schemeClr val="tx1"/>
@@ -73,7 +73,7 @@
         <a:cs typeface="+mn-cs"/>
       </a:defRPr>
     </a:lvl6pPr>
-    <a:lvl7pPr marL="2743200" algn="l" defTabSz="914400" rtl="0" eaLnBrk="1" latinLnBrk="0" hangingPunct="1">
+    <a:lvl7pPr marL="2743200" algn="l" defTabSz="457200" rtl="0" eaLnBrk="1" latinLnBrk="0" hangingPunct="1">
       <a:defRPr sz="1800" kern="1200">
         <a:solidFill>
           <a:schemeClr val="tx1"/>
@@ -83,7 +83,7 @@
         <a:cs typeface="+mn-cs"/>
       </a:defRPr>
     </a:lvl7pPr>
-    <a:lvl8pPr marL="3200400" algn="l" defTabSz="914400" rtl="0" eaLnBrk="1" latinLnBrk="0" hangingPunct="1">
+    <a:lvl8pPr marL="3200400" algn="l" defTabSz="457200" rtl="0" eaLnBrk="1" latinLnBrk="0" hangingPunct="1">
       <a:defRPr sz="1800" kern="1200">
         <a:solidFill>
           <a:schemeClr val="tx1"/>
@@ -93,7 +93,7 @@
         <a:cs typeface="+mn-cs"/>
       </a:defRPr>
     </a:lvl8pPr>
-    <a:lvl9pPr marL="3657600" algn="l" defTabSz="914400" rtl="0" eaLnBrk="1" latinLnBrk="0" hangingPunct="1">
+    <a:lvl9pPr marL="3657600" algn="l" defTabSz="457200" rtl="0" eaLnBrk="1" latinLnBrk="0" hangingPunct="1">
       <a:defRPr sz="1800" kern="1200">
         <a:solidFill>
           <a:schemeClr val="tx1"/>
@@ -110,6 +110,389 @@
     </p:ext>
   </p:extLst>
 </p:presentation>
+</file>
+
+<file path=ppt/revisionInfo.xml><?xml version="1.0" encoding="utf-8"?>
+<p1510:revInfo xmlns:a="http://schemas.openxmlformats.org/drawingml/2006/main" xmlns:r="http://schemas.openxmlformats.org/officeDocument/2006/relationships" xmlns:p1510="http://schemas.microsoft.com/office/powerpoint/2015/10/main">
+  <p1510:revLst>
+    <p1510:client id="{D89A7DD7-180F-40E1-BAAE-0FAC412D3593}" v="1" dt="2025-06-17T19:27:27.383"/>
+  </p1510:revLst>
+</p1510:revInfo>
+</file>
+
+<file path=ppt/changesInfos/changesInfo1.xml><?xml version="1.0" encoding="utf-8"?>
+<pc:chgInfo xmlns:a="http://schemas.openxmlformats.org/drawingml/2006/main" xmlns:r="http://schemas.openxmlformats.org/officeDocument/2006/relationships" xmlns:ac="http://schemas.microsoft.com/office/drawing/2013/main/command" xmlns:pc="http://schemas.microsoft.com/office/powerpoint/2013/main/command">
+  <pc:docChgLst>
+    <pc:chgData name="Guillermo Jiménez Gómez" userId="e8e1a3bb2d1e013b" providerId="LiveId" clId="{D89A7DD7-180F-40E1-BAAE-0FAC412D3593}"/>
+    <pc:docChg chg="modSld modMainMaster">
+      <pc:chgData name="Guillermo Jiménez Gómez" userId="e8e1a3bb2d1e013b" providerId="LiveId" clId="{D89A7DD7-180F-40E1-BAAE-0FAC412D3593}" dt="2025-06-17T19:27:27.383" v="0"/>
+      <pc:docMkLst>
+        <pc:docMk/>
+      </pc:docMkLst>
+      <pc:sldChg chg="modSp">
+        <pc:chgData name="Guillermo Jiménez Gómez" userId="e8e1a3bb2d1e013b" providerId="LiveId" clId="{D89A7DD7-180F-40E1-BAAE-0FAC412D3593}" dt="2025-06-17T19:27:27.383" v="0"/>
+        <pc:sldMkLst>
+          <pc:docMk/>
+          <pc:sldMk cId="4165610468" sldId="256"/>
+        </pc:sldMkLst>
+        <pc:spChg chg="mod">
+          <ac:chgData name="Guillermo Jiménez Gómez" userId="e8e1a3bb2d1e013b" providerId="LiveId" clId="{D89A7DD7-180F-40E1-BAAE-0FAC412D3593}" dt="2025-06-17T19:27:27.383" v="0"/>
+          <ac:spMkLst>
+            <pc:docMk/>
+            <pc:sldMk cId="4165610468" sldId="256"/>
+            <ac:spMk id="13" creationId="{4C39B6A8-850A-41A7-BC05-141D0CCF0BCC}"/>
+          </ac:spMkLst>
+        </pc:spChg>
+        <pc:spChg chg="mod">
+          <ac:chgData name="Guillermo Jiménez Gómez" userId="e8e1a3bb2d1e013b" providerId="LiveId" clId="{D89A7DD7-180F-40E1-BAAE-0FAC412D3593}" dt="2025-06-17T19:27:27.383" v="0"/>
+          <ac:spMkLst>
+            <pc:docMk/>
+            <pc:sldMk cId="4165610468" sldId="256"/>
+            <ac:spMk id="15" creationId="{85A50674-F36E-4B68-89B8-2390C1A0157E}"/>
+          </ac:spMkLst>
+        </pc:spChg>
+        <pc:spChg chg="mod">
+          <ac:chgData name="Guillermo Jiménez Gómez" userId="e8e1a3bb2d1e013b" providerId="LiveId" clId="{D89A7DD7-180F-40E1-BAAE-0FAC412D3593}" dt="2025-06-17T19:27:27.383" v="0"/>
+          <ac:spMkLst>
+            <pc:docMk/>
+            <pc:sldMk cId="4165610468" sldId="256"/>
+            <ac:spMk id="17" creationId="{4DC4B574-C21F-433D-9C03-EC1981764D48}"/>
+          </ac:spMkLst>
+        </pc:spChg>
+        <pc:spChg chg="mod">
+          <ac:chgData name="Guillermo Jiménez Gómez" userId="e8e1a3bb2d1e013b" providerId="LiveId" clId="{D89A7DD7-180F-40E1-BAAE-0FAC412D3593}" dt="2025-06-17T19:27:27.383" v="0"/>
+          <ac:spMkLst>
+            <pc:docMk/>
+            <pc:sldMk cId="4165610468" sldId="256"/>
+            <ac:spMk id="19" creationId="{B5B16FB0-086A-4F96-853E-504EAB67A9BC}"/>
+          </ac:spMkLst>
+        </pc:spChg>
+        <pc:spChg chg="mod">
+          <ac:chgData name="Guillermo Jiménez Gómez" userId="e8e1a3bb2d1e013b" providerId="LiveId" clId="{D89A7DD7-180F-40E1-BAAE-0FAC412D3593}" dt="2025-06-17T19:27:27.383" v="0"/>
+          <ac:spMkLst>
+            <pc:docMk/>
+            <pc:sldMk cId="4165610468" sldId="256"/>
+            <ac:spMk id="20" creationId="{A03AE3FB-BBBB-4780-BEA0-348ED633AEF9}"/>
+          </ac:spMkLst>
+        </pc:spChg>
+        <pc:picChg chg="mod">
+          <ac:chgData name="Guillermo Jiménez Gómez" userId="e8e1a3bb2d1e013b" providerId="LiveId" clId="{D89A7DD7-180F-40E1-BAAE-0FAC412D3593}" dt="2025-06-17T19:27:27.383" v="0"/>
+          <ac:picMkLst>
+            <pc:docMk/>
+            <pc:sldMk cId="4165610468" sldId="256"/>
+            <ac:picMk id="4" creationId="{50120CE6-BCC7-4F9B-8F8B-947245FEDD2E}"/>
+          </ac:picMkLst>
+        </pc:picChg>
+        <pc:picChg chg="mod">
+          <ac:chgData name="Guillermo Jiménez Gómez" userId="e8e1a3bb2d1e013b" providerId="LiveId" clId="{D89A7DD7-180F-40E1-BAAE-0FAC412D3593}" dt="2025-06-17T19:27:27.383" v="0"/>
+          <ac:picMkLst>
+            <pc:docMk/>
+            <pc:sldMk cId="4165610468" sldId="256"/>
+            <ac:picMk id="5" creationId="{8D408511-F0FC-4365-AA24-3F55CAC94EDA}"/>
+          </ac:picMkLst>
+        </pc:picChg>
+        <pc:picChg chg="mod">
+          <ac:chgData name="Guillermo Jiménez Gómez" userId="e8e1a3bb2d1e013b" providerId="LiveId" clId="{D89A7DD7-180F-40E1-BAAE-0FAC412D3593}" dt="2025-06-17T19:27:27.383" v="0"/>
+          <ac:picMkLst>
+            <pc:docMk/>
+            <pc:sldMk cId="4165610468" sldId="256"/>
+            <ac:picMk id="14" creationId="{22F2DFD6-1608-4203-B9DB-3EDCF7A3D5B6}"/>
+          </ac:picMkLst>
+        </pc:picChg>
+        <pc:picChg chg="mod">
+          <ac:chgData name="Guillermo Jiménez Gómez" userId="e8e1a3bb2d1e013b" providerId="LiveId" clId="{D89A7DD7-180F-40E1-BAAE-0FAC412D3593}" dt="2025-06-17T19:27:27.383" v="0"/>
+          <ac:picMkLst>
+            <pc:docMk/>
+            <pc:sldMk cId="4165610468" sldId="256"/>
+            <ac:picMk id="16" creationId="{CE2FDB39-6F72-464D-8AB2-CD36D7E6D7FF}"/>
+          </ac:picMkLst>
+        </pc:picChg>
+        <pc:picChg chg="mod">
+          <ac:chgData name="Guillermo Jiménez Gómez" userId="e8e1a3bb2d1e013b" providerId="LiveId" clId="{D89A7DD7-180F-40E1-BAAE-0FAC412D3593}" dt="2025-06-17T19:27:27.383" v="0"/>
+          <ac:picMkLst>
+            <pc:docMk/>
+            <pc:sldMk cId="4165610468" sldId="256"/>
+            <ac:picMk id="21" creationId="{4482D245-332C-4A06-9EC6-A0156C6C73D5}"/>
+          </ac:picMkLst>
+        </pc:picChg>
+      </pc:sldChg>
+      <pc:sldMasterChg chg="modSp modSldLayout">
+        <pc:chgData name="Guillermo Jiménez Gómez" userId="e8e1a3bb2d1e013b" providerId="LiveId" clId="{D89A7DD7-180F-40E1-BAAE-0FAC412D3593}" dt="2025-06-17T19:27:27.383" v="0"/>
+        <pc:sldMasterMkLst>
+          <pc:docMk/>
+          <pc:sldMasterMk cId="1007317988" sldId="2147483684"/>
+        </pc:sldMasterMkLst>
+        <pc:spChg chg="mod">
+          <ac:chgData name="Guillermo Jiménez Gómez" userId="e8e1a3bb2d1e013b" providerId="LiveId" clId="{D89A7DD7-180F-40E1-BAAE-0FAC412D3593}" dt="2025-06-17T19:27:27.383" v="0"/>
+          <ac:spMkLst>
+            <pc:docMk/>
+            <pc:sldMasterMk cId="1007317988" sldId="2147483684"/>
+            <ac:spMk id="2" creationId="{B5A41811-CA89-497B-82DD-0031F6949EE2}"/>
+          </ac:spMkLst>
+        </pc:spChg>
+        <pc:spChg chg="mod">
+          <ac:chgData name="Guillermo Jiménez Gómez" userId="e8e1a3bb2d1e013b" providerId="LiveId" clId="{D89A7DD7-180F-40E1-BAAE-0FAC412D3593}" dt="2025-06-17T19:27:27.383" v="0"/>
+          <ac:spMkLst>
+            <pc:docMk/>
+            <pc:sldMasterMk cId="1007317988" sldId="2147483684"/>
+            <ac:spMk id="3" creationId="{89CC98D0-3200-448A-8C23-4F20CA7DD492}"/>
+          </ac:spMkLst>
+        </pc:spChg>
+        <pc:spChg chg="mod">
+          <ac:chgData name="Guillermo Jiménez Gómez" userId="e8e1a3bb2d1e013b" providerId="LiveId" clId="{D89A7DD7-180F-40E1-BAAE-0FAC412D3593}" dt="2025-06-17T19:27:27.383" v="0"/>
+          <ac:spMkLst>
+            <pc:docMk/>
+            <pc:sldMasterMk cId="1007317988" sldId="2147483684"/>
+            <ac:spMk id="4" creationId="{B1CBC678-4BF1-4BE1-A54B-CCBE06B43BA7}"/>
+          </ac:spMkLst>
+        </pc:spChg>
+        <pc:spChg chg="mod">
+          <ac:chgData name="Guillermo Jiménez Gómez" userId="e8e1a3bb2d1e013b" providerId="LiveId" clId="{D89A7DD7-180F-40E1-BAAE-0FAC412D3593}" dt="2025-06-17T19:27:27.383" v="0"/>
+          <ac:spMkLst>
+            <pc:docMk/>
+            <pc:sldMasterMk cId="1007317988" sldId="2147483684"/>
+            <ac:spMk id="5" creationId="{58280666-41A2-4D89-A9C7-B24488FCEEC1}"/>
+          </ac:spMkLst>
+        </pc:spChg>
+        <pc:spChg chg="mod">
+          <ac:chgData name="Guillermo Jiménez Gómez" userId="e8e1a3bb2d1e013b" providerId="LiveId" clId="{D89A7DD7-180F-40E1-BAAE-0FAC412D3593}" dt="2025-06-17T19:27:27.383" v="0"/>
+          <ac:spMkLst>
+            <pc:docMk/>
+            <pc:sldMasterMk cId="1007317988" sldId="2147483684"/>
+            <ac:spMk id="6" creationId="{FA54BF86-CC19-469B-8C51-131DAF583242}"/>
+          </ac:spMkLst>
+        </pc:spChg>
+        <pc:sldLayoutChg chg="modSp">
+          <pc:chgData name="Guillermo Jiménez Gómez" userId="e8e1a3bb2d1e013b" providerId="LiveId" clId="{D89A7DD7-180F-40E1-BAAE-0FAC412D3593}" dt="2025-06-17T19:27:27.383" v="0"/>
+          <pc:sldLayoutMkLst>
+            <pc:docMk/>
+            <pc:sldMasterMk cId="1007317988" sldId="2147483684"/>
+            <pc:sldLayoutMk cId="841368349" sldId="2147483685"/>
+          </pc:sldLayoutMkLst>
+          <pc:spChg chg="mod">
+            <ac:chgData name="Guillermo Jiménez Gómez" userId="e8e1a3bb2d1e013b" providerId="LiveId" clId="{D89A7DD7-180F-40E1-BAAE-0FAC412D3593}" dt="2025-06-17T19:27:27.383" v="0"/>
+            <ac:spMkLst>
+              <pc:docMk/>
+              <pc:sldMasterMk cId="1007317988" sldId="2147483684"/>
+              <pc:sldLayoutMk cId="841368349" sldId="2147483685"/>
+              <ac:spMk id="2" creationId="{98DEBF7A-692B-4EE3-BF7E-EA8EB37C2D5C}"/>
+            </ac:spMkLst>
+          </pc:spChg>
+          <pc:spChg chg="mod">
+            <ac:chgData name="Guillermo Jiménez Gómez" userId="e8e1a3bb2d1e013b" providerId="LiveId" clId="{D89A7DD7-180F-40E1-BAAE-0FAC412D3593}" dt="2025-06-17T19:27:27.383" v="0"/>
+            <ac:spMkLst>
+              <pc:docMk/>
+              <pc:sldMasterMk cId="1007317988" sldId="2147483684"/>
+              <pc:sldLayoutMk cId="841368349" sldId="2147483685"/>
+              <ac:spMk id="3" creationId="{D826EAD4-0760-4C6A-944C-2C2D42D1BA56}"/>
+            </ac:spMkLst>
+          </pc:spChg>
+        </pc:sldLayoutChg>
+        <pc:sldLayoutChg chg="modSp">
+          <pc:chgData name="Guillermo Jiménez Gómez" userId="e8e1a3bb2d1e013b" providerId="LiveId" clId="{D89A7DD7-180F-40E1-BAAE-0FAC412D3593}" dt="2025-06-17T19:27:27.383" v="0"/>
+          <pc:sldLayoutMkLst>
+            <pc:docMk/>
+            <pc:sldMasterMk cId="1007317988" sldId="2147483684"/>
+            <pc:sldLayoutMk cId="2105345998" sldId="2147483687"/>
+          </pc:sldLayoutMkLst>
+          <pc:spChg chg="mod">
+            <ac:chgData name="Guillermo Jiménez Gómez" userId="e8e1a3bb2d1e013b" providerId="LiveId" clId="{D89A7DD7-180F-40E1-BAAE-0FAC412D3593}" dt="2025-06-17T19:27:27.383" v="0"/>
+            <ac:spMkLst>
+              <pc:docMk/>
+              <pc:sldMasterMk cId="1007317988" sldId="2147483684"/>
+              <pc:sldLayoutMk cId="2105345998" sldId="2147483687"/>
+              <ac:spMk id="2" creationId="{72793404-2869-4A86-A0CA-271BC8B33EB0}"/>
+            </ac:spMkLst>
+          </pc:spChg>
+          <pc:spChg chg="mod">
+            <ac:chgData name="Guillermo Jiménez Gómez" userId="e8e1a3bb2d1e013b" providerId="LiveId" clId="{D89A7DD7-180F-40E1-BAAE-0FAC412D3593}" dt="2025-06-17T19:27:27.383" v="0"/>
+            <ac:spMkLst>
+              <pc:docMk/>
+              <pc:sldMasterMk cId="1007317988" sldId="2147483684"/>
+              <pc:sldLayoutMk cId="2105345998" sldId="2147483687"/>
+              <ac:spMk id="3" creationId="{1A33AA1F-C9F0-4143-AB3E-35383B0468F8}"/>
+            </ac:spMkLst>
+          </pc:spChg>
+        </pc:sldLayoutChg>
+        <pc:sldLayoutChg chg="modSp">
+          <pc:chgData name="Guillermo Jiménez Gómez" userId="e8e1a3bb2d1e013b" providerId="LiveId" clId="{D89A7DD7-180F-40E1-BAAE-0FAC412D3593}" dt="2025-06-17T19:27:27.383" v="0"/>
+          <pc:sldLayoutMkLst>
+            <pc:docMk/>
+            <pc:sldMasterMk cId="1007317988" sldId="2147483684"/>
+            <pc:sldLayoutMk cId="967090820" sldId="2147483688"/>
+          </pc:sldLayoutMkLst>
+          <pc:spChg chg="mod">
+            <ac:chgData name="Guillermo Jiménez Gómez" userId="e8e1a3bb2d1e013b" providerId="LiveId" clId="{D89A7DD7-180F-40E1-BAAE-0FAC412D3593}" dt="2025-06-17T19:27:27.383" v="0"/>
+            <ac:spMkLst>
+              <pc:docMk/>
+              <pc:sldMasterMk cId="1007317988" sldId="2147483684"/>
+              <pc:sldLayoutMk cId="967090820" sldId="2147483688"/>
+              <ac:spMk id="3" creationId="{8710DB8C-36C1-47DD-9592-FBEF99DD4BB1}"/>
+            </ac:spMkLst>
+          </pc:spChg>
+          <pc:spChg chg="mod">
+            <ac:chgData name="Guillermo Jiménez Gómez" userId="e8e1a3bb2d1e013b" providerId="LiveId" clId="{D89A7DD7-180F-40E1-BAAE-0FAC412D3593}" dt="2025-06-17T19:27:27.383" v="0"/>
+            <ac:spMkLst>
+              <pc:docMk/>
+              <pc:sldMasterMk cId="1007317988" sldId="2147483684"/>
+              <pc:sldLayoutMk cId="967090820" sldId="2147483688"/>
+              <ac:spMk id="4" creationId="{06161652-958D-4B9D-98E1-1EA8335031BD}"/>
+            </ac:spMkLst>
+          </pc:spChg>
+        </pc:sldLayoutChg>
+        <pc:sldLayoutChg chg="modSp">
+          <pc:chgData name="Guillermo Jiménez Gómez" userId="e8e1a3bb2d1e013b" providerId="LiveId" clId="{D89A7DD7-180F-40E1-BAAE-0FAC412D3593}" dt="2025-06-17T19:27:27.383" v="0"/>
+          <pc:sldLayoutMkLst>
+            <pc:docMk/>
+            <pc:sldMasterMk cId="1007317988" sldId="2147483684"/>
+            <pc:sldLayoutMk cId="897091164" sldId="2147483689"/>
+          </pc:sldLayoutMkLst>
+          <pc:spChg chg="mod">
+            <ac:chgData name="Guillermo Jiménez Gómez" userId="e8e1a3bb2d1e013b" providerId="LiveId" clId="{D89A7DD7-180F-40E1-BAAE-0FAC412D3593}" dt="2025-06-17T19:27:27.383" v="0"/>
+            <ac:spMkLst>
+              <pc:docMk/>
+              <pc:sldMasterMk cId="1007317988" sldId="2147483684"/>
+              <pc:sldLayoutMk cId="897091164" sldId="2147483689"/>
+              <ac:spMk id="2" creationId="{0EDFFABA-0A76-4F21-AC30-47142D12DC78}"/>
+            </ac:spMkLst>
+          </pc:spChg>
+          <pc:spChg chg="mod">
+            <ac:chgData name="Guillermo Jiménez Gómez" userId="e8e1a3bb2d1e013b" providerId="LiveId" clId="{D89A7DD7-180F-40E1-BAAE-0FAC412D3593}" dt="2025-06-17T19:27:27.383" v="0"/>
+            <ac:spMkLst>
+              <pc:docMk/>
+              <pc:sldMasterMk cId="1007317988" sldId="2147483684"/>
+              <pc:sldLayoutMk cId="897091164" sldId="2147483689"/>
+              <ac:spMk id="3" creationId="{93CA08E8-64B5-43EF-A3DE-7A5F2D8E420C}"/>
+            </ac:spMkLst>
+          </pc:spChg>
+          <pc:spChg chg="mod">
+            <ac:chgData name="Guillermo Jiménez Gómez" userId="e8e1a3bb2d1e013b" providerId="LiveId" clId="{D89A7DD7-180F-40E1-BAAE-0FAC412D3593}" dt="2025-06-17T19:27:27.383" v="0"/>
+            <ac:spMkLst>
+              <pc:docMk/>
+              <pc:sldMasterMk cId="1007317988" sldId="2147483684"/>
+              <pc:sldLayoutMk cId="897091164" sldId="2147483689"/>
+              <ac:spMk id="4" creationId="{619EB96A-760A-477C-85F8-112818D1A770}"/>
+            </ac:spMkLst>
+          </pc:spChg>
+          <pc:spChg chg="mod">
+            <ac:chgData name="Guillermo Jiménez Gómez" userId="e8e1a3bb2d1e013b" providerId="LiveId" clId="{D89A7DD7-180F-40E1-BAAE-0FAC412D3593}" dt="2025-06-17T19:27:27.383" v="0"/>
+            <ac:spMkLst>
+              <pc:docMk/>
+              <pc:sldMasterMk cId="1007317988" sldId="2147483684"/>
+              <pc:sldLayoutMk cId="897091164" sldId="2147483689"/>
+              <ac:spMk id="5" creationId="{F8F9B2F0-4572-45EA-BB8D-232709D0BD1D}"/>
+            </ac:spMkLst>
+          </pc:spChg>
+          <pc:spChg chg="mod">
+            <ac:chgData name="Guillermo Jiménez Gómez" userId="e8e1a3bb2d1e013b" providerId="LiveId" clId="{D89A7DD7-180F-40E1-BAAE-0FAC412D3593}" dt="2025-06-17T19:27:27.383" v="0"/>
+            <ac:spMkLst>
+              <pc:docMk/>
+              <pc:sldMasterMk cId="1007317988" sldId="2147483684"/>
+              <pc:sldLayoutMk cId="897091164" sldId="2147483689"/>
+              <ac:spMk id="6" creationId="{9BF3A4DA-5CF0-4457-A579-9828BDF7EC50}"/>
+            </ac:spMkLst>
+          </pc:spChg>
+        </pc:sldLayoutChg>
+        <pc:sldLayoutChg chg="modSp">
+          <pc:chgData name="Guillermo Jiménez Gómez" userId="e8e1a3bb2d1e013b" providerId="LiveId" clId="{D89A7DD7-180F-40E1-BAAE-0FAC412D3593}" dt="2025-06-17T19:27:27.383" v="0"/>
+          <pc:sldLayoutMkLst>
+            <pc:docMk/>
+            <pc:sldMasterMk cId="1007317988" sldId="2147483684"/>
+            <pc:sldLayoutMk cId="2106253331" sldId="2147483692"/>
+          </pc:sldLayoutMkLst>
+          <pc:spChg chg="mod">
+            <ac:chgData name="Guillermo Jiménez Gómez" userId="e8e1a3bb2d1e013b" providerId="LiveId" clId="{D89A7DD7-180F-40E1-BAAE-0FAC412D3593}" dt="2025-06-17T19:27:27.383" v="0"/>
+            <ac:spMkLst>
+              <pc:docMk/>
+              <pc:sldMasterMk cId="1007317988" sldId="2147483684"/>
+              <pc:sldLayoutMk cId="2106253331" sldId="2147483692"/>
+              <ac:spMk id="2" creationId="{43370419-ED70-4B34-A95C-53C85F83735D}"/>
+            </ac:spMkLst>
+          </pc:spChg>
+          <pc:spChg chg="mod">
+            <ac:chgData name="Guillermo Jiménez Gómez" userId="e8e1a3bb2d1e013b" providerId="LiveId" clId="{D89A7DD7-180F-40E1-BAAE-0FAC412D3593}" dt="2025-06-17T19:27:27.383" v="0"/>
+            <ac:spMkLst>
+              <pc:docMk/>
+              <pc:sldMasterMk cId="1007317988" sldId="2147483684"/>
+              <pc:sldLayoutMk cId="2106253331" sldId="2147483692"/>
+              <ac:spMk id="3" creationId="{01F41884-0453-41BB-8C5A-5BB3DACCF630}"/>
+            </ac:spMkLst>
+          </pc:spChg>
+          <pc:spChg chg="mod">
+            <ac:chgData name="Guillermo Jiménez Gómez" userId="e8e1a3bb2d1e013b" providerId="LiveId" clId="{D89A7DD7-180F-40E1-BAAE-0FAC412D3593}" dt="2025-06-17T19:27:27.383" v="0"/>
+            <ac:spMkLst>
+              <pc:docMk/>
+              <pc:sldMasterMk cId="1007317988" sldId="2147483684"/>
+              <pc:sldLayoutMk cId="2106253331" sldId="2147483692"/>
+              <ac:spMk id="4" creationId="{BE046816-C803-45EE-BE0E-A1F9B5CC511C}"/>
+            </ac:spMkLst>
+          </pc:spChg>
+        </pc:sldLayoutChg>
+        <pc:sldLayoutChg chg="modSp">
+          <pc:chgData name="Guillermo Jiménez Gómez" userId="e8e1a3bb2d1e013b" providerId="LiveId" clId="{D89A7DD7-180F-40E1-BAAE-0FAC412D3593}" dt="2025-06-17T19:27:27.383" v="0"/>
+          <pc:sldLayoutMkLst>
+            <pc:docMk/>
+            <pc:sldMasterMk cId="1007317988" sldId="2147483684"/>
+            <pc:sldLayoutMk cId="1211911542" sldId="2147483693"/>
+          </pc:sldLayoutMkLst>
+          <pc:spChg chg="mod">
+            <ac:chgData name="Guillermo Jiménez Gómez" userId="e8e1a3bb2d1e013b" providerId="LiveId" clId="{D89A7DD7-180F-40E1-BAAE-0FAC412D3593}" dt="2025-06-17T19:27:27.383" v="0"/>
+            <ac:spMkLst>
+              <pc:docMk/>
+              <pc:sldMasterMk cId="1007317988" sldId="2147483684"/>
+              <pc:sldLayoutMk cId="1211911542" sldId="2147483693"/>
+              <ac:spMk id="2" creationId="{A00C3876-0D41-483C-81DD-4EAEF2037E9D}"/>
+            </ac:spMkLst>
+          </pc:spChg>
+          <pc:spChg chg="mod">
+            <ac:chgData name="Guillermo Jiménez Gómez" userId="e8e1a3bb2d1e013b" providerId="LiveId" clId="{D89A7DD7-180F-40E1-BAAE-0FAC412D3593}" dt="2025-06-17T19:27:27.383" v="0"/>
+            <ac:spMkLst>
+              <pc:docMk/>
+              <pc:sldMasterMk cId="1007317988" sldId="2147483684"/>
+              <pc:sldLayoutMk cId="1211911542" sldId="2147483693"/>
+              <ac:spMk id="3" creationId="{E92DC8C9-2D6C-46A3-8D75-E959AD4E74E9}"/>
+            </ac:spMkLst>
+          </pc:spChg>
+          <pc:spChg chg="mod">
+            <ac:chgData name="Guillermo Jiménez Gómez" userId="e8e1a3bb2d1e013b" providerId="LiveId" clId="{D89A7DD7-180F-40E1-BAAE-0FAC412D3593}" dt="2025-06-17T19:27:27.383" v="0"/>
+            <ac:spMkLst>
+              <pc:docMk/>
+              <pc:sldMasterMk cId="1007317988" sldId="2147483684"/>
+              <pc:sldLayoutMk cId="1211911542" sldId="2147483693"/>
+              <ac:spMk id="4" creationId="{044CC682-CA7D-4186-8C38-286A7E96618C}"/>
+            </ac:spMkLst>
+          </pc:spChg>
+        </pc:sldLayoutChg>
+        <pc:sldLayoutChg chg="modSp">
+          <pc:chgData name="Guillermo Jiménez Gómez" userId="e8e1a3bb2d1e013b" providerId="LiveId" clId="{D89A7DD7-180F-40E1-BAAE-0FAC412D3593}" dt="2025-06-17T19:27:27.383" v="0"/>
+          <pc:sldLayoutMkLst>
+            <pc:docMk/>
+            <pc:sldMasterMk cId="1007317988" sldId="2147483684"/>
+            <pc:sldLayoutMk cId="871111268" sldId="2147483695"/>
+          </pc:sldLayoutMkLst>
+          <pc:spChg chg="mod">
+            <ac:chgData name="Guillermo Jiménez Gómez" userId="e8e1a3bb2d1e013b" providerId="LiveId" clId="{D89A7DD7-180F-40E1-BAAE-0FAC412D3593}" dt="2025-06-17T19:27:27.383" v="0"/>
+            <ac:spMkLst>
+              <pc:docMk/>
+              <pc:sldMasterMk cId="1007317988" sldId="2147483684"/>
+              <pc:sldLayoutMk cId="871111268" sldId="2147483695"/>
+              <ac:spMk id="2" creationId="{F53469B6-C1C3-4FC1-834B-6B7C6502B6D4}"/>
+            </ac:spMkLst>
+          </pc:spChg>
+          <pc:spChg chg="mod">
+            <ac:chgData name="Guillermo Jiménez Gómez" userId="e8e1a3bb2d1e013b" providerId="LiveId" clId="{D89A7DD7-180F-40E1-BAAE-0FAC412D3593}" dt="2025-06-17T19:27:27.383" v="0"/>
+            <ac:spMkLst>
+              <pc:docMk/>
+              <pc:sldMasterMk cId="1007317988" sldId="2147483684"/>
+              <pc:sldLayoutMk cId="871111268" sldId="2147483695"/>
+              <ac:spMk id="3" creationId="{654BC25C-DE53-4135-9A11-E8DAAB501275}"/>
+            </ac:spMkLst>
+          </pc:spChg>
+        </pc:sldLayoutChg>
+      </pc:sldMasterChg>
+    </pc:docChg>
+  </pc:docChgLst>
+</pc:chgInfo>
 </file>
 
 <file path=ppt/slideLayouts/slideLayout1.xml><?xml version="1.0" encoding="utf-8"?>
@@ -131,13 +514,7 @@
       </p:grpSpPr>
       <p:sp>
         <p:nvSpPr>
-          <p:cNvPr id="2" name="Título 1">
-            <a:extLst>
-              <a:ext uri="{FF2B5EF4-FFF2-40B4-BE49-F238E27FC236}">
-                <a16:creationId xmlns:a16="http://schemas.microsoft.com/office/drawing/2014/main" id="{98DEBF7A-692B-4EE3-BF7E-EA8EB37C2D5C}"/>
-              </a:ext>
-            </a:extLst>
-          </p:cNvPr>
+          <p:cNvPr id="2" name="Title 1"/>
           <p:cNvSpPr>
             <a:spLocks noGrp="1"/>
           </p:cNvSpPr>
@@ -147,34 +524,29 @@
         </p:nvSpPr>
         <p:spPr>
           <a:xfrm>
-            <a:off x="857250" y="1496484"/>
-            <a:ext cx="5143500" cy="3183467"/>
+            <a:off x="2032000" y="1496484"/>
+            <a:ext cx="12192000" cy="3183467"/>
           </a:xfrm>
         </p:spPr>
         <p:txBody>
           <a:bodyPr anchor="b"/>
           <a:lstStyle>
             <a:lvl1pPr algn="ctr">
-              <a:defRPr sz="3375"/>
+              <a:defRPr sz="8000"/>
             </a:lvl1pPr>
           </a:lstStyle>
           <a:p>
             <a:r>
-              <a:rPr lang="es-MX"/>
-              <a:t>Haz clic para modificar el estilo de título del patrón</a:t>
-            </a:r>
-          </a:p>
-        </p:txBody>
-      </p:sp>
-      <p:sp>
-        <p:nvSpPr>
-          <p:cNvPr id="3" name="Subtítulo 2">
-            <a:extLst>
-              <a:ext uri="{FF2B5EF4-FFF2-40B4-BE49-F238E27FC236}">
-                <a16:creationId xmlns:a16="http://schemas.microsoft.com/office/drawing/2014/main" id="{D826EAD4-0760-4C6A-944C-2C2D42D1BA56}"/>
-              </a:ext>
-            </a:extLst>
-          </p:cNvPr>
+              <a:rPr lang="es-ES"/>
+              <a:t>Haga clic para modificar el estilo de título del patrón</a:t>
+            </a:r>
+            <a:endParaRPr lang="en-US" dirty="0"/>
+          </a:p>
+        </p:txBody>
+      </p:sp>
+      <p:sp>
+        <p:nvSpPr>
+          <p:cNvPr id="3" name="Subtitle 2"/>
           <p:cNvSpPr>
             <a:spLocks noGrp="1"/>
           </p:cNvSpPr>
@@ -184,8 +556,8 @@
         </p:nvSpPr>
         <p:spPr>
           <a:xfrm>
-            <a:off x="857250" y="4802717"/>
-            <a:ext cx="5143500" cy="2207683"/>
+            <a:off x="2032000" y="4802717"/>
+            <a:ext cx="12192000" cy="2207683"/>
           </a:xfrm>
         </p:spPr>
         <p:txBody>
@@ -193,58 +565,53 @@
           <a:lstStyle>
             <a:lvl1pPr marL="0" indent="0" algn="ctr">
               <a:buNone/>
-              <a:defRPr sz="1350"/>
+              <a:defRPr sz="3200"/>
             </a:lvl1pPr>
-            <a:lvl2pPr marL="257175" indent="0" algn="ctr">
-              <a:buNone/>
-              <a:defRPr sz="1125"/>
+            <a:lvl2pPr marL="609585" indent="0" algn="ctr">
+              <a:buNone/>
+              <a:defRPr sz="2667"/>
             </a:lvl2pPr>
-            <a:lvl3pPr marL="514350" indent="0" algn="ctr">
-              <a:buNone/>
-              <a:defRPr sz="1013"/>
+            <a:lvl3pPr marL="1219170" indent="0" algn="ctr">
+              <a:buNone/>
+              <a:defRPr sz="2400"/>
             </a:lvl3pPr>
-            <a:lvl4pPr marL="771525" indent="0" algn="ctr">
-              <a:buNone/>
-              <a:defRPr sz="900"/>
+            <a:lvl4pPr marL="1828754" indent="0" algn="ctr">
+              <a:buNone/>
+              <a:defRPr sz="2133"/>
             </a:lvl4pPr>
-            <a:lvl5pPr marL="1028700" indent="0" algn="ctr">
-              <a:buNone/>
-              <a:defRPr sz="900"/>
+            <a:lvl5pPr marL="2438339" indent="0" algn="ctr">
+              <a:buNone/>
+              <a:defRPr sz="2133"/>
             </a:lvl5pPr>
-            <a:lvl6pPr marL="1285875" indent="0" algn="ctr">
-              <a:buNone/>
-              <a:defRPr sz="900"/>
+            <a:lvl6pPr marL="3047924" indent="0" algn="ctr">
+              <a:buNone/>
+              <a:defRPr sz="2133"/>
             </a:lvl6pPr>
-            <a:lvl7pPr marL="1543050" indent="0" algn="ctr">
-              <a:buNone/>
-              <a:defRPr sz="900"/>
+            <a:lvl7pPr marL="3657509" indent="0" algn="ctr">
+              <a:buNone/>
+              <a:defRPr sz="2133"/>
             </a:lvl7pPr>
-            <a:lvl8pPr marL="1800225" indent="0" algn="ctr">
-              <a:buNone/>
-              <a:defRPr sz="900"/>
+            <a:lvl8pPr marL="4267093" indent="0" algn="ctr">
+              <a:buNone/>
+              <a:defRPr sz="2133"/>
             </a:lvl8pPr>
-            <a:lvl9pPr marL="2057400" indent="0" algn="ctr">
-              <a:buNone/>
-              <a:defRPr sz="900"/>
+            <a:lvl9pPr marL="4876678" indent="0" algn="ctr">
+              <a:buNone/>
+              <a:defRPr sz="2133"/>
             </a:lvl9pPr>
           </a:lstStyle>
           <a:p>
             <a:r>
-              <a:rPr lang="es-MX"/>
-              <a:t>Haz clic para editar el estilo de subtítulo del patrón</a:t>
-            </a:r>
-          </a:p>
-        </p:txBody>
-      </p:sp>
-      <p:sp>
-        <p:nvSpPr>
-          <p:cNvPr id="4" name="Marcador de fecha 3">
-            <a:extLst>
-              <a:ext uri="{FF2B5EF4-FFF2-40B4-BE49-F238E27FC236}">
-                <a16:creationId xmlns:a16="http://schemas.microsoft.com/office/drawing/2014/main" id="{7D88EEAE-0F1B-4FF6-9B9B-21872C2251B4}"/>
-              </a:ext>
-            </a:extLst>
-          </p:cNvPr>
+              <a:rPr lang="es-ES"/>
+              <a:t>Haga clic para modificar el estilo de subtítulo del patrón</a:t>
+            </a:r>
+            <a:endParaRPr lang="en-US" dirty="0"/>
+          </a:p>
+        </p:txBody>
+      </p:sp>
+      <p:sp>
+        <p:nvSpPr>
+          <p:cNvPr id="4" name="Date Placeholder 3"/>
           <p:cNvSpPr>
             <a:spLocks noGrp="1"/>
           </p:cNvSpPr>
@@ -259,7 +626,7 @@
           <a:p>
             <a:fld id="{664CB750-BDA0-4B3C-9407-BAF21E562682}" type="datetimeFigureOut">
               <a:rPr lang="es-MX" smtClean="0"/>
-              <a:t>30.04.2025</a:t>
+              <a:t>17/06/2025</a:t>
             </a:fld>
             <a:endParaRPr lang="es-MX"/>
           </a:p>
@@ -267,13 +634,7 @@
       </p:sp>
       <p:sp>
         <p:nvSpPr>
-          <p:cNvPr id="5" name="Marcador de pie de página 4">
-            <a:extLst>
-              <a:ext uri="{FF2B5EF4-FFF2-40B4-BE49-F238E27FC236}">
-                <a16:creationId xmlns:a16="http://schemas.microsoft.com/office/drawing/2014/main" id="{D5CDC0F5-6DA0-4E7A-9EF7-7D8A92BE2D72}"/>
-              </a:ext>
-            </a:extLst>
-          </p:cNvPr>
+          <p:cNvPr id="5" name="Footer Placeholder 4"/>
           <p:cNvSpPr>
             <a:spLocks noGrp="1"/>
           </p:cNvSpPr>
@@ -292,13 +653,7 @@
       </p:sp>
       <p:sp>
         <p:nvSpPr>
-          <p:cNvPr id="6" name="Marcador de número de diapositiva 5">
-            <a:extLst>
-              <a:ext uri="{FF2B5EF4-FFF2-40B4-BE49-F238E27FC236}">
-                <a16:creationId xmlns:a16="http://schemas.microsoft.com/office/drawing/2014/main" id="{56DDABCD-9A6F-40E0-9774-0889ABE01522}"/>
-              </a:ext>
-            </a:extLst>
-          </p:cNvPr>
+          <p:cNvPr id="6" name="Slide Number Placeholder 5"/>
           <p:cNvSpPr>
             <a:spLocks noGrp="1"/>
           </p:cNvSpPr>
@@ -322,7 +677,7 @@
     </p:spTree>
     <p:extLst>
       <p:ext uri="{BB962C8B-B14F-4D97-AF65-F5344CB8AC3E}">
-        <p14:creationId xmlns:p14="http://schemas.microsoft.com/office/powerpoint/2010/main" val="841368349"/>
+        <p14:creationId xmlns:p14="http://schemas.microsoft.com/office/powerpoint/2010/main" val="254058352"/>
       </p:ext>
     </p:extLst>
   </p:cSld>
@@ -351,13 +706,7 @@
       </p:grpSpPr>
       <p:sp>
         <p:nvSpPr>
-          <p:cNvPr id="2" name="Título 1">
-            <a:extLst>
-              <a:ext uri="{FF2B5EF4-FFF2-40B4-BE49-F238E27FC236}">
-                <a16:creationId xmlns:a16="http://schemas.microsoft.com/office/drawing/2014/main" id="{C2CCDB13-0BE6-4E06-BC10-072A60FA0858}"/>
-              </a:ext>
-            </a:extLst>
-          </p:cNvPr>
+          <p:cNvPr id="2" name="Title 1"/>
           <p:cNvSpPr>
             <a:spLocks noGrp="1"/>
           </p:cNvSpPr>
@@ -371,21 +720,16 @@
           <a:lstStyle/>
           <a:p>
             <a:r>
-              <a:rPr lang="es-MX"/>
-              <a:t>Haz clic para modificar el estilo de título del patrón</a:t>
-            </a:r>
-          </a:p>
-        </p:txBody>
-      </p:sp>
-      <p:sp>
-        <p:nvSpPr>
-          <p:cNvPr id="3" name="Marcador de texto vertical 2">
-            <a:extLst>
-              <a:ext uri="{FF2B5EF4-FFF2-40B4-BE49-F238E27FC236}">
-                <a16:creationId xmlns:a16="http://schemas.microsoft.com/office/drawing/2014/main" id="{015E1024-75B0-4EF9-9921-51B0ADB3D918}"/>
-              </a:ext>
-            </a:extLst>
-          </p:cNvPr>
+              <a:rPr lang="es-ES"/>
+              <a:t>Haga clic para modificar el estilo de título del patrón</a:t>
+            </a:r>
+            <a:endParaRPr lang="en-US" dirty="0"/>
+          </a:p>
+        </p:txBody>
+      </p:sp>
+      <p:sp>
+        <p:nvSpPr>
+          <p:cNvPr id="3" name="Vertical Text Placeholder 2"/>
           <p:cNvSpPr>
             <a:spLocks noGrp="1"/>
           </p:cNvSpPr>
@@ -400,49 +744,44 @@
           <a:p>
             <a:pPr lvl="0"/>
             <a:r>
-              <a:rPr lang="es-MX"/>
+              <a:rPr lang="es-ES"/>
               <a:t>Haga clic para modificar los estilos de texto del patrón</a:t>
             </a:r>
           </a:p>
           <a:p>
             <a:pPr lvl="1"/>
             <a:r>
-              <a:rPr lang="es-MX"/>
+              <a:rPr lang="es-ES"/>
               <a:t>Segundo nivel</a:t>
             </a:r>
           </a:p>
           <a:p>
             <a:pPr lvl="2"/>
             <a:r>
-              <a:rPr lang="es-MX"/>
+              <a:rPr lang="es-ES"/>
               <a:t>Tercer nivel</a:t>
             </a:r>
           </a:p>
           <a:p>
             <a:pPr lvl="3"/>
             <a:r>
-              <a:rPr lang="es-MX"/>
+              <a:rPr lang="es-ES"/>
               <a:t>Cuarto nivel</a:t>
             </a:r>
           </a:p>
           <a:p>
             <a:pPr lvl="4"/>
             <a:r>
-              <a:rPr lang="es-MX"/>
+              <a:rPr lang="es-ES"/>
               <a:t>Quinto nivel</a:t>
             </a:r>
-          </a:p>
-        </p:txBody>
-      </p:sp>
-      <p:sp>
-        <p:nvSpPr>
-          <p:cNvPr id="4" name="Marcador de fecha 3">
-            <a:extLst>
-              <a:ext uri="{FF2B5EF4-FFF2-40B4-BE49-F238E27FC236}">
-                <a16:creationId xmlns:a16="http://schemas.microsoft.com/office/drawing/2014/main" id="{7ED65639-BABA-40FF-8F9D-2016ECD3BB43}"/>
-              </a:ext>
-            </a:extLst>
-          </p:cNvPr>
+            <a:endParaRPr lang="en-US" dirty="0"/>
+          </a:p>
+        </p:txBody>
+      </p:sp>
+      <p:sp>
+        <p:nvSpPr>
+          <p:cNvPr id="4" name="Date Placeholder 3"/>
           <p:cNvSpPr>
             <a:spLocks noGrp="1"/>
           </p:cNvSpPr>
@@ -457,7 +796,7 @@
           <a:p>
             <a:fld id="{664CB750-BDA0-4B3C-9407-BAF21E562682}" type="datetimeFigureOut">
               <a:rPr lang="es-MX" smtClean="0"/>
-              <a:t>30.04.2025</a:t>
+              <a:t>17/06/2025</a:t>
             </a:fld>
             <a:endParaRPr lang="es-MX"/>
           </a:p>
@@ -465,13 +804,7 @@
       </p:sp>
       <p:sp>
         <p:nvSpPr>
-          <p:cNvPr id="5" name="Marcador de pie de página 4">
-            <a:extLst>
-              <a:ext uri="{FF2B5EF4-FFF2-40B4-BE49-F238E27FC236}">
-                <a16:creationId xmlns:a16="http://schemas.microsoft.com/office/drawing/2014/main" id="{68E5E570-FB2B-4366-ACC6-3463111D5958}"/>
-              </a:ext>
-            </a:extLst>
-          </p:cNvPr>
+          <p:cNvPr id="5" name="Footer Placeholder 4"/>
           <p:cNvSpPr>
             <a:spLocks noGrp="1"/>
           </p:cNvSpPr>
@@ -490,13 +823,7 @@
       </p:sp>
       <p:sp>
         <p:nvSpPr>
-          <p:cNvPr id="6" name="Marcador de número de diapositiva 5">
-            <a:extLst>
-              <a:ext uri="{FF2B5EF4-FFF2-40B4-BE49-F238E27FC236}">
-                <a16:creationId xmlns:a16="http://schemas.microsoft.com/office/drawing/2014/main" id="{E45A205C-AF50-41ED-BD3D-F0768E5C5720}"/>
-              </a:ext>
-            </a:extLst>
-          </p:cNvPr>
+          <p:cNvPr id="6" name="Slide Number Placeholder 5"/>
           <p:cNvSpPr>
             <a:spLocks noGrp="1"/>
           </p:cNvSpPr>
@@ -520,7 +847,7 @@
     </p:spTree>
     <p:extLst>
       <p:ext uri="{BB962C8B-B14F-4D97-AF65-F5344CB8AC3E}">
-        <p14:creationId xmlns:p14="http://schemas.microsoft.com/office/powerpoint/2010/main" val="2913440702"/>
+        <p14:creationId xmlns:p14="http://schemas.microsoft.com/office/powerpoint/2010/main" val="2352058566"/>
       </p:ext>
     </p:extLst>
   </p:cSld>
@@ -549,13 +876,7 @@
       </p:grpSpPr>
       <p:sp>
         <p:nvSpPr>
-          <p:cNvPr id="2" name="Título vertical 1">
-            <a:extLst>
-              <a:ext uri="{FF2B5EF4-FFF2-40B4-BE49-F238E27FC236}">
-                <a16:creationId xmlns:a16="http://schemas.microsoft.com/office/drawing/2014/main" id="{F53469B6-C1C3-4FC1-834B-6B7C6502B6D4}"/>
-              </a:ext>
-            </a:extLst>
-          </p:cNvPr>
+          <p:cNvPr id="2" name="Vertical Title 1"/>
           <p:cNvSpPr>
             <a:spLocks noGrp="1"/>
           </p:cNvSpPr>
@@ -565,8 +886,8 @@
         </p:nvSpPr>
         <p:spPr>
           <a:xfrm>
-            <a:off x="4907756" y="486834"/>
-            <a:ext cx="1478756" cy="7749117"/>
+            <a:off x="11633200" y="486834"/>
+            <a:ext cx="3505200" cy="7749117"/>
           </a:xfrm>
         </p:spPr>
         <p:txBody>
@@ -574,21 +895,16 @@
           <a:lstStyle/>
           <a:p>
             <a:r>
-              <a:rPr lang="es-MX"/>
-              <a:t>Haz clic para modificar el estilo de título del patrón</a:t>
-            </a:r>
-          </a:p>
-        </p:txBody>
-      </p:sp>
-      <p:sp>
-        <p:nvSpPr>
-          <p:cNvPr id="3" name="Marcador de texto vertical 2">
-            <a:extLst>
-              <a:ext uri="{FF2B5EF4-FFF2-40B4-BE49-F238E27FC236}">
-                <a16:creationId xmlns:a16="http://schemas.microsoft.com/office/drawing/2014/main" id="{654BC25C-DE53-4135-9A11-E8DAAB501275}"/>
-              </a:ext>
-            </a:extLst>
-          </p:cNvPr>
+              <a:rPr lang="es-ES"/>
+              <a:t>Haga clic para modificar el estilo de título del patrón</a:t>
+            </a:r>
+            <a:endParaRPr lang="en-US" dirty="0"/>
+          </a:p>
+        </p:txBody>
+      </p:sp>
+      <p:sp>
+        <p:nvSpPr>
+          <p:cNvPr id="3" name="Vertical Text Placeholder 2"/>
           <p:cNvSpPr>
             <a:spLocks noGrp="1"/>
           </p:cNvSpPr>
@@ -598,8 +914,8 @@
         </p:nvSpPr>
         <p:spPr>
           <a:xfrm>
-            <a:off x="471487" y="486834"/>
-            <a:ext cx="4350544" cy="7749117"/>
+            <a:off x="1117600" y="486834"/>
+            <a:ext cx="10312400" cy="7749117"/>
           </a:xfrm>
         </p:spPr>
         <p:txBody>
@@ -608,49 +924,44 @@
           <a:p>
             <a:pPr lvl="0"/>
             <a:r>
-              <a:rPr lang="es-MX"/>
+              <a:rPr lang="es-ES"/>
               <a:t>Haga clic para modificar los estilos de texto del patrón</a:t>
             </a:r>
           </a:p>
           <a:p>
             <a:pPr lvl="1"/>
             <a:r>
-              <a:rPr lang="es-MX"/>
+              <a:rPr lang="es-ES"/>
               <a:t>Segundo nivel</a:t>
             </a:r>
           </a:p>
           <a:p>
             <a:pPr lvl="2"/>
             <a:r>
-              <a:rPr lang="es-MX"/>
+              <a:rPr lang="es-ES"/>
               <a:t>Tercer nivel</a:t>
             </a:r>
           </a:p>
           <a:p>
             <a:pPr lvl="3"/>
             <a:r>
-              <a:rPr lang="es-MX"/>
+              <a:rPr lang="es-ES"/>
               <a:t>Cuarto nivel</a:t>
             </a:r>
           </a:p>
           <a:p>
             <a:pPr lvl="4"/>
             <a:r>
-              <a:rPr lang="es-MX"/>
+              <a:rPr lang="es-ES"/>
               <a:t>Quinto nivel</a:t>
             </a:r>
-          </a:p>
-        </p:txBody>
-      </p:sp>
-      <p:sp>
-        <p:nvSpPr>
-          <p:cNvPr id="4" name="Marcador de fecha 3">
-            <a:extLst>
-              <a:ext uri="{FF2B5EF4-FFF2-40B4-BE49-F238E27FC236}">
-                <a16:creationId xmlns:a16="http://schemas.microsoft.com/office/drawing/2014/main" id="{961FF186-9FE1-46E0-9B9A-192C4AFDABA6}"/>
-              </a:ext>
-            </a:extLst>
-          </p:cNvPr>
+            <a:endParaRPr lang="en-US" dirty="0"/>
+          </a:p>
+        </p:txBody>
+      </p:sp>
+      <p:sp>
+        <p:nvSpPr>
+          <p:cNvPr id="4" name="Date Placeholder 3"/>
           <p:cNvSpPr>
             <a:spLocks noGrp="1"/>
           </p:cNvSpPr>
@@ -665,7 +976,7 @@
           <a:p>
             <a:fld id="{664CB750-BDA0-4B3C-9407-BAF21E562682}" type="datetimeFigureOut">
               <a:rPr lang="es-MX" smtClean="0"/>
-              <a:t>30.04.2025</a:t>
+              <a:t>17/06/2025</a:t>
             </a:fld>
             <a:endParaRPr lang="es-MX"/>
           </a:p>
@@ -673,13 +984,7 @@
       </p:sp>
       <p:sp>
         <p:nvSpPr>
-          <p:cNvPr id="5" name="Marcador de pie de página 4">
-            <a:extLst>
-              <a:ext uri="{FF2B5EF4-FFF2-40B4-BE49-F238E27FC236}">
-                <a16:creationId xmlns:a16="http://schemas.microsoft.com/office/drawing/2014/main" id="{0CFF2CE4-A938-4649-AC7A-43FB7AC19A9D}"/>
-              </a:ext>
-            </a:extLst>
-          </p:cNvPr>
+          <p:cNvPr id="5" name="Footer Placeholder 4"/>
           <p:cNvSpPr>
             <a:spLocks noGrp="1"/>
           </p:cNvSpPr>
@@ -698,13 +1003,7 @@
       </p:sp>
       <p:sp>
         <p:nvSpPr>
-          <p:cNvPr id="6" name="Marcador de número de diapositiva 5">
-            <a:extLst>
-              <a:ext uri="{FF2B5EF4-FFF2-40B4-BE49-F238E27FC236}">
-                <a16:creationId xmlns:a16="http://schemas.microsoft.com/office/drawing/2014/main" id="{835FF8C9-E460-43B1-8E12-7E46A5180C31}"/>
-              </a:ext>
-            </a:extLst>
-          </p:cNvPr>
+          <p:cNvPr id="6" name="Slide Number Placeholder 5"/>
           <p:cNvSpPr>
             <a:spLocks noGrp="1"/>
           </p:cNvSpPr>
@@ -728,7 +1027,7 @@
     </p:spTree>
     <p:extLst>
       <p:ext uri="{BB962C8B-B14F-4D97-AF65-F5344CB8AC3E}">
-        <p14:creationId xmlns:p14="http://schemas.microsoft.com/office/powerpoint/2010/main" val="871111268"/>
+        <p14:creationId xmlns:p14="http://schemas.microsoft.com/office/powerpoint/2010/main" val="1529322817"/>
       </p:ext>
     </p:extLst>
   </p:cSld>
@@ -757,13 +1056,7 @@
       </p:grpSpPr>
       <p:sp>
         <p:nvSpPr>
-          <p:cNvPr id="2" name="Título 1">
-            <a:extLst>
-              <a:ext uri="{FF2B5EF4-FFF2-40B4-BE49-F238E27FC236}">
-                <a16:creationId xmlns:a16="http://schemas.microsoft.com/office/drawing/2014/main" id="{23D87F3E-CA6E-4755-ACC0-2AC8541D64DE}"/>
-              </a:ext>
-            </a:extLst>
-          </p:cNvPr>
+          <p:cNvPr id="2" name="Title 1"/>
           <p:cNvSpPr>
             <a:spLocks noGrp="1"/>
           </p:cNvSpPr>
@@ -777,21 +1070,16 @@
           <a:lstStyle/>
           <a:p>
             <a:r>
-              <a:rPr lang="es-MX"/>
-              <a:t>Haz clic para modificar el estilo de título del patrón</a:t>
-            </a:r>
-          </a:p>
-        </p:txBody>
-      </p:sp>
-      <p:sp>
-        <p:nvSpPr>
-          <p:cNvPr id="3" name="Marcador de contenido 2">
-            <a:extLst>
-              <a:ext uri="{FF2B5EF4-FFF2-40B4-BE49-F238E27FC236}">
-                <a16:creationId xmlns:a16="http://schemas.microsoft.com/office/drawing/2014/main" id="{30D89490-1969-4984-BFF0-867034080ACD}"/>
-              </a:ext>
-            </a:extLst>
-          </p:cNvPr>
+              <a:rPr lang="es-ES"/>
+              <a:t>Haga clic para modificar el estilo de título del patrón</a:t>
+            </a:r>
+            <a:endParaRPr lang="en-US" dirty="0"/>
+          </a:p>
+        </p:txBody>
+      </p:sp>
+      <p:sp>
+        <p:nvSpPr>
+          <p:cNvPr id="3" name="Content Placeholder 2"/>
           <p:cNvSpPr>
             <a:spLocks noGrp="1"/>
           </p:cNvSpPr>
@@ -806,49 +1094,44 @@
           <a:p>
             <a:pPr lvl="0"/>
             <a:r>
-              <a:rPr lang="es-MX"/>
+              <a:rPr lang="es-ES"/>
               <a:t>Haga clic para modificar los estilos de texto del patrón</a:t>
             </a:r>
           </a:p>
           <a:p>
             <a:pPr lvl="1"/>
             <a:r>
-              <a:rPr lang="es-MX"/>
+              <a:rPr lang="es-ES"/>
               <a:t>Segundo nivel</a:t>
             </a:r>
           </a:p>
           <a:p>
             <a:pPr lvl="2"/>
             <a:r>
-              <a:rPr lang="es-MX"/>
+              <a:rPr lang="es-ES"/>
               <a:t>Tercer nivel</a:t>
             </a:r>
           </a:p>
           <a:p>
             <a:pPr lvl="3"/>
             <a:r>
-              <a:rPr lang="es-MX"/>
+              <a:rPr lang="es-ES"/>
               <a:t>Cuarto nivel</a:t>
             </a:r>
           </a:p>
           <a:p>
             <a:pPr lvl="4"/>
             <a:r>
-              <a:rPr lang="es-MX"/>
+              <a:rPr lang="es-ES"/>
               <a:t>Quinto nivel</a:t>
             </a:r>
-          </a:p>
-        </p:txBody>
-      </p:sp>
-      <p:sp>
-        <p:nvSpPr>
-          <p:cNvPr id="4" name="Marcador de fecha 3">
-            <a:extLst>
-              <a:ext uri="{FF2B5EF4-FFF2-40B4-BE49-F238E27FC236}">
-                <a16:creationId xmlns:a16="http://schemas.microsoft.com/office/drawing/2014/main" id="{881F3E39-BFFD-4885-9E34-114DE75D924A}"/>
-              </a:ext>
-            </a:extLst>
-          </p:cNvPr>
+            <a:endParaRPr lang="en-US" dirty="0"/>
+          </a:p>
+        </p:txBody>
+      </p:sp>
+      <p:sp>
+        <p:nvSpPr>
+          <p:cNvPr id="4" name="Date Placeholder 3"/>
           <p:cNvSpPr>
             <a:spLocks noGrp="1"/>
           </p:cNvSpPr>
@@ -863,7 +1146,7 @@
           <a:p>
             <a:fld id="{664CB750-BDA0-4B3C-9407-BAF21E562682}" type="datetimeFigureOut">
               <a:rPr lang="es-MX" smtClean="0"/>
-              <a:t>30.04.2025</a:t>
+              <a:t>17/06/2025</a:t>
             </a:fld>
             <a:endParaRPr lang="es-MX"/>
           </a:p>
@@ -871,13 +1154,7 @@
       </p:sp>
       <p:sp>
         <p:nvSpPr>
-          <p:cNvPr id="5" name="Marcador de pie de página 4">
-            <a:extLst>
-              <a:ext uri="{FF2B5EF4-FFF2-40B4-BE49-F238E27FC236}">
-                <a16:creationId xmlns:a16="http://schemas.microsoft.com/office/drawing/2014/main" id="{F497BE5D-9393-4F4F-B700-A0CAD38ABAAC}"/>
-              </a:ext>
-            </a:extLst>
-          </p:cNvPr>
+          <p:cNvPr id="5" name="Footer Placeholder 4"/>
           <p:cNvSpPr>
             <a:spLocks noGrp="1"/>
           </p:cNvSpPr>
@@ -896,13 +1173,7 @@
       </p:sp>
       <p:sp>
         <p:nvSpPr>
-          <p:cNvPr id="6" name="Marcador de número de diapositiva 5">
-            <a:extLst>
-              <a:ext uri="{FF2B5EF4-FFF2-40B4-BE49-F238E27FC236}">
-                <a16:creationId xmlns:a16="http://schemas.microsoft.com/office/drawing/2014/main" id="{A16AF07F-CE4B-4118-A3A7-AB16BAED7544}"/>
-              </a:ext>
-            </a:extLst>
-          </p:cNvPr>
+          <p:cNvPr id="6" name="Slide Number Placeholder 5"/>
           <p:cNvSpPr>
             <a:spLocks noGrp="1"/>
           </p:cNvSpPr>
@@ -926,7 +1197,7 @@
     </p:spTree>
     <p:extLst>
       <p:ext uri="{BB962C8B-B14F-4D97-AF65-F5344CB8AC3E}">
-        <p14:creationId xmlns:p14="http://schemas.microsoft.com/office/powerpoint/2010/main" val="1619596288"/>
+        <p14:creationId xmlns:p14="http://schemas.microsoft.com/office/powerpoint/2010/main" val="745167728"/>
       </p:ext>
     </p:extLst>
   </p:cSld>
@@ -955,13 +1226,7 @@
       </p:grpSpPr>
       <p:sp>
         <p:nvSpPr>
-          <p:cNvPr id="2" name="Título 1">
-            <a:extLst>
-              <a:ext uri="{FF2B5EF4-FFF2-40B4-BE49-F238E27FC236}">
-                <a16:creationId xmlns:a16="http://schemas.microsoft.com/office/drawing/2014/main" id="{72793404-2869-4A86-A0CA-271BC8B33EB0}"/>
-              </a:ext>
-            </a:extLst>
-          </p:cNvPr>
+          <p:cNvPr id="2" name="Title 1"/>
           <p:cNvSpPr>
             <a:spLocks noGrp="1"/>
           </p:cNvSpPr>
@@ -971,34 +1236,29 @@
         </p:nvSpPr>
         <p:spPr>
           <a:xfrm>
-            <a:off x="467916" y="2279652"/>
-            <a:ext cx="5915025" cy="3803649"/>
+            <a:off x="1109133" y="2279652"/>
+            <a:ext cx="14020800" cy="3803649"/>
           </a:xfrm>
         </p:spPr>
         <p:txBody>
           <a:bodyPr anchor="b"/>
           <a:lstStyle>
             <a:lvl1pPr>
-              <a:defRPr sz="3375"/>
+              <a:defRPr sz="8000"/>
             </a:lvl1pPr>
           </a:lstStyle>
           <a:p>
             <a:r>
-              <a:rPr lang="es-MX"/>
-              <a:t>Haz clic para modificar el estilo de título del patrón</a:t>
-            </a:r>
-          </a:p>
-        </p:txBody>
-      </p:sp>
-      <p:sp>
-        <p:nvSpPr>
-          <p:cNvPr id="3" name="Marcador de texto 2">
-            <a:extLst>
-              <a:ext uri="{FF2B5EF4-FFF2-40B4-BE49-F238E27FC236}">
-                <a16:creationId xmlns:a16="http://schemas.microsoft.com/office/drawing/2014/main" id="{1A33AA1F-C9F0-4143-AB3E-35383B0468F8}"/>
-              </a:ext>
-            </a:extLst>
-          </p:cNvPr>
+              <a:rPr lang="es-ES"/>
+              <a:t>Haga clic para modificar el estilo de título del patrón</a:t>
+            </a:r>
+            <a:endParaRPr lang="en-US" dirty="0"/>
+          </a:p>
+        </p:txBody>
+      </p:sp>
+      <p:sp>
+        <p:nvSpPr>
+          <p:cNvPr id="3" name="Text Placeholder 2"/>
           <p:cNvSpPr>
             <a:spLocks noGrp="1"/>
           </p:cNvSpPr>
@@ -1008,8 +1268,8 @@
         </p:nvSpPr>
         <p:spPr>
           <a:xfrm>
-            <a:off x="467916" y="6119285"/>
-            <a:ext cx="5915025" cy="2000249"/>
+            <a:off x="1109133" y="6119285"/>
+            <a:ext cx="14020800" cy="2000249"/>
           </a:xfrm>
         </p:spPr>
         <p:txBody>
@@ -1017,7 +1277,7 @@
           <a:lstStyle>
             <a:lvl1pPr marL="0" indent="0">
               <a:buNone/>
-              <a:defRPr sz="1350">
+              <a:defRPr sz="3200">
                 <a:solidFill>
                   <a:schemeClr val="tx1">
                     <a:tint val="75000"/>
@@ -1025,9 +1285,9 @@
                 </a:solidFill>
               </a:defRPr>
             </a:lvl1pPr>
-            <a:lvl2pPr marL="257175" indent="0">
-              <a:buNone/>
-              <a:defRPr sz="1125">
+            <a:lvl2pPr marL="609585" indent="0">
+              <a:buNone/>
+              <a:defRPr sz="2667">
                 <a:solidFill>
                   <a:schemeClr val="tx1">
                     <a:tint val="75000"/>
@@ -1035,9 +1295,9 @@
                 </a:solidFill>
               </a:defRPr>
             </a:lvl2pPr>
-            <a:lvl3pPr marL="514350" indent="0">
-              <a:buNone/>
-              <a:defRPr sz="1013">
+            <a:lvl3pPr marL="1219170" indent="0">
+              <a:buNone/>
+              <a:defRPr sz="2400">
                 <a:solidFill>
                   <a:schemeClr val="tx1">
                     <a:tint val="75000"/>
@@ -1045,9 +1305,9 @@
                 </a:solidFill>
               </a:defRPr>
             </a:lvl3pPr>
-            <a:lvl4pPr marL="771525" indent="0">
-              <a:buNone/>
-              <a:defRPr sz="900">
+            <a:lvl4pPr marL="1828754" indent="0">
+              <a:buNone/>
+              <a:defRPr sz="2133">
                 <a:solidFill>
                   <a:schemeClr val="tx1">
                     <a:tint val="75000"/>
@@ -1055,9 +1315,9 @@
                 </a:solidFill>
               </a:defRPr>
             </a:lvl4pPr>
-            <a:lvl5pPr marL="1028700" indent="0">
-              <a:buNone/>
-              <a:defRPr sz="900">
+            <a:lvl5pPr marL="2438339" indent="0">
+              <a:buNone/>
+              <a:defRPr sz="2133">
                 <a:solidFill>
                   <a:schemeClr val="tx1">
                     <a:tint val="75000"/>
@@ -1065,9 +1325,9 @@
                 </a:solidFill>
               </a:defRPr>
             </a:lvl5pPr>
-            <a:lvl6pPr marL="1285875" indent="0">
-              <a:buNone/>
-              <a:defRPr sz="900">
+            <a:lvl6pPr marL="3047924" indent="0">
+              <a:buNone/>
+              <a:defRPr sz="2133">
                 <a:solidFill>
                   <a:schemeClr val="tx1">
                     <a:tint val="75000"/>
@@ -1075,9 +1335,9 @@
                 </a:solidFill>
               </a:defRPr>
             </a:lvl6pPr>
-            <a:lvl7pPr marL="1543050" indent="0">
-              <a:buNone/>
-              <a:defRPr sz="900">
+            <a:lvl7pPr marL="3657509" indent="0">
+              <a:buNone/>
+              <a:defRPr sz="2133">
                 <a:solidFill>
                   <a:schemeClr val="tx1">
                     <a:tint val="75000"/>
@@ -1085,9 +1345,9 @@
                 </a:solidFill>
               </a:defRPr>
             </a:lvl7pPr>
-            <a:lvl8pPr marL="1800225" indent="0">
-              <a:buNone/>
-              <a:defRPr sz="900">
+            <a:lvl8pPr marL="4267093" indent="0">
+              <a:buNone/>
+              <a:defRPr sz="2133">
                 <a:solidFill>
                   <a:schemeClr val="tx1">
                     <a:tint val="75000"/>
@@ -1095,9 +1355,9 @@
                 </a:solidFill>
               </a:defRPr>
             </a:lvl8pPr>
-            <a:lvl9pPr marL="2057400" indent="0">
-              <a:buNone/>
-              <a:defRPr sz="900">
+            <a:lvl9pPr marL="4876678" indent="0">
+              <a:buNone/>
+              <a:defRPr sz="2133">
                 <a:solidFill>
                   <a:schemeClr val="tx1">
                     <a:tint val="75000"/>
@@ -1109,7 +1369,7 @@
           <a:p>
             <a:pPr lvl="0"/>
             <a:r>
-              <a:rPr lang="es-MX"/>
+              <a:rPr lang="es-ES"/>
               <a:t>Haga clic para modificar los estilos de texto del patrón</a:t>
             </a:r>
           </a:p>
@@ -1117,13 +1377,7 @@
       </p:sp>
       <p:sp>
         <p:nvSpPr>
-          <p:cNvPr id="4" name="Marcador de fecha 3">
-            <a:extLst>
-              <a:ext uri="{FF2B5EF4-FFF2-40B4-BE49-F238E27FC236}">
-                <a16:creationId xmlns:a16="http://schemas.microsoft.com/office/drawing/2014/main" id="{2D2BEBA4-9FFB-4BF0-A026-4816B56F0FB1}"/>
-              </a:ext>
-            </a:extLst>
-          </p:cNvPr>
+          <p:cNvPr id="4" name="Date Placeholder 3"/>
           <p:cNvSpPr>
             <a:spLocks noGrp="1"/>
           </p:cNvSpPr>
@@ -1138,7 +1392,7 @@
           <a:p>
             <a:fld id="{664CB750-BDA0-4B3C-9407-BAF21E562682}" type="datetimeFigureOut">
               <a:rPr lang="es-MX" smtClean="0"/>
-              <a:t>30.04.2025</a:t>
+              <a:t>17/06/2025</a:t>
             </a:fld>
             <a:endParaRPr lang="es-MX"/>
           </a:p>
@@ -1146,13 +1400,7 @@
       </p:sp>
       <p:sp>
         <p:nvSpPr>
-          <p:cNvPr id="5" name="Marcador de pie de página 4">
-            <a:extLst>
-              <a:ext uri="{FF2B5EF4-FFF2-40B4-BE49-F238E27FC236}">
-                <a16:creationId xmlns:a16="http://schemas.microsoft.com/office/drawing/2014/main" id="{C9F67B1C-19CE-4F64-9542-9DCE7A606DFB}"/>
-              </a:ext>
-            </a:extLst>
-          </p:cNvPr>
+          <p:cNvPr id="5" name="Footer Placeholder 4"/>
           <p:cNvSpPr>
             <a:spLocks noGrp="1"/>
           </p:cNvSpPr>
@@ -1171,13 +1419,7 @@
       </p:sp>
       <p:sp>
         <p:nvSpPr>
-          <p:cNvPr id="6" name="Marcador de número de diapositiva 5">
-            <a:extLst>
-              <a:ext uri="{FF2B5EF4-FFF2-40B4-BE49-F238E27FC236}">
-                <a16:creationId xmlns:a16="http://schemas.microsoft.com/office/drawing/2014/main" id="{963353A3-9548-43DE-8CD9-6DB5A38FF969}"/>
-              </a:ext>
-            </a:extLst>
-          </p:cNvPr>
+          <p:cNvPr id="6" name="Slide Number Placeholder 5"/>
           <p:cNvSpPr>
             <a:spLocks noGrp="1"/>
           </p:cNvSpPr>
@@ -1201,7 +1443,7 @@
     </p:spTree>
     <p:extLst>
       <p:ext uri="{BB962C8B-B14F-4D97-AF65-F5344CB8AC3E}">
-        <p14:creationId xmlns:p14="http://schemas.microsoft.com/office/powerpoint/2010/main" val="2105345998"/>
+        <p14:creationId xmlns:p14="http://schemas.microsoft.com/office/powerpoint/2010/main" val="2754909802"/>
       </p:ext>
     </p:extLst>
   </p:cSld>
@@ -1230,13 +1472,7 @@
       </p:grpSpPr>
       <p:sp>
         <p:nvSpPr>
-          <p:cNvPr id="2" name="Título 1">
-            <a:extLst>
-              <a:ext uri="{FF2B5EF4-FFF2-40B4-BE49-F238E27FC236}">
-                <a16:creationId xmlns:a16="http://schemas.microsoft.com/office/drawing/2014/main" id="{C29C15A4-D02F-4F43-A86F-ECD796C828C1}"/>
-              </a:ext>
-            </a:extLst>
-          </p:cNvPr>
+          <p:cNvPr id="2" name="Title 1"/>
           <p:cNvSpPr>
             <a:spLocks noGrp="1"/>
           </p:cNvSpPr>
@@ -1250,21 +1486,16 @@
           <a:lstStyle/>
           <a:p>
             <a:r>
-              <a:rPr lang="es-MX"/>
-              <a:t>Haz clic para modificar el estilo de título del patrón</a:t>
-            </a:r>
-          </a:p>
-        </p:txBody>
-      </p:sp>
-      <p:sp>
-        <p:nvSpPr>
-          <p:cNvPr id="3" name="Marcador de contenido 2">
-            <a:extLst>
-              <a:ext uri="{FF2B5EF4-FFF2-40B4-BE49-F238E27FC236}">
-                <a16:creationId xmlns:a16="http://schemas.microsoft.com/office/drawing/2014/main" id="{8710DB8C-36C1-47DD-9592-FBEF99DD4BB1}"/>
-              </a:ext>
-            </a:extLst>
-          </p:cNvPr>
+              <a:rPr lang="es-ES"/>
+              <a:t>Haga clic para modificar el estilo de título del patrón</a:t>
+            </a:r>
+            <a:endParaRPr lang="en-US" dirty="0"/>
+          </a:p>
+        </p:txBody>
+      </p:sp>
+      <p:sp>
+        <p:nvSpPr>
+          <p:cNvPr id="3" name="Content Placeholder 2"/>
           <p:cNvSpPr>
             <a:spLocks noGrp="1"/>
           </p:cNvSpPr>
@@ -1274,8 +1505,8 @@
         </p:nvSpPr>
         <p:spPr>
           <a:xfrm>
-            <a:off x="471488" y="2434167"/>
-            <a:ext cx="2914650" cy="5801784"/>
+            <a:off x="1117600" y="2434167"/>
+            <a:ext cx="6908800" cy="5801784"/>
           </a:xfrm>
         </p:spPr>
         <p:txBody>
@@ -1284,49 +1515,44 @@
           <a:p>
             <a:pPr lvl="0"/>
             <a:r>
-              <a:rPr lang="es-MX"/>
+              <a:rPr lang="es-ES"/>
               <a:t>Haga clic para modificar los estilos de texto del patrón</a:t>
             </a:r>
           </a:p>
           <a:p>
             <a:pPr lvl="1"/>
             <a:r>
-              <a:rPr lang="es-MX"/>
+              <a:rPr lang="es-ES"/>
               <a:t>Segundo nivel</a:t>
             </a:r>
           </a:p>
           <a:p>
             <a:pPr lvl="2"/>
             <a:r>
-              <a:rPr lang="es-MX"/>
+              <a:rPr lang="es-ES"/>
               <a:t>Tercer nivel</a:t>
             </a:r>
           </a:p>
           <a:p>
             <a:pPr lvl="3"/>
             <a:r>
-              <a:rPr lang="es-MX"/>
+              <a:rPr lang="es-ES"/>
               <a:t>Cuarto nivel</a:t>
             </a:r>
           </a:p>
           <a:p>
             <a:pPr lvl="4"/>
             <a:r>
-              <a:rPr lang="es-MX"/>
+              <a:rPr lang="es-ES"/>
               <a:t>Quinto nivel</a:t>
             </a:r>
-          </a:p>
-        </p:txBody>
-      </p:sp>
-      <p:sp>
-        <p:nvSpPr>
-          <p:cNvPr id="4" name="Marcador de contenido 3">
-            <a:extLst>
-              <a:ext uri="{FF2B5EF4-FFF2-40B4-BE49-F238E27FC236}">
-                <a16:creationId xmlns:a16="http://schemas.microsoft.com/office/drawing/2014/main" id="{06161652-958D-4B9D-98E1-1EA8335031BD}"/>
-              </a:ext>
-            </a:extLst>
-          </p:cNvPr>
+            <a:endParaRPr lang="en-US" dirty="0"/>
+          </a:p>
+        </p:txBody>
+      </p:sp>
+      <p:sp>
+        <p:nvSpPr>
+          <p:cNvPr id="4" name="Content Placeholder 3"/>
           <p:cNvSpPr>
             <a:spLocks noGrp="1"/>
           </p:cNvSpPr>
@@ -1336,8 +1562,8 @@
         </p:nvSpPr>
         <p:spPr>
           <a:xfrm>
-            <a:off x="3471863" y="2434167"/>
-            <a:ext cx="2914650" cy="5801784"/>
+            <a:off x="8229600" y="2434167"/>
+            <a:ext cx="6908800" cy="5801784"/>
           </a:xfrm>
         </p:spPr>
         <p:txBody>
@@ -1346,49 +1572,44 @@
           <a:p>
             <a:pPr lvl="0"/>
             <a:r>
-              <a:rPr lang="es-MX"/>
+              <a:rPr lang="es-ES"/>
               <a:t>Haga clic para modificar los estilos de texto del patrón</a:t>
             </a:r>
           </a:p>
           <a:p>
             <a:pPr lvl="1"/>
             <a:r>
-              <a:rPr lang="es-MX"/>
+              <a:rPr lang="es-ES"/>
               <a:t>Segundo nivel</a:t>
             </a:r>
           </a:p>
           <a:p>
             <a:pPr lvl="2"/>
             <a:r>
-              <a:rPr lang="es-MX"/>
+              <a:rPr lang="es-ES"/>
               <a:t>Tercer nivel</a:t>
             </a:r>
           </a:p>
           <a:p>
             <a:pPr lvl="3"/>
             <a:r>
-              <a:rPr lang="es-MX"/>
+              <a:rPr lang="es-ES"/>
               <a:t>Cuarto nivel</a:t>
             </a:r>
           </a:p>
           <a:p>
             <a:pPr lvl="4"/>
             <a:r>
-              <a:rPr lang="es-MX"/>
+              <a:rPr lang="es-ES"/>
               <a:t>Quinto nivel</a:t>
             </a:r>
-          </a:p>
-        </p:txBody>
-      </p:sp>
-      <p:sp>
-        <p:nvSpPr>
-          <p:cNvPr id="5" name="Marcador de fecha 4">
-            <a:extLst>
-              <a:ext uri="{FF2B5EF4-FFF2-40B4-BE49-F238E27FC236}">
-                <a16:creationId xmlns:a16="http://schemas.microsoft.com/office/drawing/2014/main" id="{71332EA4-1378-4707-91D6-82C1652DC2D4}"/>
-              </a:ext>
-            </a:extLst>
-          </p:cNvPr>
+            <a:endParaRPr lang="en-US" dirty="0"/>
+          </a:p>
+        </p:txBody>
+      </p:sp>
+      <p:sp>
+        <p:nvSpPr>
+          <p:cNvPr id="5" name="Date Placeholder 4"/>
           <p:cNvSpPr>
             <a:spLocks noGrp="1"/>
           </p:cNvSpPr>
@@ -1403,7 +1624,7 @@
           <a:p>
             <a:fld id="{664CB750-BDA0-4B3C-9407-BAF21E562682}" type="datetimeFigureOut">
               <a:rPr lang="es-MX" smtClean="0"/>
-              <a:t>30.04.2025</a:t>
+              <a:t>17/06/2025</a:t>
             </a:fld>
             <a:endParaRPr lang="es-MX"/>
           </a:p>
@@ -1411,13 +1632,7 @@
       </p:sp>
       <p:sp>
         <p:nvSpPr>
-          <p:cNvPr id="6" name="Marcador de pie de página 5">
-            <a:extLst>
-              <a:ext uri="{FF2B5EF4-FFF2-40B4-BE49-F238E27FC236}">
-                <a16:creationId xmlns:a16="http://schemas.microsoft.com/office/drawing/2014/main" id="{E10AE988-29C0-4E5D-9BD9-8480E52D4BA1}"/>
-              </a:ext>
-            </a:extLst>
-          </p:cNvPr>
+          <p:cNvPr id="6" name="Footer Placeholder 5"/>
           <p:cNvSpPr>
             <a:spLocks noGrp="1"/>
           </p:cNvSpPr>
@@ -1436,13 +1651,7 @@
       </p:sp>
       <p:sp>
         <p:nvSpPr>
-          <p:cNvPr id="7" name="Marcador de número de diapositiva 6">
-            <a:extLst>
-              <a:ext uri="{FF2B5EF4-FFF2-40B4-BE49-F238E27FC236}">
-                <a16:creationId xmlns:a16="http://schemas.microsoft.com/office/drawing/2014/main" id="{47329549-E9E2-4C7A-851D-22B12E9E05D3}"/>
-              </a:ext>
-            </a:extLst>
-          </p:cNvPr>
+          <p:cNvPr id="7" name="Slide Number Placeholder 6"/>
           <p:cNvSpPr>
             <a:spLocks noGrp="1"/>
           </p:cNvSpPr>
@@ -1466,7 +1675,7 @@
     </p:spTree>
     <p:extLst>
       <p:ext uri="{BB962C8B-B14F-4D97-AF65-F5344CB8AC3E}">
-        <p14:creationId xmlns:p14="http://schemas.microsoft.com/office/powerpoint/2010/main" val="967090820"/>
+        <p14:creationId xmlns:p14="http://schemas.microsoft.com/office/powerpoint/2010/main" val="1213207073"/>
       </p:ext>
     </p:extLst>
   </p:cSld>
@@ -1495,13 +1704,7 @@
       </p:grpSpPr>
       <p:sp>
         <p:nvSpPr>
-          <p:cNvPr id="2" name="Título 1">
-            <a:extLst>
-              <a:ext uri="{FF2B5EF4-FFF2-40B4-BE49-F238E27FC236}">
-                <a16:creationId xmlns:a16="http://schemas.microsoft.com/office/drawing/2014/main" id="{0EDFFABA-0A76-4F21-AC30-47142D12DC78}"/>
-              </a:ext>
-            </a:extLst>
-          </p:cNvPr>
+          <p:cNvPr id="2" name="Title 1"/>
           <p:cNvSpPr>
             <a:spLocks noGrp="1"/>
           </p:cNvSpPr>
@@ -1511,8 +1714,8 @@
         </p:nvSpPr>
         <p:spPr>
           <a:xfrm>
-            <a:off x="472381" y="486834"/>
-            <a:ext cx="5915025" cy="1767417"/>
+            <a:off x="1119717" y="486834"/>
+            <a:ext cx="14020800" cy="1767417"/>
           </a:xfrm>
         </p:spPr>
         <p:txBody>
@@ -1520,21 +1723,16 @@
           <a:lstStyle/>
           <a:p>
             <a:r>
-              <a:rPr lang="es-MX"/>
-              <a:t>Haz clic para modificar el estilo de título del patrón</a:t>
-            </a:r>
-          </a:p>
-        </p:txBody>
-      </p:sp>
-      <p:sp>
-        <p:nvSpPr>
-          <p:cNvPr id="3" name="Marcador de texto 2">
-            <a:extLst>
-              <a:ext uri="{FF2B5EF4-FFF2-40B4-BE49-F238E27FC236}">
-                <a16:creationId xmlns:a16="http://schemas.microsoft.com/office/drawing/2014/main" id="{93CA08E8-64B5-43EF-A3DE-7A5F2D8E420C}"/>
-              </a:ext>
-            </a:extLst>
-          </p:cNvPr>
+              <a:rPr lang="es-ES"/>
+              <a:t>Haga clic para modificar el estilo de título del patrón</a:t>
+            </a:r>
+            <a:endParaRPr lang="en-US" dirty="0"/>
+          </a:p>
+        </p:txBody>
+      </p:sp>
+      <p:sp>
+        <p:nvSpPr>
+          <p:cNvPr id="3" name="Text Placeholder 2"/>
           <p:cNvSpPr>
             <a:spLocks noGrp="1"/>
           </p:cNvSpPr>
@@ -1544,8 +1742,8 @@
         </p:nvSpPr>
         <p:spPr>
           <a:xfrm>
-            <a:off x="472381" y="2241551"/>
-            <a:ext cx="2901255" cy="1098549"/>
+            <a:off x="1119718" y="2241551"/>
+            <a:ext cx="6877049" cy="1098549"/>
           </a:xfrm>
         </p:spPr>
         <p:txBody>
@@ -1553,45 +1751,45 @@
           <a:lstStyle>
             <a:lvl1pPr marL="0" indent="0">
               <a:buNone/>
-              <a:defRPr sz="1350" b="1"/>
+              <a:defRPr sz="3200" b="1"/>
             </a:lvl1pPr>
-            <a:lvl2pPr marL="257175" indent="0">
-              <a:buNone/>
-              <a:defRPr sz="1125" b="1"/>
+            <a:lvl2pPr marL="609585" indent="0">
+              <a:buNone/>
+              <a:defRPr sz="2667" b="1"/>
             </a:lvl2pPr>
-            <a:lvl3pPr marL="514350" indent="0">
-              <a:buNone/>
-              <a:defRPr sz="1013" b="1"/>
+            <a:lvl3pPr marL="1219170" indent="0">
+              <a:buNone/>
+              <a:defRPr sz="2400" b="1"/>
             </a:lvl3pPr>
-            <a:lvl4pPr marL="771525" indent="0">
-              <a:buNone/>
-              <a:defRPr sz="900" b="1"/>
+            <a:lvl4pPr marL="1828754" indent="0">
+              <a:buNone/>
+              <a:defRPr sz="2133" b="1"/>
             </a:lvl4pPr>
-            <a:lvl5pPr marL="1028700" indent="0">
-              <a:buNone/>
-              <a:defRPr sz="900" b="1"/>
+            <a:lvl5pPr marL="2438339" indent="0">
+              <a:buNone/>
+              <a:defRPr sz="2133" b="1"/>
             </a:lvl5pPr>
-            <a:lvl6pPr marL="1285875" indent="0">
-              <a:buNone/>
-              <a:defRPr sz="900" b="1"/>
+            <a:lvl6pPr marL="3047924" indent="0">
+              <a:buNone/>
+              <a:defRPr sz="2133" b="1"/>
             </a:lvl6pPr>
-            <a:lvl7pPr marL="1543050" indent="0">
-              <a:buNone/>
-              <a:defRPr sz="900" b="1"/>
+            <a:lvl7pPr marL="3657509" indent="0">
+              <a:buNone/>
+              <a:defRPr sz="2133" b="1"/>
             </a:lvl7pPr>
-            <a:lvl8pPr marL="1800225" indent="0">
-              <a:buNone/>
-              <a:defRPr sz="900" b="1"/>
+            <a:lvl8pPr marL="4267093" indent="0">
+              <a:buNone/>
+              <a:defRPr sz="2133" b="1"/>
             </a:lvl8pPr>
-            <a:lvl9pPr marL="2057400" indent="0">
-              <a:buNone/>
-              <a:defRPr sz="900" b="1"/>
+            <a:lvl9pPr marL="4876678" indent="0">
+              <a:buNone/>
+              <a:defRPr sz="2133" b="1"/>
             </a:lvl9pPr>
           </a:lstStyle>
           <a:p>
             <a:pPr lvl="0"/>
             <a:r>
-              <a:rPr lang="es-MX"/>
+              <a:rPr lang="es-ES"/>
               <a:t>Haga clic para modificar los estilos de texto del patrón</a:t>
             </a:r>
           </a:p>
@@ -1599,13 +1797,7 @@
       </p:sp>
       <p:sp>
         <p:nvSpPr>
-          <p:cNvPr id="4" name="Marcador de contenido 3">
-            <a:extLst>
-              <a:ext uri="{FF2B5EF4-FFF2-40B4-BE49-F238E27FC236}">
-                <a16:creationId xmlns:a16="http://schemas.microsoft.com/office/drawing/2014/main" id="{619EB96A-760A-477C-85F8-112818D1A770}"/>
-              </a:ext>
-            </a:extLst>
-          </p:cNvPr>
+          <p:cNvPr id="4" name="Content Placeholder 3"/>
           <p:cNvSpPr>
             <a:spLocks noGrp="1"/>
           </p:cNvSpPr>
@@ -1615,8 +1807,8 @@
         </p:nvSpPr>
         <p:spPr>
           <a:xfrm>
-            <a:off x="472381" y="3340100"/>
-            <a:ext cx="2901255" cy="4912784"/>
+            <a:off x="1119718" y="3340100"/>
+            <a:ext cx="6877049" cy="4912784"/>
           </a:xfrm>
         </p:spPr>
         <p:txBody>
@@ -1625,49 +1817,44 @@
           <a:p>
             <a:pPr lvl="0"/>
             <a:r>
-              <a:rPr lang="es-MX"/>
+              <a:rPr lang="es-ES"/>
               <a:t>Haga clic para modificar los estilos de texto del patrón</a:t>
             </a:r>
           </a:p>
           <a:p>
             <a:pPr lvl="1"/>
             <a:r>
-              <a:rPr lang="es-MX"/>
+              <a:rPr lang="es-ES"/>
               <a:t>Segundo nivel</a:t>
             </a:r>
           </a:p>
           <a:p>
             <a:pPr lvl="2"/>
             <a:r>
-              <a:rPr lang="es-MX"/>
+              <a:rPr lang="es-ES"/>
               <a:t>Tercer nivel</a:t>
             </a:r>
           </a:p>
           <a:p>
             <a:pPr lvl="3"/>
             <a:r>
-              <a:rPr lang="es-MX"/>
+              <a:rPr lang="es-ES"/>
               <a:t>Cuarto nivel</a:t>
             </a:r>
           </a:p>
           <a:p>
             <a:pPr lvl="4"/>
             <a:r>
-              <a:rPr lang="es-MX"/>
+              <a:rPr lang="es-ES"/>
               <a:t>Quinto nivel</a:t>
             </a:r>
-          </a:p>
-        </p:txBody>
-      </p:sp>
-      <p:sp>
-        <p:nvSpPr>
-          <p:cNvPr id="5" name="Marcador de texto 4">
-            <a:extLst>
-              <a:ext uri="{FF2B5EF4-FFF2-40B4-BE49-F238E27FC236}">
-                <a16:creationId xmlns:a16="http://schemas.microsoft.com/office/drawing/2014/main" id="{F8F9B2F0-4572-45EA-BB8D-232709D0BD1D}"/>
-              </a:ext>
-            </a:extLst>
-          </p:cNvPr>
+            <a:endParaRPr lang="en-US" dirty="0"/>
+          </a:p>
+        </p:txBody>
+      </p:sp>
+      <p:sp>
+        <p:nvSpPr>
+          <p:cNvPr id="5" name="Text Placeholder 4"/>
           <p:cNvSpPr>
             <a:spLocks noGrp="1"/>
           </p:cNvSpPr>
@@ -1677,8 +1864,8 @@
         </p:nvSpPr>
         <p:spPr>
           <a:xfrm>
-            <a:off x="3471863" y="2241551"/>
-            <a:ext cx="2915543" cy="1098549"/>
+            <a:off x="8229600" y="2241551"/>
+            <a:ext cx="6910917" cy="1098549"/>
           </a:xfrm>
         </p:spPr>
         <p:txBody>
@@ -1686,45 +1873,45 @@
           <a:lstStyle>
             <a:lvl1pPr marL="0" indent="0">
               <a:buNone/>
-              <a:defRPr sz="1350" b="1"/>
+              <a:defRPr sz="3200" b="1"/>
             </a:lvl1pPr>
-            <a:lvl2pPr marL="257175" indent="0">
-              <a:buNone/>
-              <a:defRPr sz="1125" b="1"/>
+            <a:lvl2pPr marL="609585" indent="0">
+              <a:buNone/>
+              <a:defRPr sz="2667" b="1"/>
             </a:lvl2pPr>
-            <a:lvl3pPr marL="514350" indent="0">
-              <a:buNone/>
-              <a:defRPr sz="1013" b="1"/>
+            <a:lvl3pPr marL="1219170" indent="0">
+              <a:buNone/>
+              <a:defRPr sz="2400" b="1"/>
             </a:lvl3pPr>
-            <a:lvl4pPr marL="771525" indent="0">
-              <a:buNone/>
-              <a:defRPr sz="900" b="1"/>
+            <a:lvl4pPr marL="1828754" indent="0">
+              <a:buNone/>
+              <a:defRPr sz="2133" b="1"/>
             </a:lvl4pPr>
-            <a:lvl5pPr marL="1028700" indent="0">
-              <a:buNone/>
-              <a:defRPr sz="900" b="1"/>
+            <a:lvl5pPr marL="2438339" indent="0">
+              <a:buNone/>
+              <a:defRPr sz="2133" b="1"/>
             </a:lvl5pPr>
-            <a:lvl6pPr marL="1285875" indent="0">
-              <a:buNone/>
-              <a:defRPr sz="900" b="1"/>
+            <a:lvl6pPr marL="3047924" indent="0">
+              <a:buNone/>
+              <a:defRPr sz="2133" b="1"/>
             </a:lvl6pPr>
-            <a:lvl7pPr marL="1543050" indent="0">
-              <a:buNone/>
-              <a:defRPr sz="900" b="1"/>
+            <a:lvl7pPr marL="3657509" indent="0">
+              <a:buNone/>
+              <a:defRPr sz="2133" b="1"/>
             </a:lvl7pPr>
-            <a:lvl8pPr marL="1800225" indent="0">
-              <a:buNone/>
-              <a:defRPr sz="900" b="1"/>
+            <a:lvl8pPr marL="4267093" indent="0">
+              <a:buNone/>
+              <a:defRPr sz="2133" b="1"/>
             </a:lvl8pPr>
-            <a:lvl9pPr marL="2057400" indent="0">
-              <a:buNone/>
-              <a:defRPr sz="900" b="1"/>
+            <a:lvl9pPr marL="4876678" indent="0">
+              <a:buNone/>
+              <a:defRPr sz="2133" b="1"/>
             </a:lvl9pPr>
           </a:lstStyle>
           <a:p>
             <a:pPr lvl="0"/>
             <a:r>
-              <a:rPr lang="es-MX"/>
+              <a:rPr lang="es-ES"/>
               <a:t>Haga clic para modificar los estilos de texto del patrón</a:t>
             </a:r>
           </a:p>
@@ -1732,13 +1919,7 @@
       </p:sp>
       <p:sp>
         <p:nvSpPr>
-          <p:cNvPr id="6" name="Marcador de contenido 5">
-            <a:extLst>
-              <a:ext uri="{FF2B5EF4-FFF2-40B4-BE49-F238E27FC236}">
-                <a16:creationId xmlns:a16="http://schemas.microsoft.com/office/drawing/2014/main" id="{9BF3A4DA-5CF0-4457-A579-9828BDF7EC50}"/>
-              </a:ext>
-            </a:extLst>
-          </p:cNvPr>
+          <p:cNvPr id="6" name="Content Placeholder 5"/>
           <p:cNvSpPr>
             <a:spLocks noGrp="1"/>
           </p:cNvSpPr>
@@ -1748,8 +1929,8 @@
         </p:nvSpPr>
         <p:spPr>
           <a:xfrm>
-            <a:off x="3471863" y="3340100"/>
-            <a:ext cx="2915543" cy="4912784"/>
+            <a:off x="8229600" y="3340100"/>
+            <a:ext cx="6910917" cy="4912784"/>
           </a:xfrm>
         </p:spPr>
         <p:txBody>
@@ -1758,49 +1939,44 @@
           <a:p>
             <a:pPr lvl="0"/>
             <a:r>
-              <a:rPr lang="es-MX"/>
+              <a:rPr lang="es-ES"/>
               <a:t>Haga clic para modificar los estilos de texto del patrón</a:t>
             </a:r>
           </a:p>
           <a:p>
             <a:pPr lvl="1"/>
             <a:r>
-              <a:rPr lang="es-MX"/>
+              <a:rPr lang="es-ES"/>
               <a:t>Segundo nivel</a:t>
             </a:r>
           </a:p>
           <a:p>
             <a:pPr lvl="2"/>
             <a:r>
-              <a:rPr lang="es-MX"/>
+              <a:rPr lang="es-ES"/>
               <a:t>Tercer nivel</a:t>
             </a:r>
           </a:p>
           <a:p>
             <a:pPr lvl="3"/>
             <a:r>
-              <a:rPr lang="es-MX"/>
+              <a:rPr lang="es-ES"/>
               <a:t>Cuarto nivel</a:t>
             </a:r>
           </a:p>
           <a:p>
             <a:pPr lvl="4"/>
             <a:r>
-              <a:rPr lang="es-MX"/>
+              <a:rPr lang="es-ES"/>
               <a:t>Quinto nivel</a:t>
             </a:r>
-          </a:p>
-        </p:txBody>
-      </p:sp>
-      <p:sp>
-        <p:nvSpPr>
-          <p:cNvPr id="7" name="Marcador de fecha 6">
-            <a:extLst>
-              <a:ext uri="{FF2B5EF4-FFF2-40B4-BE49-F238E27FC236}">
-                <a16:creationId xmlns:a16="http://schemas.microsoft.com/office/drawing/2014/main" id="{B3EAB2C1-2BB2-439D-88C7-FC7AA7763C35}"/>
-              </a:ext>
-            </a:extLst>
-          </p:cNvPr>
+            <a:endParaRPr lang="en-US" dirty="0"/>
+          </a:p>
+        </p:txBody>
+      </p:sp>
+      <p:sp>
+        <p:nvSpPr>
+          <p:cNvPr id="7" name="Date Placeholder 6"/>
           <p:cNvSpPr>
             <a:spLocks noGrp="1"/>
           </p:cNvSpPr>
@@ -1815,7 +1991,7 @@
           <a:p>
             <a:fld id="{664CB750-BDA0-4B3C-9407-BAF21E562682}" type="datetimeFigureOut">
               <a:rPr lang="es-MX" smtClean="0"/>
-              <a:t>30.04.2025</a:t>
+              <a:t>17/06/2025</a:t>
             </a:fld>
             <a:endParaRPr lang="es-MX"/>
           </a:p>
@@ -1823,13 +1999,7 @@
       </p:sp>
       <p:sp>
         <p:nvSpPr>
-          <p:cNvPr id="8" name="Marcador de pie de página 7">
-            <a:extLst>
-              <a:ext uri="{FF2B5EF4-FFF2-40B4-BE49-F238E27FC236}">
-                <a16:creationId xmlns:a16="http://schemas.microsoft.com/office/drawing/2014/main" id="{70492C24-AFC6-4FEB-958B-5AC0F9BCB4F8}"/>
-              </a:ext>
-            </a:extLst>
-          </p:cNvPr>
+          <p:cNvPr id="8" name="Footer Placeholder 7"/>
           <p:cNvSpPr>
             <a:spLocks noGrp="1"/>
           </p:cNvSpPr>
@@ -1848,13 +2018,7 @@
       </p:sp>
       <p:sp>
         <p:nvSpPr>
-          <p:cNvPr id="9" name="Marcador de número de diapositiva 8">
-            <a:extLst>
-              <a:ext uri="{FF2B5EF4-FFF2-40B4-BE49-F238E27FC236}">
-                <a16:creationId xmlns:a16="http://schemas.microsoft.com/office/drawing/2014/main" id="{92A792CF-E46F-4D29-9E6C-4297722F9934}"/>
-              </a:ext>
-            </a:extLst>
-          </p:cNvPr>
+          <p:cNvPr id="9" name="Slide Number Placeholder 8"/>
           <p:cNvSpPr>
             <a:spLocks noGrp="1"/>
           </p:cNvSpPr>
@@ -1878,7 +2042,7 @@
     </p:spTree>
     <p:extLst>
       <p:ext uri="{BB962C8B-B14F-4D97-AF65-F5344CB8AC3E}">
-        <p14:creationId xmlns:p14="http://schemas.microsoft.com/office/powerpoint/2010/main" val="897091164"/>
+        <p14:creationId xmlns:p14="http://schemas.microsoft.com/office/powerpoint/2010/main" val="4173378126"/>
       </p:ext>
     </p:extLst>
   </p:cSld>
@@ -1907,13 +2071,7 @@
       </p:grpSpPr>
       <p:sp>
         <p:nvSpPr>
-          <p:cNvPr id="2" name="Título 1">
-            <a:extLst>
-              <a:ext uri="{FF2B5EF4-FFF2-40B4-BE49-F238E27FC236}">
-                <a16:creationId xmlns:a16="http://schemas.microsoft.com/office/drawing/2014/main" id="{41F3ECD5-A98E-4A2D-B68C-4221A7AEBF16}"/>
-              </a:ext>
-            </a:extLst>
-          </p:cNvPr>
+          <p:cNvPr id="2" name="Title 1"/>
           <p:cNvSpPr>
             <a:spLocks noGrp="1"/>
           </p:cNvSpPr>
@@ -1927,21 +2085,16 @@
           <a:lstStyle/>
           <a:p>
             <a:r>
-              <a:rPr lang="es-MX"/>
-              <a:t>Haz clic para modificar el estilo de título del patrón</a:t>
-            </a:r>
-          </a:p>
-        </p:txBody>
-      </p:sp>
-      <p:sp>
-        <p:nvSpPr>
-          <p:cNvPr id="3" name="Marcador de fecha 2">
-            <a:extLst>
-              <a:ext uri="{FF2B5EF4-FFF2-40B4-BE49-F238E27FC236}">
-                <a16:creationId xmlns:a16="http://schemas.microsoft.com/office/drawing/2014/main" id="{E002D83E-B2D3-4A8E-97DB-BB9E807C6CCA}"/>
-              </a:ext>
-            </a:extLst>
-          </p:cNvPr>
+              <a:rPr lang="es-ES"/>
+              <a:t>Haga clic para modificar el estilo de título del patrón</a:t>
+            </a:r>
+            <a:endParaRPr lang="en-US" dirty="0"/>
+          </a:p>
+        </p:txBody>
+      </p:sp>
+      <p:sp>
+        <p:nvSpPr>
+          <p:cNvPr id="3" name="Date Placeholder 2"/>
           <p:cNvSpPr>
             <a:spLocks noGrp="1"/>
           </p:cNvSpPr>
@@ -1956,7 +2109,7 @@
           <a:p>
             <a:fld id="{664CB750-BDA0-4B3C-9407-BAF21E562682}" type="datetimeFigureOut">
               <a:rPr lang="es-MX" smtClean="0"/>
-              <a:t>30.04.2025</a:t>
+              <a:t>17/06/2025</a:t>
             </a:fld>
             <a:endParaRPr lang="es-MX"/>
           </a:p>
@@ -1964,13 +2117,7 @@
       </p:sp>
       <p:sp>
         <p:nvSpPr>
-          <p:cNvPr id="4" name="Marcador de pie de página 3">
-            <a:extLst>
-              <a:ext uri="{FF2B5EF4-FFF2-40B4-BE49-F238E27FC236}">
-                <a16:creationId xmlns:a16="http://schemas.microsoft.com/office/drawing/2014/main" id="{11C5280C-F4DB-4352-9590-F0EADB6AAF24}"/>
-              </a:ext>
-            </a:extLst>
-          </p:cNvPr>
+          <p:cNvPr id="4" name="Footer Placeholder 3"/>
           <p:cNvSpPr>
             <a:spLocks noGrp="1"/>
           </p:cNvSpPr>
@@ -1989,13 +2136,7 @@
       </p:sp>
       <p:sp>
         <p:nvSpPr>
-          <p:cNvPr id="5" name="Marcador de número de diapositiva 4">
-            <a:extLst>
-              <a:ext uri="{FF2B5EF4-FFF2-40B4-BE49-F238E27FC236}">
-                <a16:creationId xmlns:a16="http://schemas.microsoft.com/office/drawing/2014/main" id="{1906FABE-6C85-4018-84C0-58C6CA8A2289}"/>
-              </a:ext>
-            </a:extLst>
-          </p:cNvPr>
+          <p:cNvPr id="5" name="Slide Number Placeholder 4"/>
           <p:cNvSpPr>
             <a:spLocks noGrp="1"/>
           </p:cNvSpPr>
@@ -2019,7 +2160,7 @@
     </p:spTree>
     <p:extLst>
       <p:ext uri="{BB962C8B-B14F-4D97-AF65-F5344CB8AC3E}">
-        <p14:creationId xmlns:p14="http://schemas.microsoft.com/office/powerpoint/2010/main" val="109947365"/>
+        <p14:creationId xmlns:p14="http://schemas.microsoft.com/office/powerpoint/2010/main" val="1233908118"/>
       </p:ext>
     </p:extLst>
   </p:cSld>
@@ -2048,13 +2189,7 @@
       </p:grpSpPr>
       <p:sp>
         <p:nvSpPr>
-          <p:cNvPr id="2" name="Marcador de fecha 1">
-            <a:extLst>
-              <a:ext uri="{FF2B5EF4-FFF2-40B4-BE49-F238E27FC236}">
-                <a16:creationId xmlns:a16="http://schemas.microsoft.com/office/drawing/2014/main" id="{81EC9BB6-B87C-428A-936F-19B6D75B319D}"/>
-              </a:ext>
-            </a:extLst>
-          </p:cNvPr>
+          <p:cNvPr id="2" name="Date Placeholder 1"/>
           <p:cNvSpPr>
             <a:spLocks noGrp="1"/>
           </p:cNvSpPr>
@@ -2069,7 +2204,7 @@
           <a:p>
             <a:fld id="{664CB750-BDA0-4B3C-9407-BAF21E562682}" type="datetimeFigureOut">
               <a:rPr lang="es-MX" smtClean="0"/>
-              <a:t>30.04.2025</a:t>
+              <a:t>17/06/2025</a:t>
             </a:fld>
             <a:endParaRPr lang="es-MX"/>
           </a:p>
@@ -2077,13 +2212,7 @@
       </p:sp>
       <p:sp>
         <p:nvSpPr>
-          <p:cNvPr id="3" name="Marcador de pie de página 2">
-            <a:extLst>
-              <a:ext uri="{FF2B5EF4-FFF2-40B4-BE49-F238E27FC236}">
-                <a16:creationId xmlns:a16="http://schemas.microsoft.com/office/drawing/2014/main" id="{2790AA97-39EF-4191-8916-73FAFF4E8309}"/>
-              </a:ext>
-            </a:extLst>
-          </p:cNvPr>
+          <p:cNvPr id="3" name="Footer Placeholder 2"/>
           <p:cNvSpPr>
             <a:spLocks noGrp="1"/>
           </p:cNvSpPr>
@@ -2102,13 +2231,7 @@
       </p:sp>
       <p:sp>
         <p:nvSpPr>
-          <p:cNvPr id="4" name="Marcador de número de diapositiva 3">
-            <a:extLst>
-              <a:ext uri="{FF2B5EF4-FFF2-40B4-BE49-F238E27FC236}">
-                <a16:creationId xmlns:a16="http://schemas.microsoft.com/office/drawing/2014/main" id="{7C357412-B494-43D5-9F0E-F9B88780688E}"/>
-              </a:ext>
-            </a:extLst>
-          </p:cNvPr>
+          <p:cNvPr id="4" name="Slide Number Placeholder 3"/>
           <p:cNvSpPr>
             <a:spLocks noGrp="1"/>
           </p:cNvSpPr>
@@ -2132,7 +2255,7 @@
     </p:spTree>
     <p:extLst>
       <p:ext uri="{BB962C8B-B14F-4D97-AF65-F5344CB8AC3E}">
-        <p14:creationId xmlns:p14="http://schemas.microsoft.com/office/powerpoint/2010/main" val="445205274"/>
+        <p14:creationId xmlns:p14="http://schemas.microsoft.com/office/powerpoint/2010/main" val="3574260129"/>
       </p:ext>
     </p:extLst>
   </p:cSld>
@@ -2161,13 +2284,7 @@
       </p:grpSpPr>
       <p:sp>
         <p:nvSpPr>
-          <p:cNvPr id="2" name="Título 1">
-            <a:extLst>
-              <a:ext uri="{FF2B5EF4-FFF2-40B4-BE49-F238E27FC236}">
-                <a16:creationId xmlns:a16="http://schemas.microsoft.com/office/drawing/2014/main" id="{43370419-ED70-4B34-A95C-53C85F83735D}"/>
-              </a:ext>
-            </a:extLst>
-          </p:cNvPr>
+          <p:cNvPr id="2" name="Title 1"/>
           <p:cNvSpPr>
             <a:spLocks noGrp="1"/>
           </p:cNvSpPr>
@@ -2177,34 +2294,29 @@
         </p:nvSpPr>
         <p:spPr>
           <a:xfrm>
-            <a:off x="472381" y="609600"/>
-            <a:ext cx="2211883" cy="2133600"/>
+            <a:off x="1119718" y="609600"/>
+            <a:ext cx="5242983" cy="2133600"/>
           </a:xfrm>
         </p:spPr>
         <p:txBody>
           <a:bodyPr anchor="b"/>
           <a:lstStyle>
             <a:lvl1pPr>
-              <a:defRPr sz="1800"/>
+              <a:defRPr sz="4267"/>
             </a:lvl1pPr>
           </a:lstStyle>
           <a:p>
             <a:r>
-              <a:rPr lang="es-MX"/>
-              <a:t>Haz clic para modificar el estilo de título del patrón</a:t>
-            </a:r>
-          </a:p>
-        </p:txBody>
-      </p:sp>
-      <p:sp>
-        <p:nvSpPr>
-          <p:cNvPr id="3" name="Marcador de contenido 2">
-            <a:extLst>
-              <a:ext uri="{FF2B5EF4-FFF2-40B4-BE49-F238E27FC236}">
-                <a16:creationId xmlns:a16="http://schemas.microsoft.com/office/drawing/2014/main" id="{01F41884-0453-41BB-8C5A-5BB3DACCF630}"/>
-              </a:ext>
-            </a:extLst>
-          </p:cNvPr>
+              <a:rPr lang="es-ES"/>
+              <a:t>Haga clic para modificar el estilo de título del patrón</a:t>
+            </a:r>
+            <a:endParaRPr lang="en-US" dirty="0"/>
+          </a:p>
+        </p:txBody>
+      </p:sp>
+      <p:sp>
+        <p:nvSpPr>
+          <p:cNvPr id="3" name="Content Placeholder 2"/>
           <p:cNvSpPr>
             <a:spLocks noGrp="1"/>
           </p:cNvSpPr>
@@ -2214,87 +2326,82 @@
         </p:nvSpPr>
         <p:spPr>
           <a:xfrm>
-            <a:off x="2915543" y="1316567"/>
-            <a:ext cx="3471863" cy="6498167"/>
+            <a:off x="6910917" y="1316567"/>
+            <a:ext cx="8229600" cy="6498167"/>
           </a:xfrm>
         </p:spPr>
         <p:txBody>
           <a:bodyPr/>
           <a:lstStyle>
             <a:lvl1pPr>
-              <a:defRPr sz="1800"/>
+              <a:defRPr sz="4267"/>
             </a:lvl1pPr>
             <a:lvl2pPr>
-              <a:defRPr sz="1575"/>
+              <a:defRPr sz="3733"/>
             </a:lvl2pPr>
             <a:lvl3pPr>
-              <a:defRPr sz="1350"/>
+              <a:defRPr sz="3200"/>
             </a:lvl3pPr>
             <a:lvl4pPr>
-              <a:defRPr sz="1125"/>
+              <a:defRPr sz="2667"/>
             </a:lvl4pPr>
             <a:lvl5pPr>
-              <a:defRPr sz="1125"/>
+              <a:defRPr sz="2667"/>
             </a:lvl5pPr>
             <a:lvl6pPr>
-              <a:defRPr sz="1125"/>
+              <a:defRPr sz="2667"/>
             </a:lvl6pPr>
             <a:lvl7pPr>
-              <a:defRPr sz="1125"/>
+              <a:defRPr sz="2667"/>
             </a:lvl7pPr>
             <a:lvl8pPr>
-              <a:defRPr sz="1125"/>
+              <a:defRPr sz="2667"/>
             </a:lvl8pPr>
             <a:lvl9pPr>
-              <a:defRPr sz="1125"/>
+              <a:defRPr sz="2667"/>
             </a:lvl9pPr>
           </a:lstStyle>
           <a:p>
             <a:pPr lvl="0"/>
             <a:r>
-              <a:rPr lang="es-MX"/>
+              <a:rPr lang="es-ES"/>
               <a:t>Haga clic para modificar los estilos de texto del patrón</a:t>
             </a:r>
           </a:p>
           <a:p>
             <a:pPr lvl="1"/>
             <a:r>
-              <a:rPr lang="es-MX"/>
+              <a:rPr lang="es-ES"/>
               <a:t>Segundo nivel</a:t>
             </a:r>
           </a:p>
           <a:p>
             <a:pPr lvl="2"/>
             <a:r>
-              <a:rPr lang="es-MX"/>
+              <a:rPr lang="es-ES"/>
               <a:t>Tercer nivel</a:t>
             </a:r>
           </a:p>
           <a:p>
             <a:pPr lvl="3"/>
             <a:r>
-              <a:rPr lang="es-MX"/>
+              <a:rPr lang="es-ES"/>
               <a:t>Cuarto nivel</a:t>
             </a:r>
           </a:p>
           <a:p>
             <a:pPr lvl="4"/>
             <a:r>
-              <a:rPr lang="es-MX"/>
+              <a:rPr lang="es-ES"/>
               <a:t>Quinto nivel</a:t>
             </a:r>
-          </a:p>
-        </p:txBody>
-      </p:sp>
-      <p:sp>
-        <p:nvSpPr>
-          <p:cNvPr id="4" name="Marcador de texto 3">
-            <a:extLst>
-              <a:ext uri="{FF2B5EF4-FFF2-40B4-BE49-F238E27FC236}">
-                <a16:creationId xmlns:a16="http://schemas.microsoft.com/office/drawing/2014/main" id="{BE046816-C803-45EE-BE0E-A1F9B5CC511C}"/>
-              </a:ext>
-            </a:extLst>
-          </p:cNvPr>
+            <a:endParaRPr lang="en-US" dirty="0"/>
+          </a:p>
+        </p:txBody>
+      </p:sp>
+      <p:sp>
+        <p:nvSpPr>
+          <p:cNvPr id="4" name="Text Placeholder 3"/>
           <p:cNvSpPr>
             <a:spLocks noGrp="1"/>
           </p:cNvSpPr>
@@ -2304,8 +2411,8 @@
         </p:nvSpPr>
         <p:spPr>
           <a:xfrm>
-            <a:off x="472381" y="2743200"/>
-            <a:ext cx="2211883" cy="5082117"/>
+            <a:off x="1119718" y="2743200"/>
+            <a:ext cx="5242983" cy="5082117"/>
           </a:xfrm>
         </p:spPr>
         <p:txBody>
@@ -2313,45 +2420,45 @@
           <a:lstStyle>
             <a:lvl1pPr marL="0" indent="0">
               <a:buNone/>
-              <a:defRPr sz="900"/>
+              <a:defRPr sz="2133"/>
             </a:lvl1pPr>
-            <a:lvl2pPr marL="257175" indent="0">
-              <a:buNone/>
-              <a:defRPr sz="788"/>
+            <a:lvl2pPr marL="609585" indent="0">
+              <a:buNone/>
+              <a:defRPr sz="1867"/>
             </a:lvl2pPr>
-            <a:lvl3pPr marL="514350" indent="0">
-              <a:buNone/>
-              <a:defRPr sz="675"/>
+            <a:lvl3pPr marL="1219170" indent="0">
+              <a:buNone/>
+              <a:defRPr sz="1600"/>
             </a:lvl3pPr>
-            <a:lvl4pPr marL="771525" indent="0">
-              <a:buNone/>
-              <a:defRPr sz="563"/>
+            <a:lvl4pPr marL="1828754" indent="0">
+              <a:buNone/>
+              <a:defRPr sz="1333"/>
             </a:lvl4pPr>
-            <a:lvl5pPr marL="1028700" indent="0">
-              <a:buNone/>
-              <a:defRPr sz="563"/>
+            <a:lvl5pPr marL="2438339" indent="0">
+              <a:buNone/>
+              <a:defRPr sz="1333"/>
             </a:lvl5pPr>
-            <a:lvl6pPr marL="1285875" indent="0">
-              <a:buNone/>
-              <a:defRPr sz="563"/>
+            <a:lvl6pPr marL="3047924" indent="0">
+              <a:buNone/>
+              <a:defRPr sz="1333"/>
             </a:lvl6pPr>
-            <a:lvl7pPr marL="1543050" indent="0">
-              <a:buNone/>
-              <a:defRPr sz="563"/>
+            <a:lvl7pPr marL="3657509" indent="0">
+              <a:buNone/>
+              <a:defRPr sz="1333"/>
             </a:lvl7pPr>
-            <a:lvl8pPr marL="1800225" indent="0">
-              <a:buNone/>
-              <a:defRPr sz="563"/>
+            <a:lvl8pPr marL="4267093" indent="0">
+              <a:buNone/>
+              <a:defRPr sz="1333"/>
             </a:lvl8pPr>
-            <a:lvl9pPr marL="2057400" indent="0">
-              <a:buNone/>
-              <a:defRPr sz="563"/>
+            <a:lvl9pPr marL="4876678" indent="0">
+              <a:buNone/>
+              <a:defRPr sz="1333"/>
             </a:lvl9pPr>
           </a:lstStyle>
           <a:p>
             <a:pPr lvl="0"/>
             <a:r>
-              <a:rPr lang="es-MX"/>
+              <a:rPr lang="es-ES"/>
               <a:t>Haga clic para modificar los estilos de texto del patrón</a:t>
             </a:r>
           </a:p>
@@ -2359,13 +2466,7 @@
       </p:sp>
       <p:sp>
         <p:nvSpPr>
-          <p:cNvPr id="5" name="Marcador de fecha 4">
-            <a:extLst>
-              <a:ext uri="{FF2B5EF4-FFF2-40B4-BE49-F238E27FC236}">
-                <a16:creationId xmlns:a16="http://schemas.microsoft.com/office/drawing/2014/main" id="{84CAFC5C-D795-4F1C-A8EC-6CD3D5BF61C3}"/>
-              </a:ext>
-            </a:extLst>
-          </p:cNvPr>
+          <p:cNvPr id="5" name="Date Placeholder 4"/>
           <p:cNvSpPr>
             <a:spLocks noGrp="1"/>
           </p:cNvSpPr>
@@ -2380,7 +2481,7 @@
           <a:p>
             <a:fld id="{664CB750-BDA0-4B3C-9407-BAF21E562682}" type="datetimeFigureOut">
               <a:rPr lang="es-MX" smtClean="0"/>
-              <a:t>30.04.2025</a:t>
+              <a:t>17/06/2025</a:t>
             </a:fld>
             <a:endParaRPr lang="es-MX"/>
           </a:p>
@@ -2388,13 +2489,7 @@
       </p:sp>
       <p:sp>
         <p:nvSpPr>
-          <p:cNvPr id="6" name="Marcador de pie de página 5">
-            <a:extLst>
-              <a:ext uri="{FF2B5EF4-FFF2-40B4-BE49-F238E27FC236}">
-                <a16:creationId xmlns:a16="http://schemas.microsoft.com/office/drawing/2014/main" id="{53EF8D43-6EB1-41DD-868A-D4D3FD2CF111}"/>
-              </a:ext>
-            </a:extLst>
-          </p:cNvPr>
+          <p:cNvPr id="6" name="Footer Placeholder 5"/>
           <p:cNvSpPr>
             <a:spLocks noGrp="1"/>
           </p:cNvSpPr>
@@ -2413,13 +2508,7 @@
       </p:sp>
       <p:sp>
         <p:nvSpPr>
-          <p:cNvPr id="7" name="Marcador de número de diapositiva 6">
-            <a:extLst>
-              <a:ext uri="{FF2B5EF4-FFF2-40B4-BE49-F238E27FC236}">
-                <a16:creationId xmlns:a16="http://schemas.microsoft.com/office/drawing/2014/main" id="{2368B448-F040-40F4-BA48-5DDA186A7783}"/>
-              </a:ext>
-            </a:extLst>
-          </p:cNvPr>
+          <p:cNvPr id="7" name="Slide Number Placeholder 6"/>
           <p:cNvSpPr>
             <a:spLocks noGrp="1"/>
           </p:cNvSpPr>
@@ -2443,7 +2532,7 @@
     </p:spTree>
     <p:extLst>
       <p:ext uri="{BB962C8B-B14F-4D97-AF65-F5344CB8AC3E}">
-        <p14:creationId xmlns:p14="http://schemas.microsoft.com/office/powerpoint/2010/main" val="2106253331"/>
+        <p14:creationId xmlns:p14="http://schemas.microsoft.com/office/powerpoint/2010/main" val="3765508906"/>
       </p:ext>
     </p:extLst>
   </p:cSld>
@@ -2472,13 +2561,7 @@
       </p:grpSpPr>
       <p:sp>
         <p:nvSpPr>
-          <p:cNvPr id="2" name="Título 1">
-            <a:extLst>
-              <a:ext uri="{FF2B5EF4-FFF2-40B4-BE49-F238E27FC236}">
-                <a16:creationId xmlns:a16="http://schemas.microsoft.com/office/drawing/2014/main" id="{A00C3876-0D41-483C-81DD-4EAEF2037E9D}"/>
-              </a:ext>
-            </a:extLst>
-          </p:cNvPr>
+          <p:cNvPr id="2" name="Title 1"/>
           <p:cNvSpPr>
             <a:spLocks noGrp="1"/>
           </p:cNvSpPr>
@@ -2488,36 +2571,31 @@
         </p:nvSpPr>
         <p:spPr>
           <a:xfrm>
-            <a:off x="472381" y="609600"/>
-            <a:ext cx="2211883" cy="2133600"/>
+            <a:off x="1119718" y="609600"/>
+            <a:ext cx="5242983" cy="2133600"/>
           </a:xfrm>
         </p:spPr>
         <p:txBody>
           <a:bodyPr anchor="b"/>
           <a:lstStyle>
             <a:lvl1pPr>
-              <a:defRPr sz="1800"/>
+              <a:defRPr sz="4267"/>
             </a:lvl1pPr>
           </a:lstStyle>
           <a:p>
             <a:r>
-              <a:rPr lang="es-MX"/>
-              <a:t>Haz clic para modificar el estilo de título del patrón</a:t>
-            </a:r>
-          </a:p>
-        </p:txBody>
-      </p:sp>
-      <p:sp>
-        <p:nvSpPr>
-          <p:cNvPr id="3" name="Marcador de posición de imagen 2">
-            <a:extLst>
-              <a:ext uri="{FF2B5EF4-FFF2-40B4-BE49-F238E27FC236}">
-                <a16:creationId xmlns:a16="http://schemas.microsoft.com/office/drawing/2014/main" id="{E92DC8C9-2D6C-46A3-8D75-E959AD4E74E9}"/>
-              </a:ext>
-            </a:extLst>
-          </p:cNvPr>
-          <p:cNvSpPr>
-            <a:spLocks noGrp="1"/>
+              <a:rPr lang="es-ES"/>
+              <a:t>Haga clic para modificar el estilo de título del patrón</a:t>
+            </a:r>
+            <a:endParaRPr lang="en-US" dirty="0"/>
+          </a:p>
+        </p:txBody>
+      </p:sp>
+      <p:sp>
+        <p:nvSpPr>
+          <p:cNvPr id="3" name="Picture Placeholder 2"/>
+          <p:cNvSpPr>
+            <a:spLocks noGrp="1" noChangeAspect="1"/>
           </p:cNvSpPr>
           <p:nvPr>
             <p:ph type="pic" idx="1"/>
@@ -2525,8 +2603,73 @@
         </p:nvSpPr>
         <p:spPr>
           <a:xfrm>
-            <a:off x="2915543" y="1316567"/>
-            <a:ext cx="3471863" cy="6498167"/>
+            <a:off x="6910917" y="1316567"/>
+            <a:ext cx="8229600" cy="6498167"/>
+          </a:xfrm>
+        </p:spPr>
+        <p:txBody>
+          <a:bodyPr anchor="t"/>
+          <a:lstStyle>
+            <a:lvl1pPr marL="0" indent="0">
+              <a:buNone/>
+              <a:defRPr sz="4267"/>
+            </a:lvl1pPr>
+            <a:lvl2pPr marL="609585" indent="0">
+              <a:buNone/>
+              <a:defRPr sz="3733"/>
+            </a:lvl2pPr>
+            <a:lvl3pPr marL="1219170" indent="0">
+              <a:buNone/>
+              <a:defRPr sz="3200"/>
+            </a:lvl3pPr>
+            <a:lvl4pPr marL="1828754" indent="0">
+              <a:buNone/>
+              <a:defRPr sz="2667"/>
+            </a:lvl4pPr>
+            <a:lvl5pPr marL="2438339" indent="0">
+              <a:buNone/>
+              <a:defRPr sz="2667"/>
+            </a:lvl5pPr>
+            <a:lvl6pPr marL="3047924" indent="0">
+              <a:buNone/>
+              <a:defRPr sz="2667"/>
+            </a:lvl6pPr>
+            <a:lvl7pPr marL="3657509" indent="0">
+              <a:buNone/>
+              <a:defRPr sz="2667"/>
+            </a:lvl7pPr>
+            <a:lvl8pPr marL="4267093" indent="0">
+              <a:buNone/>
+              <a:defRPr sz="2667"/>
+            </a:lvl8pPr>
+            <a:lvl9pPr marL="4876678" indent="0">
+              <a:buNone/>
+              <a:defRPr sz="2667"/>
+            </a:lvl9pPr>
+          </a:lstStyle>
+          <a:p>
+            <a:r>
+              <a:rPr lang="es-ES"/>
+              <a:t>Haga clic en el icono para agregar una imagen</a:t>
+            </a:r>
+            <a:endParaRPr lang="en-US" dirty="0"/>
+          </a:p>
+        </p:txBody>
+      </p:sp>
+      <p:sp>
+        <p:nvSpPr>
+          <p:cNvPr id="4" name="Text Placeholder 3"/>
+          <p:cNvSpPr>
+            <a:spLocks noGrp="1"/>
+          </p:cNvSpPr>
+          <p:nvPr>
+            <p:ph type="body" sz="half" idx="2"/>
+          </p:nvPr>
+        </p:nvSpPr>
+        <p:spPr>
+          <a:xfrm>
+            <a:off x="1119718" y="2743200"/>
+            <a:ext cx="5242983" cy="5082117"/>
           </a:xfrm>
         </p:spPr>
         <p:txBody>
@@ -2534,112 +2677,45 @@
           <a:lstStyle>
             <a:lvl1pPr marL="0" indent="0">
               <a:buNone/>
-              <a:defRPr sz="1800"/>
+              <a:defRPr sz="2133"/>
             </a:lvl1pPr>
-            <a:lvl2pPr marL="257175" indent="0">
-              <a:buNone/>
-              <a:defRPr sz="1575"/>
+            <a:lvl2pPr marL="609585" indent="0">
+              <a:buNone/>
+              <a:defRPr sz="1867"/>
             </a:lvl2pPr>
-            <a:lvl3pPr marL="514350" indent="0">
-              <a:buNone/>
-              <a:defRPr sz="1350"/>
+            <a:lvl3pPr marL="1219170" indent="0">
+              <a:buNone/>
+              <a:defRPr sz="1600"/>
             </a:lvl3pPr>
-            <a:lvl4pPr marL="771525" indent="0">
-              <a:buNone/>
-              <a:defRPr sz="1125"/>
+            <a:lvl4pPr marL="1828754" indent="0">
+              <a:buNone/>
+              <a:defRPr sz="1333"/>
             </a:lvl4pPr>
-            <a:lvl5pPr marL="1028700" indent="0">
-              <a:buNone/>
-              <a:defRPr sz="1125"/>
+            <a:lvl5pPr marL="2438339" indent="0">
+              <a:buNone/>
+              <a:defRPr sz="1333"/>
             </a:lvl5pPr>
-            <a:lvl6pPr marL="1285875" indent="0">
-              <a:buNone/>
-              <a:defRPr sz="1125"/>
+            <a:lvl6pPr marL="3047924" indent="0">
+              <a:buNone/>
+              <a:defRPr sz="1333"/>
             </a:lvl6pPr>
-            <a:lvl7pPr marL="1543050" indent="0">
-              <a:buNone/>
-              <a:defRPr sz="1125"/>
+            <a:lvl7pPr marL="3657509" indent="0">
+              <a:buNone/>
+              <a:defRPr sz="1333"/>
             </a:lvl7pPr>
-            <a:lvl8pPr marL="1800225" indent="0">
-              <a:buNone/>
-              <a:defRPr sz="1125"/>
+            <a:lvl8pPr marL="4267093" indent="0">
+              <a:buNone/>
+              <a:defRPr sz="1333"/>
             </a:lvl8pPr>
-            <a:lvl9pPr marL="2057400" indent="0">
-              <a:buNone/>
-              <a:defRPr sz="1125"/>
+            <a:lvl9pPr marL="4876678" indent="0">
+              <a:buNone/>
+              <a:defRPr sz="1333"/>
             </a:lvl9pPr>
           </a:lstStyle>
           <a:p>
-            <a:endParaRPr lang="es-MX"/>
-          </a:p>
-        </p:txBody>
-      </p:sp>
-      <p:sp>
-        <p:nvSpPr>
-          <p:cNvPr id="4" name="Marcador de texto 3">
-            <a:extLst>
-              <a:ext uri="{FF2B5EF4-FFF2-40B4-BE49-F238E27FC236}">
-                <a16:creationId xmlns:a16="http://schemas.microsoft.com/office/drawing/2014/main" id="{044CC682-CA7D-4186-8C38-286A7E96618C}"/>
-              </a:ext>
-            </a:extLst>
-          </p:cNvPr>
-          <p:cNvSpPr>
-            <a:spLocks noGrp="1"/>
-          </p:cNvSpPr>
-          <p:nvPr>
-            <p:ph type="body" sz="half" idx="2"/>
-          </p:nvPr>
-        </p:nvSpPr>
-        <p:spPr>
-          <a:xfrm>
-            <a:off x="472381" y="2743200"/>
-            <a:ext cx="2211883" cy="5082117"/>
-          </a:xfrm>
-        </p:spPr>
-        <p:txBody>
-          <a:bodyPr/>
-          <a:lstStyle>
-            <a:lvl1pPr marL="0" indent="0">
-              <a:buNone/>
-              <a:defRPr sz="900"/>
-            </a:lvl1pPr>
-            <a:lvl2pPr marL="257175" indent="0">
-              <a:buNone/>
-              <a:defRPr sz="788"/>
-            </a:lvl2pPr>
-            <a:lvl3pPr marL="514350" indent="0">
-              <a:buNone/>
-              <a:defRPr sz="675"/>
-            </a:lvl3pPr>
-            <a:lvl4pPr marL="771525" indent="0">
-              <a:buNone/>
-              <a:defRPr sz="563"/>
-            </a:lvl4pPr>
-            <a:lvl5pPr marL="1028700" indent="0">
-              <a:buNone/>
-              <a:defRPr sz="563"/>
-            </a:lvl5pPr>
-            <a:lvl6pPr marL="1285875" indent="0">
-              <a:buNone/>
-              <a:defRPr sz="563"/>
-            </a:lvl6pPr>
-            <a:lvl7pPr marL="1543050" indent="0">
-              <a:buNone/>
-              <a:defRPr sz="563"/>
-            </a:lvl7pPr>
-            <a:lvl8pPr marL="1800225" indent="0">
-              <a:buNone/>
-              <a:defRPr sz="563"/>
-            </a:lvl8pPr>
-            <a:lvl9pPr marL="2057400" indent="0">
-              <a:buNone/>
-              <a:defRPr sz="563"/>
-            </a:lvl9pPr>
-          </a:lstStyle>
-          <a:p>
             <a:pPr lvl="0"/>
             <a:r>
-              <a:rPr lang="es-MX"/>
+              <a:rPr lang="es-ES"/>
               <a:t>Haga clic para modificar los estilos de texto del patrón</a:t>
             </a:r>
           </a:p>
@@ -2647,13 +2723,7 @@
       </p:sp>
       <p:sp>
         <p:nvSpPr>
-          <p:cNvPr id="5" name="Marcador de fecha 4">
-            <a:extLst>
-              <a:ext uri="{FF2B5EF4-FFF2-40B4-BE49-F238E27FC236}">
-                <a16:creationId xmlns:a16="http://schemas.microsoft.com/office/drawing/2014/main" id="{99281FE2-0DBA-4FF5-9AFC-291FF4F060F0}"/>
-              </a:ext>
-            </a:extLst>
-          </p:cNvPr>
+          <p:cNvPr id="5" name="Date Placeholder 4"/>
           <p:cNvSpPr>
             <a:spLocks noGrp="1"/>
           </p:cNvSpPr>
@@ -2668,7 +2738,7 @@
           <a:p>
             <a:fld id="{664CB750-BDA0-4B3C-9407-BAF21E562682}" type="datetimeFigureOut">
               <a:rPr lang="es-MX" smtClean="0"/>
-              <a:t>30.04.2025</a:t>
+              <a:t>17/06/2025</a:t>
             </a:fld>
             <a:endParaRPr lang="es-MX"/>
           </a:p>
@@ -2676,13 +2746,7 @@
       </p:sp>
       <p:sp>
         <p:nvSpPr>
-          <p:cNvPr id="6" name="Marcador de pie de página 5">
-            <a:extLst>
-              <a:ext uri="{FF2B5EF4-FFF2-40B4-BE49-F238E27FC236}">
-                <a16:creationId xmlns:a16="http://schemas.microsoft.com/office/drawing/2014/main" id="{A1EE1F78-B8CB-4AB1-81D3-C9712567045F}"/>
-              </a:ext>
-            </a:extLst>
-          </p:cNvPr>
+          <p:cNvPr id="6" name="Footer Placeholder 5"/>
           <p:cNvSpPr>
             <a:spLocks noGrp="1"/>
           </p:cNvSpPr>
@@ -2701,13 +2765,7 @@
       </p:sp>
       <p:sp>
         <p:nvSpPr>
-          <p:cNvPr id="7" name="Marcador de número de diapositiva 6">
-            <a:extLst>
-              <a:ext uri="{FF2B5EF4-FFF2-40B4-BE49-F238E27FC236}">
-                <a16:creationId xmlns:a16="http://schemas.microsoft.com/office/drawing/2014/main" id="{F4E29F28-F406-477F-8C4A-0C3085C23FD5}"/>
-              </a:ext>
-            </a:extLst>
-          </p:cNvPr>
+          <p:cNvPr id="7" name="Slide Number Placeholder 6"/>
           <p:cNvSpPr>
             <a:spLocks noGrp="1"/>
           </p:cNvSpPr>
@@ -2731,7 +2789,7 @@
     </p:spTree>
     <p:extLst>
       <p:ext uri="{BB962C8B-B14F-4D97-AF65-F5344CB8AC3E}">
-        <p14:creationId xmlns:p14="http://schemas.microsoft.com/office/powerpoint/2010/main" val="1211911542"/>
+        <p14:creationId xmlns:p14="http://schemas.microsoft.com/office/powerpoint/2010/main" val="311146253"/>
       </p:ext>
     </p:extLst>
   </p:cSld>
@@ -2765,13 +2823,7 @@
       </p:grpSpPr>
       <p:sp>
         <p:nvSpPr>
-          <p:cNvPr id="2" name="Marcador de título 1">
-            <a:extLst>
-              <a:ext uri="{FF2B5EF4-FFF2-40B4-BE49-F238E27FC236}">
-                <a16:creationId xmlns:a16="http://schemas.microsoft.com/office/drawing/2014/main" id="{B5A41811-CA89-497B-82DD-0031F6949EE2}"/>
-              </a:ext>
-            </a:extLst>
-          </p:cNvPr>
+          <p:cNvPr id="2" name="Title Placeholder 1"/>
           <p:cNvSpPr>
             <a:spLocks noGrp="1"/>
           </p:cNvSpPr>
@@ -2781,8 +2833,8 @@
         </p:nvSpPr>
         <p:spPr>
           <a:xfrm>
-            <a:off x="471488" y="486834"/>
-            <a:ext cx="5915025" cy="1767417"/>
+            <a:off x="1117600" y="486834"/>
+            <a:ext cx="14020800" cy="1767417"/>
           </a:xfrm>
           <a:prstGeom prst="rect">
             <a:avLst/>
@@ -2795,21 +2847,16 @@
           <a:lstStyle/>
           <a:p>
             <a:r>
-              <a:rPr lang="es-MX"/>
-              <a:t>Haz clic para modificar el estilo de título del patrón</a:t>
-            </a:r>
-          </a:p>
-        </p:txBody>
-      </p:sp>
-      <p:sp>
-        <p:nvSpPr>
-          <p:cNvPr id="3" name="Marcador de texto 2">
-            <a:extLst>
-              <a:ext uri="{FF2B5EF4-FFF2-40B4-BE49-F238E27FC236}">
-                <a16:creationId xmlns:a16="http://schemas.microsoft.com/office/drawing/2014/main" id="{89CC98D0-3200-448A-8C23-4F20CA7DD492}"/>
-              </a:ext>
-            </a:extLst>
-          </p:cNvPr>
+              <a:rPr lang="es-ES"/>
+              <a:t>Haga clic para modificar el estilo de título del patrón</a:t>
+            </a:r>
+            <a:endParaRPr lang="en-US" dirty="0"/>
+          </a:p>
+        </p:txBody>
+      </p:sp>
+      <p:sp>
+        <p:nvSpPr>
+          <p:cNvPr id="3" name="Text Placeholder 2"/>
           <p:cNvSpPr>
             <a:spLocks noGrp="1"/>
           </p:cNvSpPr>
@@ -2819,8 +2866,8 @@
         </p:nvSpPr>
         <p:spPr>
           <a:xfrm>
-            <a:off x="471488" y="2434167"/>
-            <a:ext cx="5915025" cy="5801784"/>
+            <a:off x="1117600" y="2434167"/>
+            <a:ext cx="14020800" cy="5801784"/>
           </a:xfrm>
           <a:prstGeom prst="rect">
             <a:avLst/>
@@ -2834,49 +2881,44 @@
           <a:p>
             <a:pPr lvl="0"/>
             <a:r>
-              <a:rPr lang="es-MX"/>
+              <a:rPr lang="es-ES"/>
               <a:t>Haga clic para modificar los estilos de texto del patrón</a:t>
             </a:r>
           </a:p>
           <a:p>
             <a:pPr lvl="1"/>
             <a:r>
-              <a:rPr lang="es-MX"/>
+              <a:rPr lang="es-ES"/>
               <a:t>Segundo nivel</a:t>
             </a:r>
           </a:p>
           <a:p>
             <a:pPr lvl="2"/>
             <a:r>
-              <a:rPr lang="es-MX"/>
+              <a:rPr lang="es-ES"/>
               <a:t>Tercer nivel</a:t>
             </a:r>
           </a:p>
           <a:p>
             <a:pPr lvl="3"/>
             <a:r>
-              <a:rPr lang="es-MX"/>
+              <a:rPr lang="es-ES"/>
               <a:t>Cuarto nivel</a:t>
             </a:r>
           </a:p>
           <a:p>
             <a:pPr lvl="4"/>
             <a:r>
-              <a:rPr lang="es-MX"/>
+              <a:rPr lang="es-ES"/>
               <a:t>Quinto nivel</a:t>
             </a:r>
-          </a:p>
-        </p:txBody>
-      </p:sp>
-      <p:sp>
-        <p:nvSpPr>
-          <p:cNvPr id="4" name="Marcador de fecha 3">
-            <a:extLst>
-              <a:ext uri="{FF2B5EF4-FFF2-40B4-BE49-F238E27FC236}">
-                <a16:creationId xmlns:a16="http://schemas.microsoft.com/office/drawing/2014/main" id="{B1CBC678-4BF1-4BE1-A54B-CCBE06B43BA7}"/>
-              </a:ext>
-            </a:extLst>
-          </p:cNvPr>
+            <a:endParaRPr lang="en-US" dirty="0"/>
+          </a:p>
+        </p:txBody>
+      </p:sp>
+      <p:sp>
+        <p:nvSpPr>
+          <p:cNvPr id="4" name="Date Placeholder 3"/>
           <p:cNvSpPr>
             <a:spLocks noGrp="1"/>
           </p:cNvSpPr>
@@ -2886,8 +2928,8 @@
         </p:nvSpPr>
         <p:spPr>
           <a:xfrm>
-            <a:off x="471488" y="8475134"/>
-            <a:ext cx="1543050" cy="486833"/>
+            <a:off x="1117600" y="8475134"/>
+            <a:ext cx="3657600" cy="486833"/>
           </a:xfrm>
           <a:prstGeom prst="rect">
             <a:avLst/>
@@ -2897,7 +2939,7 @@
           <a:bodyPr vert="horz" lIns="91440" tIns="45720" rIns="91440" bIns="45720" rtlCol="0" anchor="ctr"/>
           <a:lstStyle>
             <a:lvl1pPr algn="l">
-              <a:defRPr sz="675">
+              <a:defRPr sz="1600">
                 <a:solidFill>
                   <a:schemeClr val="tx1">
                     <a:tint val="75000"/>
@@ -2909,7 +2951,7 @@
           <a:p>
             <a:fld id="{664CB750-BDA0-4B3C-9407-BAF21E562682}" type="datetimeFigureOut">
               <a:rPr lang="es-MX" smtClean="0"/>
-              <a:t>30.04.2025</a:t>
+              <a:t>17/06/2025</a:t>
             </a:fld>
             <a:endParaRPr lang="es-MX"/>
           </a:p>
@@ -2917,13 +2959,7 @@
       </p:sp>
       <p:sp>
         <p:nvSpPr>
-          <p:cNvPr id="5" name="Marcador de pie de página 4">
-            <a:extLst>
-              <a:ext uri="{FF2B5EF4-FFF2-40B4-BE49-F238E27FC236}">
-                <a16:creationId xmlns:a16="http://schemas.microsoft.com/office/drawing/2014/main" id="{58280666-41A2-4D89-A9C7-B24488FCEEC1}"/>
-              </a:ext>
-            </a:extLst>
-          </p:cNvPr>
+          <p:cNvPr id="5" name="Footer Placeholder 4"/>
           <p:cNvSpPr>
             <a:spLocks noGrp="1"/>
           </p:cNvSpPr>
@@ -2933,8 +2969,8 @@
         </p:nvSpPr>
         <p:spPr>
           <a:xfrm>
-            <a:off x="2271713" y="8475134"/>
-            <a:ext cx="2314575" cy="486833"/>
+            <a:off x="5384800" y="8475134"/>
+            <a:ext cx="5486400" cy="486833"/>
           </a:xfrm>
           <a:prstGeom prst="rect">
             <a:avLst/>
@@ -2944,7 +2980,7 @@
           <a:bodyPr vert="horz" lIns="91440" tIns="45720" rIns="91440" bIns="45720" rtlCol="0" anchor="ctr"/>
           <a:lstStyle>
             <a:lvl1pPr algn="ctr">
-              <a:defRPr sz="675">
+              <a:defRPr sz="1600">
                 <a:solidFill>
                   <a:schemeClr val="tx1">
                     <a:tint val="75000"/>
@@ -2960,13 +2996,7 @@
       </p:sp>
       <p:sp>
         <p:nvSpPr>
-          <p:cNvPr id="6" name="Marcador de número de diapositiva 5">
-            <a:extLst>
-              <a:ext uri="{FF2B5EF4-FFF2-40B4-BE49-F238E27FC236}">
-                <a16:creationId xmlns:a16="http://schemas.microsoft.com/office/drawing/2014/main" id="{FA54BF86-CC19-469B-8C51-131DAF583242}"/>
-              </a:ext>
-            </a:extLst>
-          </p:cNvPr>
+          <p:cNvPr id="6" name="Slide Number Placeholder 5"/>
           <p:cNvSpPr>
             <a:spLocks noGrp="1"/>
           </p:cNvSpPr>
@@ -2976,8 +3006,8 @@
         </p:nvSpPr>
         <p:spPr>
           <a:xfrm>
-            <a:off x="4843463" y="8475134"/>
-            <a:ext cx="1543050" cy="486833"/>
+            <a:off x="11480800" y="8475134"/>
+            <a:ext cx="3657600" cy="486833"/>
           </a:xfrm>
           <a:prstGeom prst="rect">
             <a:avLst/>
@@ -2987,7 +3017,7 @@
           <a:bodyPr vert="horz" lIns="91440" tIns="45720" rIns="91440" bIns="45720" rtlCol="0" anchor="ctr"/>
           <a:lstStyle>
             <a:lvl1pPr algn="r">
-              <a:defRPr sz="675">
+              <a:defRPr sz="1600">
                 <a:solidFill>
                   <a:schemeClr val="tx1">
                     <a:tint val="75000"/>
@@ -3008,27 +3038,27 @@
     </p:spTree>
     <p:extLst>
       <p:ext uri="{BB962C8B-B14F-4D97-AF65-F5344CB8AC3E}">
-        <p14:creationId xmlns:p14="http://schemas.microsoft.com/office/powerpoint/2010/main" val="1007317988"/>
+        <p14:creationId xmlns:p14="http://schemas.microsoft.com/office/powerpoint/2010/main" val="3405474953"/>
       </p:ext>
     </p:extLst>
   </p:cSld>
   <p:clrMap bg1="lt1" tx1="dk1" bg2="lt2" tx2="dk2" accent1="accent1" accent2="accent2" accent3="accent3" accent4="accent4" accent5="accent5" accent6="accent6" hlink="hlink" folHlink="folHlink"/>
   <p:sldLayoutIdLst>
-    <p:sldLayoutId id="2147483685" r:id="rId1"/>
-    <p:sldLayoutId id="2147483686" r:id="rId2"/>
-    <p:sldLayoutId id="2147483687" r:id="rId3"/>
-    <p:sldLayoutId id="2147483688" r:id="rId4"/>
-    <p:sldLayoutId id="2147483689" r:id="rId5"/>
-    <p:sldLayoutId id="2147483690" r:id="rId6"/>
-    <p:sldLayoutId id="2147483691" r:id="rId7"/>
-    <p:sldLayoutId id="2147483692" r:id="rId8"/>
-    <p:sldLayoutId id="2147483693" r:id="rId9"/>
-    <p:sldLayoutId id="2147483694" r:id="rId10"/>
-    <p:sldLayoutId id="2147483695" r:id="rId11"/>
+    <p:sldLayoutId id="2147483697" r:id="rId1"/>
+    <p:sldLayoutId id="2147483698" r:id="rId2"/>
+    <p:sldLayoutId id="2147483699" r:id="rId3"/>
+    <p:sldLayoutId id="2147483700" r:id="rId4"/>
+    <p:sldLayoutId id="2147483701" r:id="rId5"/>
+    <p:sldLayoutId id="2147483702" r:id="rId6"/>
+    <p:sldLayoutId id="2147483703" r:id="rId7"/>
+    <p:sldLayoutId id="2147483704" r:id="rId8"/>
+    <p:sldLayoutId id="2147483705" r:id="rId9"/>
+    <p:sldLayoutId id="2147483706" r:id="rId10"/>
+    <p:sldLayoutId id="2147483707" r:id="rId11"/>
   </p:sldLayoutIdLst>
   <p:txStyles>
     <p:titleStyle>
-      <a:lvl1pPr algn="l" defTabSz="514350" rtl="0" eaLnBrk="1" latinLnBrk="0" hangingPunct="1">
+      <a:lvl1pPr algn="l" defTabSz="1219170" rtl="0" eaLnBrk="1" latinLnBrk="0" hangingPunct="1">
         <a:lnSpc>
           <a:spcPct val="90000"/>
         </a:lnSpc>
@@ -3036,7 +3066,7 @@
           <a:spcPct val="0"/>
         </a:spcBef>
         <a:buNone/>
-        <a:defRPr sz="2475" kern="1200">
+        <a:defRPr sz="5867" kern="1200">
           <a:solidFill>
             <a:schemeClr val="tx1"/>
           </a:solidFill>
@@ -3047,16 +3077,16 @@
       </a:lvl1pPr>
     </p:titleStyle>
     <p:bodyStyle>
-      <a:lvl1pPr marL="128588" indent="-128588" algn="l" defTabSz="514350" rtl="0" eaLnBrk="1" latinLnBrk="0" hangingPunct="1">
+      <a:lvl1pPr marL="304792" indent="-304792" algn="l" defTabSz="1219170" rtl="0" eaLnBrk="1" latinLnBrk="0" hangingPunct="1">
         <a:lnSpc>
           <a:spcPct val="90000"/>
         </a:lnSpc>
         <a:spcBef>
-          <a:spcPts val="563"/>
+          <a:spcPts val="1333"/>
         </a:spcBef>
         <a:buFont typeface="Arial" panose="020B0604020202020204" pitchFamily="34" charset="0"/>
         <a:buChar char="•"/>
-        <a:defRPr sz="1575" kern="1200">
+        <a:defRPr sz="3733" kern="1200">
           <a:solidFill>
             <a:schemeClr val="tx1"/>
           </a:solidFill>
@@ -3065,16 +3095,16 @@
           <a:cs typeface="+mn-cs"/>
         </a:defRPr>
       </a:lvl1pPr>
-      <a:lvl2pPr marL="385763" indent="-128588" algn="l" defTabSz="514350" rtl="0" eaLnBrk="1" latinLnBrk="0" hangingPunct="1">
+      <a:lvl2pPr marL="914377" indent="-304792" algn="l" defTabSz="1219170" rtl="0" eaLnBrk="1" latinLnBrk="0" hangingPunct="1">
         <a:lnSpc>
           <a:spcPct val="90000"/>
         </a:lnSpc>
         <a:spcBef>
-          <a:spcPts val="281"/>
+          <a:spcPts val="667"/>
         </a:spcBef>
         <a:buFont typeface="Arial" panose="020B0604020202020204" pitchFamily="34" charset="0"/>
         <a:buChar char="•"/>
-        <a:defRPr sz="1350" kern="1200">
+        <a:defRPr sz="3200" kern="1200">
           <a:solidFill>
             <a:schemeClr val="tx1"/>
           </a:solidFill>
@@ -3083,16 +3113,16 @@
           <a:cs typeface="+mn-cs"/>
         </a:defRPr>
       </a:lvl2pPr>
-      <a:lvl3pPr marL="642938" indent="-128588" algn="l" defTabSz="514350" rtl="0" eaLnBrk="1" latinLnBrk="0" hangingPunct="1">
+      <a:lvl3pPr marL="1523962" indent="-304792" algn="l" defTabSz="1219170" rtl="0" eaLnBrk="1" latinLnBrk="0" hangingPunct="1">
         <a:lnSpc>
           <a:spcPct val="90000"/>
         </a:lnSpc>
         <a:spcBef>
-          <a:spcPts val="281"/>
+          <a:spcPts val="667"/>
         </a:spcBef>
         <a:buFont typeface="Arial" panose="020B0604020202020204" pitchFamily="34" charset="0"/>
         <a:buChar char="•"/>
-        <a:defRPr sz="1125" kern="1200">
+        <a:defRPr sz="2667" kern="1200">
           <a:solidFill>
             <a:schemeClr val="tx1"/>
           </a:solidFill>
@@ -3101,16 +3131,16 @@
           <a:cs typeface="+mn-cs"/>
         </a:defRPr>
       </a:lvl3pPr>
-      <a:lvl4pPr marL="900113" indent="-128588" algn="l" defTabSz="514350" rtl="0" eaLnBrk="1" latinLnBrk="0" hangingPunct="1">
+      <a:lvl4pPr marL="2133547" indent="-304792" algn="l" defTabSz="1219170" rtl="0" eaLnBrk="1" latinLnBrk="0" hangingPunct="1">
         <a:lnSpc>
           <a:spcPct val="90000"/>
         </a:lnSpc>
         <a:spcBef>
-          <a:spcPts val="281"/>
+          <a:spcPts val="667"/>
         </a:spcBef>
         <a:buFont typeface="Arial" panose="020B0604020202020204" pitchFamily="34" charset="0"/>
         <a:buChar char="•"/>
-        <a:defRPr sz="1013" kern="1200">
+        <a:defRPr sz="2400" kern="1200">
           <a:solidFill>
             <a:schemeClr val="tx1"/>
           </a:solidFill>
@@ -3119,16 +3149,16 @@
           <a:cs typeface="+mn-cs"/>
         </a:defRPr>
       </a:lvl4pPr>
-      <a:lvl5pPr marL="1157288" indent="-128588" algn="l" defTabSz="514350" rtl="0" eaLnBrk="1" latinLnBrk="0" hangingPunct="1">
+      <a:lvl5pPr marL="2743131" indent="-304792" algn="l" defTabSz="1219170" rtl="0" eaLnBrk="1" latinLnBrk="0" hangingPunct="1">
         <a:lnSpc>
           <a:spcPct val="90000"/>
         </a:lnSpc>
         <a:spcBef>
-          <a:spcPts val="281"/>
+          <a:spcPts val="667"/>
         </a:spcBef>
         <a:buFont typeface="Arial" panose="020B0604020202020204" pitchFamily="34" charset="0"/>
         <a:buChar char="•"/>
-        <a:defRPr sz="1013" kern="1200">
+        <a:defRPr sz="2400" kern="1200">
           <a:solidFill>
             <a:schemeClr val="tx1"/>
           </a:solidFill>
@@ -3137,16 +3167,16 @@
           <a:cs typeface="+mn-cs"/>
         </a:defRPr>
       </a:lvl5pPr>
-      <a:lvl6pPr marL="1414463" indent="-128588" algn="l" defTabSz="514350" rtl="0" eaLnBrk="1" latinLnBrk="0" hangingPunct="1">
+      <a:lvl6pPr marL="3352716" indent="-304792" algn="l" defTabSz="1219170" rtl="0" eaLnBrk="1" latinLnBrk="0" hangingPunct="1">
         <a:lnSpc>
           <a:spcPct val="90000"/>
         </a:lnSpc>
         <a:spcBef>
-          <a:spcPts val="281"/>
+          <a:spcPts val="667"/>
         </a:spcBef>
         <a:buFont typeface="Arial" panose="020B0604020202020204" pitchFamily="34" charset="0"/>
         <a:buChar char="•"/>
-        <a:defRPr sz="1013" kern="1200">
+        <a:defRPr sz="2400" kern="1200">
           <a:solidFill>
             <a:schemeClr val="tx1"/>
           </a:solidFill>
@@ -3155,16 +3185,16 @@
           <a:cs typeface="+mn-cs"/>
         </a:defRPr>
       </a:lvl6pPr>
-      <a:lvl7pPr marL="1671638" indent="-128588" algn="l" defTabSz="514350" rtl="0" eaLnBrk="1" latinLnBrk="0" hangingPunct="1">
+      <a:lvl7pPr marL="3962301" indent="-304792" algn="l" defTabSz="1219170" rtl="0" eaLnBrk="1" latinLnBrk="0" hangingPunct="1">
         <a:lnSpc>
           <a:spcPct val="90000"/>
         </a:lnSpc>
         <a:spcBef>
-          <a:spcPts val="281"/>
+          <a:spcPts val="667"/>
         </a:spcBef>
         <a:buFont typeface="Arial" panose="020B0604020202020204" pitchFamily="34" charset="0"/>
         <a:buChar char="•"/>
-        <a:defRPr sz="1013" kern="1200">
+        <a:defRPr sz="2400" kern="1200">
           <a:solidFill>
             <a:schemeClr val="tx1"/>
           </a:solidFill>
@@ -3173,16 +3203,16 @@
           <a:cs typeface="+mn-cs"/>
         </a:defRPr>
       </a:lvl7pPr>
-      <a:lvl8pPr marL="1928813" indent="-128588" algn="l" defTabSz="514350" rtl="0" eaLnBrk="1" latinLnBrk="0" hangingPunct="1">
+      <a:lvl8pPr marL="4571886" indent="-304792" algn="l" defTabSz="1219170" rtl="0" eaLnBrk="1" latinLnBrk="0" hangingPunct="1">
         <a:lnSpc>
           <a:spcPct val="90000"/>
         </a:lnSpc>
         <a:spcBef>
-          <a:spcPts val="281"/>
+          <a:spcPts val="667"/>
         </a:spcBef>
         <a:buFont typeface="Arial" panose="020B0604020202020204" pitchFamily="34" charset="0"/>
         <a:buChar char="•"/>
-        <a:defRPr sz="1013" kern="1200">
+        <a:defRPr sz="2400" kern="1200">
           <a:solidFill>
             <a:schemeClr val="tx1"/>
           </a:solidFill>
@@ -3191,16 +3221,16 @@
           <a:cs typeface="+mn-cs"/>
         </a:defRPr>
       </a:lvl8pPr>
-      <a:lvl9pPr marL="2185988" indent="-128588" algn="l" defTabSz="514350" rtl="0" eaLnBrk="1" latinLnBrk="0" hangingPunct="1">
+      <a:lvl9pPr marL="5181470" indent="-304792" algn="l" defTabSz="1219170" rtl="0" eaLnBrk="1" latinLnBrk="0" hangingPunct="1">
         <a:lnSpc>
           <a:spcPct val="90000"/>
         </a:lnSpc>
         <a:spcBef>
-          <a:spcPts val="281"/>
+          <a:spcPts val="667"/>
         </a:spcBef>
         <a:buFont typeface="Arial" panose="020B0604020202020204" pitchFamily="34" charset="0"/>
         <a:buChar char="•"/>
-        <a:defRPr sz="1013" kern="1200">
+        <a:defRPr sz="2400" kern="1200">
           <a:solidFill>
             <a:schemeClr val="tx1"/>
           </a:solidFill>
@@ -3212,10 +3242,10 @@
     </p:bodyStyle>
     <p:otherStyle>
       <a:defPPr>
-        <a:defRPr lang="es-MX"/>
+        <a:defRPr lang="en-US"/>
       </a:defPPr>
-      <a:lvl1pPr marL="0" algn="l" defTabSz="514350" rtl="0" eaLnBrk="1" latinLnBrk="0" hangingPunct="1">
-        <a:defRPr sz="1013" kern="1200">
+      <a:lvl1pPr marL="0" algn="l" defTabSz="1219170" rtl="0" eaLnBrk="1" latinLnBrk="0" hangingPunct="1">
+        <a:defRPr sz="2400" kern="1200">
           <a:solidFill>
             <a:schemeClr val="tx1"/>
           </a:solidFill>
@@ -3224,8 +3254,8 @@
           <a:cs typeface="+mn-cs"/>
         </a:defRPr>
       </a:lvl1pPr>
-      <a:lvl2pPr marL="257175" algn="l" defTabSz="514350" rtl="0" eaLnBrk="1" latinLnBrk="0" hangingPunct="1">
-        <a:defRPr sz="1013" kern="1200">
+      <a:lvl2pPr marL="609585" algn="l" defTabSz="1219170" rtl="0" eaLnBrk="1" latinLnBrk="0" hangingPunct="1">
+        <a:defRPr sz="2400" kern="1200">
           <a:solidFill>
             <a:schemeClr val="tx1"/>
           </a:solidFill>
@@ -3234,8 +3264,8 @@
           <a:cs typeface="+mn-cs"/>
         </a:defRPr>
       </a:lvl2pPr>
-      <a:lvl3pPr marL="514350" algn="l" defTabSz="514350" rtl="0" eaLnBrk="1" latinLnBrk="0" hangingPunct="1">
-        <a:defRPr sz="1013" kern="1200">
+      <a:lvl3pPr marL="1219170" algn="l" defTabSz="1219170" rtl="0" eaLnBrk="1" latinLnBrk="0" hangingPunct="1">
+        <a:defRPr sz="2400" kern="1200">
           <a:solidFill>
             <a:schemeClr val="tx1"/>
           </a:solidFill>
@@ -3244,8 +3274,8 @@
           <a:cs typeface="+mn-cs"/>
         </a:defRPr>
       </a:lvl3pPr>
-      <a:lvl4pPr marL="771525" algn="l" defTabSz="514350" rtl="0" eaLnBrk="1" latinLnBrk="0" hangingPunct="1">
-        <a:defRPr sz="1013" kern="1200">
+      <a:lvl4pPr marL="1828754" algn="l" defTabSz="1219170" rtl="0" eaLnBrk="1" latinLnBrk="0" hangingPunct="1">
+        <a:defRPr sz="2400" kern="1200">
           <a:solidFill>
             <a:schemeClr val="tx1"/>
           </a:solidFill>
@@ -3254,8 +3284,8 @@
           <a:cs typeface="+mn-cs"/>
         </a:defRPr>
       </a:lvl4pPr>
-      <a:lvl5pPr marL="1028700" algn="l" defTabSz="514350" rtl="0" eaLnBrk="1" latinLnBrk="0" hangingPunct="1">
-        <a:defRPr sz="1013" kern="1200">
+      <a:lvl5pPr marL="2438339" algn="l" defTabSz="1219170" rtl="0" eaLnBrk="1" latinLnBrk="0" hangingPunct="1">
+        <a:defRPr sz="2400" kern="1200">
           <a:solidFill>
             <a:schemeClr val="tx1"/>
           </a:solidFill>
@@ -3264,8 +3294,8 @@
           <a:cs typeface="+mn-cs"/>
         </a:defRPr>
       </a:lvl5pPr>
-      <a:lvl6pPr marL="1285875" algn="l" defTabSz="514350" rtl="0" eaLnBrk="1" latinLnBrk="0" hangingPunct="1">
-        <a:defRPr sz="1013" kern="1200">
+      <a:lvl6pPr marL="3047924" algn="l" defTabSz="1219170" rtl="0" eaLnBrk="1" latinLnBrk="0" hangingPunct="1">
+        <a:defRPr sz="2400" kern="1200">
           <a:solidFill>
             <a:schemeClr val="tx1"/>
           </a:solidFill>
@@ -3274,8 +3304,8 @@
           <a:cs typeface="+mn-cs"/>
         </a:defRPr>
       </a:lvl6pPr>
-      <a:lvl7pPr marL="1543050" algn="l" defTabSz="514350" rtl="0" eaLnBrk="1" latinLnBrk="0" hangingPunct="1">
-        <a:defRPr sz="1013" kern="1200">
+      <a:lvl7pPr marL="3657509" algn="l" defTabSz="1219170" rtl="0" eaLnBrk="1" latinLnBrk="0" hangingPunct="1">
+        <a:defRPr sz="2400" kern="1200">
           <a:solidFill>
             <a:schemeClr val="tx1"/>
           </a:solidFill>
@@ -3284,8 +3314,8 @@
           <a:cs typeface="+mn-cs"/>
         </a:defRPr>
       </a:lvl7pPr>
-      <a:lvl8pPr marL="1800225" algn="l" defTabSz="514350" rtl="0" eaLnBrk="1" latinLnBrk="0" hangingPunct="1">
-        <a:defRPr sz="1013" kern="1200">
+      <a:lvl8pPr marL="4267093" algn="l" defTabSz="1219170" rtl="0" eaLnBrk="1" latinLnBrk="0" hangingPunct="1">
+        <a:defRPr sz="2400" kern="1200">
           <a:solidFill>
             <a:schemeClr val="tx1"/>
           </a:solidFill>
@@ -3294,8 +3324,8 @@
           <a:cs typeface="+mn-cs"/>
         </a:defRPr>
       </a:lvl8pPr>
-      <a:lvl9pPr marL="2057400" algn="l" defTabSz="514350" rtl="0" eaLnBrk="1" latinLnBrk="0" hangingPunct="1">
-        <a:defRPr sz="1013" kern="1200">
+      <a:lvl9pPr marL="4876678" algn="l" defTabSz="1219170" rtl="0" eaLnBrk="1" latinLnBrk="0" hangingPunct="1">
+        <a:defRPr sz="2400" kern="1200">
           <a:solidFill>
             <a:schemeClr val="tx1"/>
           </a:solidFill>
@@ -3340,8 +3370,8 @@
         </p:nvGrpSpPr>
         <p:grpSpPr>
           <a:xfrm>
-            <a:off x="171495" y="261026"/>
-            <a:ext cx="2066553" cy="8621948"/>
+            <a:off x="576501" y="-5737992"/>
+            <a:ext cx="4898496" cy="20437210"/>
             <a:chOff x="440430" y="261026"/>
             <a:chExt cx="2381885" cy="8621948"/>
           </a:xfrm>
@@ -3429,8 +3459,8 @@
         </p:nvSpPr>
         <p:spPr>
           <a:xfrm>
-            <a:off x="207353" y="3054304"/>
-            <a:ext cx="2066553" cy="2581476"/>
+            <a:off x="491493" y="625348"/>
+            <a:ext cx="4898496" cy="7246536"/>
           </a:xfrm>
           <a:prstGeom prst="rect">
             <a:avLst/>
@@ -3443,337 +3473,168 @@
           </a:bodyPr>
           <a:lstStyle/>
           <a:p>
-            <a:pPr marL="0" marR="0" lvl="0" indent="0" algn="ctr" defTabSz="914400" rtl="0" eaLnBrk="1" fontAlgn="auto" latinLnBrk="0" hangingPunct="1">
+            <a:pPr algn="ctr" defTabSz="2167494">
               <a:lnSpc>
                 <a:spcPct val="150000"/>
               </a:lnSpc>
-              <a:spcBef>
-                <a:spcPts val="0"/>
-              </a:spcBef>
-              <a:spcAft>
-                <a:spcPts val="0"/>
-              </a:spcAft>
-              <a:buClrTx/>
-              <a:buSzTx/>
-              <a:buFontTx/>
-              <a:buNone/>
-              <a:tabLst/>
               <a:defRPr/>
             </a:pPr>
             <a:r>
-              <a:rPr kumimoji="0" lang="es-MX" sz="1100" b="1" i="0" u="none" strike="noStrike" kern="1200" cap="none" spc="0" normalizeH="0" baseline="0" noProof="0" dirty="0">
-                <a:ln>
-                  <a:noFill/>
-                </a:ln>
+              <a:rPr lang="es-MX" sz="2607" b="1" dirty="0">
                 <a:solidFill>
                   <a:schemeClr val="bg1"/>
                 </a:solidFill>
-                <a:effectLst/>
-                <a:uLnTx/>
-                <a:uFillTx/>
                 <a:latin typeface="Montserrat" pitchFamily="2" charset="0"/>
-                <a:ea typeface="+mn-ea"/>
-                <a:cs typeface="+mn-cs"/>
               </a:rPr>
-              <a:t>Formación Académica</a:t>
-            </a:r>
-          </a:p>
-          <a:p>
-            <a:pPr marL="0" marR="0" lvl="0" indent="0" algn="ctr" defTabSz="914400" rtl="0" eaLnBrk="1" fontAlgn="auto" latinLnBrk="0" hangingPunct="1">
+              <a:t>Formación</a:t>
+            </a:r>
+          </a:p>
+          <a:p>
+            <a:pPr algn="ctr" defTabSz="2167494">
               <a:lnSpc>
                 <a:spcPct val="150000"/>
               </a:lnSpc>
-              <a:spcBef>
-                <a:spcPts val="0"/>
-              </a:spcBef>
-              <a:spcAft>
-                <a:spcPts val="0"/>
-              </a:spcAft>
-              <a:buClrTx/>
-              <a:buSzTx/>
-              <a:buFontTx/>
-              <a:buNone/>
-              <a:tabLst/>
               <a:defRPr/>
             </a:pPr>
-            <a:endParaRPr kumimoji="0" lang="es-ES" sz="1100" b="1" i="0" u="none" strike="noStrike" kern="1200" cap="none" spc="0" normalizeH="0" baseline="0" noProof="0" dirty="0">
-              <a:ln>
-                <a:noFill/>
-              </a:ln>
+            <a:r>
+              <a:rPr lang="es-MX" sz="2607" b="1" dirty="0">
+                <a:solidFill>
+                  <a:schemeClr val="bg1"/>
+                </a:solidFill>
+                <a:latin typeface="Montserrat" pitchFamily="2" charset="0"/>
+              </a:rPr>
+              <a:t> Académica</a:t>
+            </a:r>
+          </a:p>
+          <a:p>
+            <a:pPr algn="ctr" defTabSz="2167494">
+              <a:lnSpc>
+                <a:spcPct val="150000"/>
+              </a:lnSpc>
+              <a:defRPr/>
+            </a:pPr>
+            <a:endParaRPr lang="es-MX" sz="2607" b="1" dirty="0">
               <a:solidFill>
                 <a:schemeClr val="bg1"/>
               </a:solidFill>
-              <a:effectLst/>
-              <a:uLnTx/>
-              <a:uFillTx/>
               <a:latin typeface="Montserrat" pitchFamily="2" charset="0"/>
-              <a:ea typeface="+mn-ea"/>
-              <a:cs typeface="+mn-cs"/>
             </a:endParaRPr>
           </a:p>
           <a:p>
-            <a:pPr marL="171450" marR="0" lvl="0" indent="-171450" algn="l" defTabSz="914400" rtl="0" eaLnBrk="1" fontAlgn="auto" latinLnBrk="0" hangingPunct="1">
+            <a:pPr marL="406405" indent="-406405" defTabSz="2167494">
               <a:lnSpc>
                 <a:spcPct val="150000"/>
               </a:lnSpc>
-              <a:spcBef>
-                <a:spcPts val="0"/>
-              </a:spcBef>
-              <a:spcAft>
-                <a:spcPts val="0"/>
-              </a:spcAft>
-              <a:buClrTx/>
-              <a:buSzTx/>
               <a:buFont typeface="Arial" panose="020B0604020202020204" pitchFamily="34" charset="0"/>
               <a:buChar char="•"/>
-              <a:tabLst/>
               <a:defRPr/>
             </a:pPr>
             <a:r>
-              <a:rPr kumimoji="0" lang="es-ES" sz="1100" b="1" i="0" u="none" strike="noStrike" kern="1200" cap="none" spc="0" normalizeH="0" baseline="0" noProof="0" dirty="0">
-                <a:ln>
-                  <a:noFill/>
-                </a:ln>
+              <a:rPr lang="es-ES" sz="2607" b="1" dirty="0">
                 <a:solidFill>
                   <a:schemeClr val="bg1"/>
                 </a:solidFill>
-                <a:effectLst/>
-                <a:uLnTx/>
-                <a:uFillTx/>
                 <a:latin typeface="Montserrat" pitchFamily="2" charset="0"/>
-                <a:ea typeface="+mn-ea"/>
-                <a:cs typeface="+mn-cs"/>
               </a:rPr>
-              <a:t>Doctorado </a:t>
-            </a:r>
-            <a:r>
-              <a:rPr kumimoji="0" lang="es-ES" sz="1100" b="0" i="0" u="none" strike="noStrike" kern="1200" cap="none" spc="0" normalizeH="0" baseline="0" noProof="0" dirty="0">
-                <a:ln>
-                  <a:noFill/>
-                </a:ln>
+              <a:t>Estudios de Doctorado</a:t>
+            </a:r>
+            <a:r>
+              <a:rPr lang="es-ES" sz="2607" dirty="0">
                 <a:solidFill>
                   <a:schemeClr val="bg1"/>
                 </a:solidFill>
-                <a:effectLst/>
-                <a:uLnTx/>
-                <a:uFillTx/>
                 <a:latin typeface="Montserrat" pitchFamily="2" charset="0"/>
-                <a:ea typeface="+mn-ea"/>
-                <a:cs typeface="+mn-cs"/>
               </a:rPr>
-              <a:t> en Derecho y Ciencias Jurídicas.</a:t>
-            </a:r>
-          </a:p>
-          <a:p>
-            <a:pPr marL="0" marR="0" lvl="0" indent="0" algn="l" defTabSz="914400" rtl="0" eaLnBrk="1" fontAlgn="auto" latinLnBrk="0" hangingPunct="1">
+              <a:t> en Administración Pública.</a:t>
+            </a:r>
+          </a:p>
+          <a:p>
+            <a:pPr defTabSz="2167494">
               <a:lnSpc>
                 <a:spcPct val="150000"/>
               </a:lnSpc>
-              <a:spcBef>
-                <a:spcPts val="0"/>
-              </a:spcBef>
-              <a:spcAft>
-                <a:spcPts val="0"/>
-              </a:spcAft>
-              <a:buClrTx/>
-              <a:buSzTx/>
-              <a:buFont typeface="Arial" panose="020B0604020202020204" pitchFamily="34" charset="0"/>
-              <a:buNone/>
-              <a:tabLst/>
               <a:defRPr/>
             </a:pPr>
-            <a:endParaRPr kumimoji="0" lang="es-ES" sz="600" b="0" i="0" u="none" strike="noStrike" kern="1200" cap="none" spc="0" normalizeH="0" baseline="0" noProof="0" dirty="0">
-              <a:ln>
-                <a:noFill/>
-              </a:ln>
+            <a:endParaRPr lang="es-ES" sz="2607" dirty="0">
               <a:solidFill>
                 <a:schemeClr val="bg1"/>
               </a:solidFill>
-              <a:effectLst/>
-              <a:uLnTx/>
-              <a:uFillTx/>
               <a:latin typeface="Montserrat" pitchFamily="2" charset="0"/>
-              <a:ea typeface="+mn-ea"/>
-              <a:cs typeface="+mn-cs"/>
             </a:endParaRPr>
           </a:p>
           <a:p>
-            <a:pPr marL="171450" marR="0" lvl="0" indent="-171450" algn="l" defTabSz="914400" rtl="0" eaLnBrk="1" fontAlgn="auto" latinLnBrk="0" hangingPunct="1">
+            <a:pPr marL="406405" indent="-406405" defTabSz="2167494">
               <a:lnSpc>
                 <a:spcPct val="150000"/>
               </a:lnSpc>
-              <a:spcBef>
-                <a:spcPts val="0"/>
-              </a:spcBef>
-              <a:spcAft>
-                <a:spcPts val="0"/>
-              </a:spcAft>
-              <a:buClrTx/>
-              <a:buSzTx/>
               <a:buFont typeface="Arial" panose="020B0604020202020204" pitchFamily="34" charset="0"/>
               <a:buChar char="•"/>
-              <a:tabLst/>
               <a:defRPr/>
             </a:pPr>
             <a:r>
-              <a:rPr kumimoji="0" lang="es-ES" sz="1100" b="1" i="0" u="none" strike="noStrike" kern="1200" cap="none" spc="0" normalizeH="0" baseline="0" noProof="0" dirty="0">
-                <a:ln>
-                  <a:noFill/>
-                </a:ln>
+              <a:rPr lang="es-ES" sz="2607" b="1" dirty="0">
                 <a:solidFill>
                   <a:schemeClr val="bg1"/>
                 </a:solidFill>
-                <a:effectLst/>
-                <a:uLnTx/>
-                <a:uFillTx/>
                 <a:latin typeface="Montserrat" pitchFamily="2" charset="0"/>
-                <a:ea typeface="+mn-ea"/>
-                <a:cs typeface="+mn-cs"/>
               </a:rPr>
-              <a:t>Maestría</a:t>
-            </a:r>
-            <a:r>
-              <a:rPr kumimoji="0" lang="es-ES" sz="1100" b="0" i="0" u="none" strike="noStrike" kern="1200" cap="none" spc="0" normalizeH="0" baseline="0" noProof="0" dirty="0">
-                <a:ln>
-                  <a:noFill/>
-                </a:ln>
+              <a:t>Maestría </a:t>
+            </a:r>
+            <a:r>
+              <a:rPr lang="es-ES" sz="2607" dirty="0">
                 <a:solidFill>
                   <a:schemeClr val="bg1"/>
                 </a:solidFill>
-                <a:effectLst/>
-                <a:uLnTx/>
-                <a:uFillTx/>
                 <a:latin typeface="Montserrat" pitchFamily="2" charset="0"/>
-                <a:ea typeface="+mn-ea"/>
-                <a:cs typeface="+mn-cs"/>
               </a:rPr>
-              <a:t> en Derecho Administrativo y Fiscal.</a:t>
-            </a:r>
-            <a:endParaRPr kumimoji="0" lang="es-ES" sz="1100" b="1" i="0" u="none" strike="noStrike" kern="1200" cap="none" spc="0" normalizeH="0" baseline="0" noProof="0" dirty="0">
-              <a:ln>
-                <a:noFill/>
-              </a:ln>
+              <a:t>en Ciencias Penales.</a:t>
+            </a:r>
+          </a:p>
+          <a:p>
+            <a:pPr defTabSz="2167494">
+              <a:lnSpc>
+                <a:spcPct val="150000"/>
+              </a:lnSpc>
+              <a:defRPr/>
+            </a:pPr>
+            <a:endParaRPr lang="es-ES" sz="2607" dirty="0">
               <a:solidFill>
                 <a:schemeClr val="bg1"/>
               </a:solidFill>
-              <a:effectLst/>
-              <a:uLnTx/>
-              <a:uFillTx/>
               <a:latin typeface="Montserrat" pitchFamily="2" charset="0"/>
-              <a:ea typeface="+mn-ea"/>
-              <a:cs typeface="+mn-cs"/>
             </a:endParaRPr>
           </a:p>
           <a:p>
-            <a:pPr marL="171450" marR="0" lvl="0" indent="-171450" algn="l" defTabSz="914400" rtl="0" eaLnBrk="1" fontAlgn="auto" latinLnBrk="0" hangingPunct="1">
+            <a:pPr marL="406405" indent="-406405" defTabSz="2167494">
               <a:lnSpc>
                 <a:spcPct val="150000"/>
               </a:lnSpc>
-              <a:spcBef>
-                <a:spcPts val="0"/>
-              </a:spcBef>
-              <a:spcAft>
-                <a:spcPts val="0"/>
-              </a:spcAft>
-              <a:buClrTx/>
-              <a:buSzTx/>
               <a:buFont typeface="Arial" panose="020B0604020202020204" pitchFamily="34" charset="0"/>
               <a:buChar char="•"/>
-              <a:tabLst/>
               <a:defRPr/>
             </a:pPr>
-            <a:endParaRPr kumimoji="0" lang="es-ES" sz="600" b="0" i="0" u="none" strike="noStrike" kern="1200" cap="none" spc="0" normalizeH="0" baseline="0" noProof="0" dirty="0">
-              <a:ln>
-                <a:noFill/>
-              </a:ln>
+            <a:r>
+              <a:rPr lang="es-MX" sz="2607" b="1" dirty="0">
+                <a:solidFill>
+                  <a:schemeClr val="bg1"/>
+                </a:solidFill>
+                <a:latin typeface="Montserrat" pitchFamily="2" charset="0"/>
+              </a:rPr>
+              <a:t>Licenciatura  </a:t>
+            </a:r>
+            <a:r>
+              <a:rPr lang="es-MX" sz="2607" dirty="0">
+                <a:solidFill>
+                  <a:schemeClr val="bg1"/>
+                </a:solidFill>
+                <a:latin typeface="Montserrat" pitchFamily="2" charset="0"/>
+              </a:rPr>
+              <a:t>en Derecho. </a:t>
+            </a:r>
+            <a:endParaRPr lang="es-MX" sz="2607" dirty="0">
               <a:solidFill>
                 <a:schemeClr val="bg1"/>
               </a:solidFill>
-              <a:effectLst/>
-              <a:uLnTx/>
-              <a:uFillTx/>
-              <a:latin typeface="Montserrat" pitchFamily="2" charset="0"/>
-              <a:ea typeface="+mn-ea"/>
-              <a:cs typeface="+mn-cs"/>
-            </a:endParaRPr>
-          </a:p>
-          <a:p>
-            <a:pPr marL="171450" marR="0" lvl="0" indent="-171450" algn="l" defTabSz="914400" rtl="0" eaLnBrk="1" fontAlgn="auto" latinLnBrk="0" hangingPunct="1">
-              <a:lnSpc>
-                <a:spcPct val="150000"/>
-              </a:lnSpc>
-              <a:spcBef>
-                <a:spcPts val="0"/>
-              </a:spcBef>
-              <a:spcAft>
-                <a:spcPts val="0"/>
-              </a:spcAft>
-              <a:buClrTx/>
-              <a:buSzTx/>
-              <a:buFont typeface="Arial" panose="020B0604020202020204" pitchFamily="34" charset="0"/>
-              <a:buChar char="•"/>
-              <a:tabLst/>
-              <a:defRPr/>
-            </a:pPr>
-            <a:r>
-              <a:rPr kumimoji="0" lang="es-MX" sz="1100" b="1" i="0" u="none" strike="noStrike" kern="1200" cap="none" spc="0" normalizeH="0" baseline="0" noProof="0" dirty="0">
-                <a:ln>
-                  <a:noFill/>
-                </a:ln>
-                <a:solidFill>
-                  <a:schemeClr val="bg1"/>
-                </a:solidFill>
-                <a:effectLst/>
-                <a:uLnTx/>
-                <a:uFillTx/>
-                <a:latin typeface="Montserrat" pitchFamily="2" charset="0"/>
-                <a:ea typeface="+mn-ea"/>
-                <a:cs typeface="+mn-cs"/>
-              </a:rPr>
-              <a:t>Licenciatura </a:t>
-            </a:r>
-            <a:r>
-              <a:rPr kumimoji="0" lang="es-MX" sz="1100" b="0" i="0" u="none" strike="noStrike" kern="1200" cap="none" spc="0" normalizeH="0" baseline="0" noProof="0" dirty="0">
-                <a:ln>
-                  <a:noFill/>
-                </a:ln>
-                <a:solidFill>
-                  <a:schemeClr val="bg1"/>
-                </a:solidFill>
-                <a:effectLst/>
-                <a:uLnTx/>
-                <a:uFillTx/>
-                <a:latin typeface="Montserrat" pitchFamily="2" charset="0"/>
-                <a:ea typeface="+mn-ea"/>
-                <a:cs typeface="+mn-cs"/>
-              </a:rPr>
-              <a:t>en  Derecho.</a:t>
-            </a:r>
-          </a:p>
-          <a:p>
-            <a:pPr algn="ctr">
-              <a:lnSpc>
-                <a:spcPct val="115000"/>
-              </a:lnSpc>
-              <a:spcAft>
-                <a:spcPts val="0"/>
-              </a:spcAft>
-            </a:pPr>
-            <a:r>
-              <a:rPr lang="es-MX" sz="1100" dirty="0">
-                <a:solidFill>
-                  <a:schemeClr val="bg1"/>
-                </a:solidFill>
-                <a:effectLst/>
-                <a:latin typeface="Montserrat" pitchFamily="2" charset="0"/>
-              </a:rPr>
-              <a:t> </a:t>
-            </a:r>
-            <a:endParaRPr lang="es-MX" sz="1100" dirty="0">
-              <a:solidFill>
-                <a:schemeClr val="bg1"/>
-              </a:solidFill>
-              <a:effectLst/>
               <a:latin typeface="Montserrat" pitchFamily="2" charset="0"/>
               <a:ea typeface="Calibri"/>
               <a:cs typeface="Times New Roman"/>
@@ -3795,8 +3656,8 @@
         </p:nvSpPr>
         <p:spPr>
           <a:xfrm>
-            <a:off x="135637" y="6074540"/>
-            <a:ext cx="2174127" cy="2094997"/>
+            <a:off x="532573" y="8434241"/>
+            <a:ext cx="4942424" cy="4292072"/>
           </a:xfrm>
           <a:prstGeom prst="rect">
             <a:avLst/>
@@ -3809,147 +3670,82 @@
           </a:bodyPr>
           <a:lstStyle/>
           <a:p>
-            <a:pPr marL="0" marR="0" lvl="0" indent="0" algn="ctr" defTabSz="914400" rtl="0" eaLnBrk="1" fontAlgn="auto" latinLnBrk="0" hangingPunct="1">
+            <a:pPr algn="ctr" defTabSz="2167494">
               <a:lnSpc>
                 <a:spcPct val="150000"/>
               </a:lnSpc>
-              <a:spcBef>
-                <a:spcPts val="0"/>
-              </a:spcBef>
-              <a:spcAft>
-                <a:spcPts val="0"/>
-              </a:spcAft>
-              <a:buClrTx/>
-              <a:buSzTx/>
-              <a:buFontTx/>
-              <a:buNone/>
-              <a:tabLst/>
               <a:defRPr/>
             </a:pPr>
             <a:r>
-              <a:rPr kumimoji="0" lang="es-MX" sz="1100" b="1" i="0" u="none" strike="noStrike" kern="1200" cap="none" spc="0" normalizeH="0" baseline="0" noProof="0" dirty="0">
-                <a:ln>
-                  <a:noFill/>
-                </a:ln>
+              <a:rPr lang="es-MX" sz="2844" b="1" dirty="0">
                 <a:solidFill>
                   <a:schemeClr val="bg1"/>
                 </a:solidFill>
-                <a:effectLst/>
-                <a:uLnTx/>
-                <a:uFillTx/>
                 <a:latin typeface="Montserrat" pitchFamily="2" charset="0"/>
-                <a:ea typeface="+mn-ea"/>
-                <a:cs typeface="+mn-cs"/>
               </a:rPr>
               <a:t>Información de Contacto</a:t>
             </a:r>
           </a:p>
           <a:p>
-            <a:pPr marL="0" marR="0" lvl="0" indent="0" algn="ctr" defTabSz="914400" rtl="0" eaLnBrk="1" fontAlgn="auto" latinLnBrk="0" hangingPunct="1">
+            <a:pPr algn="just">
               <a:lnSpc>
                 <a:spcPct val="150000"/>
               </a:lnSpc>
-              <a:spcBef>
-                <a:spcPts val="0"/>
-              </a:spcBef>
-              <a:spcAft>
-                <a:spcPts val="0"/>
-              </a:spcAft>
-              <a:buClrTx/>
-              <a:buSzTx/>
-              <a:buFontTx/>
-              <a:buNone/>
-              <a:tabLst/>
-              <a:defRPr/>
             </a:pPr>
-            <a:endParaRPr kumimoji="0" lang="es-MX" sz="1100" b="1" i="0" u="none" strike="noStrike" kern="1200" cap="none" spc="0" normalizeH="0" baseline="0" noProof="0" dirty="0">
-              <a:ln>
-                <a:noFill/>
-              </a:ln>
-              <a:solidFill>
-                <a:schemeClr val="bg1"/>
-              </a:solidFill>
-              <a:effectLst/>
-              <a:uLnTx/>
-              <a:uFillTx/>
-              <a:latin typeface="Montserrat" pitchFamily="2" charset="0"/>
-              <a:ea typeface="+mn-ea"/>
-              <a:cs typeface="+mn-cs"/>
-            </a:endParaRPr>
-          </a:p>
-          <a:p>
-            <a:pPr marL="0" indent="0" algn="just">
-              <a:lnSpc>
-                <a:spcPct val="150000"/>
-              </a:lnSpc>
-              <a:spcAft>
-                <a:spcPts val="0"/>
-              </a:spcAft>
-              <a:buFont typeface="Wingdings" pitchFamily="2" charset="2"/>
-              <a:buNone/>
-            </a:pPr>
-            <a:r>
-              <a:rPr lang="es-MX" sz="1100" b="1" dirty="0">
+            <a:r>
+              <a:rPr lang="es-MX" sz="2607" b="1" dirty="0">
                 <a:solidFill>
                   <a:schemeClr val="bg1"/>
                 </a:solidFill>
-                <a:effectLst/>
                 <a:latin typeface="Montserrat" pitchFamily="2" charset="0"/>
                 <a:sym typeface="Wingdings 2"/>
               </a:rPr>
               <a:t> </a:t>
             </a:r>
             <a:r>
-              <a:rPr lang="es-MX" sz="1100" b="1" dirty="0">
+              <a:rPr lang="es-MX" sz="2607" b="1" dirty="0">
                 <a:solidFill>
                   <a:schemeClr val="bg1"/>
                 </a:solidFill>
-                <a:effectLst/>
                 <a:latin typeface="Montserrat" pitchFamily="2" charset="0"/>
                 <a:sym typeface="Wingdings"/>
               </a:rPr>
               <a:t>Personal: </a:t>
             </a:r>
             <a:r>
-              <a:rPr lang="es-MX" sz="1100" b="0" dirty="0">
+              <a:rPr lang="es-MX" sz="2607" dirty="0">
                 <a:solidFill>
                   <a:schemeClr val="bg1"/>
                 </a:solidFill>
-                <a:effectLst/>
                 <a:latin typeface="Montserrat" pitchFamily="2" charset="0"/>
                 <a:sym typeface="Wingdings"/>
               </a:rPr>
-              <a:t>5513581775</a:t>
-            </a:r>
-          </a:p>
-          <a:p>
-            <a:pPr marL="171450" indent="-171450" algn="just">
+              <a:t>8261661241</a:t>
+            </a:r>
+          </a:p>
+          <a:p>
+            <a:pPr marL="406405" indent="-406405" algn="just">
               <a:lnSpc>
                 <a:spcPct val="150000"/>
               </a:lnSpc>
-              <a:spcAft>
-                <a:spcPts val="0"/>
-              </a:spcAft>
               <a:buFont typeface="Wingdings" pitchFamily="2" charset="2"/>
               <a:buChar char="("/>
             </a:pPr>
             <a:r>
-              <a:rPr lang="es-MX" sz="1100" b="1" dirty="0">
+              <a:rPr lang="es-MX" sz="2607" b="1" dirty="0">
                 <a:solidFill>
                   <a:schemeClr val="bg1"/>
                 </a:solidFill>
-                <a:effectLst/>
                 <a:latin typeface="Montserrat" pitchFamily="2" charset="0"/>
                 <a:sym typeface="Wingdings"/>
               </a:rPr>
               <a:t>Trabajo: </a:t>
             </a:r>
             <a:r>
-              <a:rPr lang="es-MX" sz="1100" b="0" dirty="0">
+              <a:rPr lang="es-MX" sz="2607" dirty="0">
                 <a:solidFill>
                   <a:schemeClr val="bg1"/>
                 </a:solidFill>
-                <a:effectLst/>
                 <a:latin typeface="Montserrat" pitchFamily="2" charset="0"/>
                 <a:sym typeface="Wingdings"/>
               </a:rPr>
@@ -3957,22 +3753,16 @@
             </a:r>
           </a:p>
           <a:p>
-            <a:pPr marL="0" indent="0" algn="just">
+            <a:pPr algn="just">
               <a:lnSpc>
                 <a:spcPct val="150000"/>
               </a:lnSpc>
-              <a:spcAft>
-                <a:spcPts val="0"/>
-              </a:spcAft>
-              <a:buFont typeface="Wingdings" pitchFamily="2" charset="2"/>
-              <a:buNone/>
             </a:pPr>
             <a:r>
-              <a:rPr lang="es-MX" sz="1100" b="0" baseline="0" dirty="0">
+              <a:rPr lang="es-MX" sz="2607" dirty="0">
                 <a:solidFill>
                   <a:schemeClr val="bg1"/>
                 </a:solidFill>
-                <a:effectLst/>
                 <a:latin typeface="Montserrat" pitchFamily="2" charset="0"/>
                 <a:sym typeface="Wingdings"/>
               </a:rPr>
@@ -3980,45 +3770,35 @@
             </a:r>
           </a:p>
           <a:p>
-            <a:pPr marL="0" indent="0" algn="just">
+            <a:pPr marL="406405" indent="-406405" algn="just">
               <a:lnSpc>
                 <a:spcPct val="150000"/>
               </a:lnSpc>
-              <a:spcAft>
-                <a:spcPts val="0"/>
-              </a:spcAft>
               <a:buFont typeface="Wingdings" pitchFamily="2" charset="2"/>
-              <a:buNone/>
+              <a:buChar char="*"/>
             </a:pPr>
             <a:r>
-              <a:rPr lang="es-MX" sz="1100" b="1" dirty="0">
+              <a:rPr lang="es-MX" sz="2607" b="1" dirty="0">
                 <a:solidFill>
                   <a:schemeClr val="bg1"/>
                 </a:solidFill>
-                <a:effectLst/>
                 <a:latin typeface="Montserrat" pitchFamily="2" charset="0"/>
                 <a:sym typeface="Wingdings"/>
               </a:rPr>
-              <a:t>Institucional: </a:t>
-            </a:r>
-          </a:p>
-          <a:p>
-            <a:pPr marL="0" indent="0" algn="just">
+              <a:t>Institucional </a:t>
+            </a:r>
+          </a:p>
+          <a:p>
+            <a:pPr algn="just">
               <a:lnSpc>
                 <a:spcPct val="150000"/>
               </a:lnSpc>
-              <a:spcAft>
-                <a:spcPts val="0"/>
-              </a:spcAft>
-              <a:buFont typeface="Wingdings" pitchFamily="2" charset="2"/>
-              <a:buNone/>
             </a:pPr>
             <a:r>
-              <a:rPr lang="es-MX" sz="1100" b="1" dirty="0">
+              <a:rPr lang="es-MX" sz="2607" b="1" dirty="0">
                 <a:solidFill>
                   <a:schemeClr val="bg1"/>
                 </a:solidFill>
-                <a:effectLst/>
                 <a:latin typeface="Montserrat" pitchFamily="2" charset="0"/>
                 <a:sym typeface="Wingdings"/>
                 <a:hlinkClick r:id="rId3">
@@ -4029,33 +3809,26 @@
                   </a:extLst>
                 </a:hlinkClick>
               </a:rPr>
-              <a:t>ivramirezg@inami.gob.mx</a:t>
-            </a:r>
-            <a:endParaRPr lang="es-MX" sz="1100" b="1" dirty="0">
+              <a:t>fgaona@inami.gob.mx</a:t>
+            </a:r>
+            <a:endParaRPr lang="es-MX" sz="2607" b="1" dirty="0">
               <a:solidFill>
                 <a:schemeClr val="bg1"/>
               </a:solidFill>
-              <a:effectLst/>
               <a:latin typeface="Montserrat" pitchFamily="2" charset="0"/>
               <a:sym typeface="Wingdings"/>
             </a:endParaRPr>
           </a:p>
           <a:p>
-            <a:pPr marL="0" indent="0" algn="just">
+            <a:pPr algn="just">
               <a:lnSpc>
                 <a:spcPct val="150000"/>
               </a:lnSpc>
-              <a:spcAft>
-                <a:spcPts val="0"/>
-              </a:spcAft>
-              <a:buFont typeface="Wingdings" pitchFamily="2" charset="2"/>
-              <a:buNone/>
             </a:pPr>
-            <a:endParaRPr lang="es-MX" sz="1100" b="1" dirty="0">
+            <a:endParaRPr lang="es-MX" sz="2607" b="1" dirty="0">
               <a:solidFill>
                 <a:schemeClr val="bg1"/>
               </a:solidFill>
-              <a:effectLst/>
               <a:latin typeface="Montserrat" pitchFamily="2" charset="0"/>
               <a:sym typeface="Wingdings"/>
             </a:endParaRPr>
@@ -4076,8 +3849,8 @@
         </p:nvSpPr>
         <p:spPr>
           <a:xfrm>
-            <a:off x="2238262" y="1618288"/>
-            <a:ext cx="4619952" cy="6665479"/>
+            <a:off x="5389987" y="-2712264"/>
+            <a:ext cx="10695998" cy="16929956"/>
           </a:xfrm>
           <a:prstGeom prst="rect">
             <a:avLst/>
@@ -4102,16 +3875,12 @@
               <a:lnSpc>
                 <a:spcPct val="150000"/>
               </a:lnSpc>
-              <a:spcAft>
-                <a:spcPts val="0"/>
-              </a:spcAft>
             </a:pPr>
             <a:r>
-              <a:rPr lang="es-MX" b="1" dirty="0">
+              <a:rPr lang="es-MX" sz="4267" b="1" dirty="0">
                 <a:solidFill>
                   <a:srgbClr val="DEC9A7"/>
                 </a:solidFill>
-                <a:effectLst/>
                 <a:latin typeface="Montserrat" pitchFamily="2" charset="0"/>
               </a:rPr>
               <a:t>TRAYECTORIA INM</a:t>
@@ -4122,648 +3891,393 @@
               <a:lnSpc>
                 <a:spcPct val="150000"/>
               </a:lnSpc>
-              <a:spcAft>
-                <a:spcPts val="0"/>
-              </a:spcAft>
             </a:pPr>
-            <a:endParaRPr lang="es-MX" sz="900" b="1" dirty="0">
+            <a:endParaRPr lang="es-MX" sz="2370" b="1" dirty="0">
               <a:solidFill>
                 <a:srgbClr val="DEC9A7"/>
               </a:solidFill>
-              <a:effectLst/>
               <a:latin typeface="Montserrat" pitchFamily="2" charset="0"/>
             </a:endParaRPr>
           </a:p>
           <a:p>
-            <a:pPr marL="0" marR="0" indent="0" algn="l" defTabSz="914400" rtl="0" eaLnBrk="1" fontAlgn="auto" latinLnBrk="0" hangingPunct="1">
+            <a:pPr defTabSz="2167494">
               <a:lnSpc>
                 <a:spcPct val="150000"/>
               </a:lnSpc>
-              <a:spcBef>
-                <a:spcPts val="0"/>
-              </a:spcBef>
-              <a:spcAft>
-                <a:spcPts val="0"/>
-              </a:spcAft>
-              <a:buClrTx/>
-              <a:buSzTx/>
-              <a:buFontTx/>
-              <a:buNone/>
-              <a:tabLst/>
               <a:defRPr/>
             </a:pPr>
             <a:r>
-              <a:rPr lang="es-MX" sz="1000" b="1" baseline="0" dirty="0">
+              <a:rPr lang="es-MX" sz="2370" b="1" dirty="0">
                 <a:solidFill>
                   <a:srgbClr val="660033"/>
                 </a:solidFill>
-                <a:effectLst/>
                 <a:latin typeface="Montserrat" pitchFamily="2" charset="0"/>
               </a:rPr>
-              <a:t>Año de ingreso al INM: 2018/2024</a:t>
-            </a:r>
-          </a:p>
-          <a:p>
-            <a:pPr marL="171450" marR="0" indent="-171450" algn="l" defTabSz="914400" rtl="0" eaLnBrk="1" fontAlgn="auto" latinLnBrk="0" hangingPunct="1">
+              <a:t>Año de ingreso al INM: 2019</a:t>
+            </a:r>
+          </a:p>
+          <a:p>
+            <a:pPr marL="406405" indent="-406405" algn="just">
               <a:lnSpc>
                 <a:spcPct val="150000"/>
               </a:lnSpc>
-              <a:spcBef>
-                <a:spcPts val="0"/>
-              </a:spcBef>
-              <a:spcAft>
-                <a:spcPts val="0"/>
-              </a:spcAft>
-              <a:buClrTx/>
-              <a:buSzTx/>
               <a:buFont typeface="Wingdings" panose="05000000000000000000" pitchFamily="2" charset="2"/>
               <a:buChar char="§"/>
-              <a:tabLst/>
-              <a:defRPr/>
             </a:pPr>
             <a:r>
-              <a:rPr lang="es-MX" sz="1000" b="1" kern="1200" baseline="0" dirty="0">
+              <a:rPr lang="es-MX" sz="2370" b="1" dirty="0">
                 <a:solidFill>
                   <a:srgbClr val="660033"/>
                 </a:solidFill>
-                <a:effectLst/>
                 <a:latin typeface="Montserrat" pitchFamily="2" charset="0"/>
-                <a:ea typeface="+mn-ea"/>
-                <a:cs typeface="+mn-cs"/>
               </a:rPr>
-              <a:t>Oficina de Representación en el Estado de Jalisco</a:t>
-            </a:r>
-          </a:p>
-          <a:p>
-            <a:pPr marL="0" marR="0" indent="0" algn="just" defTabSz="914400" rtl="0" eaLnBrk="1" fontAlgn="auto" latinLnBrk="0" hangingPunct="1">
+              <a:t>Oficina de Representación en el Estado de Jalisco.</a:t>
+            </a:r>
+          </a:p>
+          <a:p>
+            <a:pPr marL="428983" indent="-428983" algn="just">
               <a:lnSpc>
                 <a:spcPct val="150000"/>
               </a:lnSpc>
-              <a:spcBef>
-                <a:spcPts val="0"/>
-              </a:spcBef>
-              <a:spcAft>
-                <a:spcPts val="0"/>
-              </a:spcAft>
-              <a:buClrTx/>
-              <a:buSzTx/>
-              <a:buFontTx/>
-              <a:buNone/>
-              <a:tabLst/>
-              <a:defRPr/>
             </a:pPr>
             <a:r>
-              <a:rPr lang="es-MX" sz="1000" b="1" kern="1200" baseline="0" dirty="0">
+              <a:rPr lang="es-MX" sz="2370" b="1" dirty="0">
                 <a:solidFill>
                   <a:srgbClr val="660033"/>
                 </a:solidFill>
-                <a:effectLst/>
                 <a:latin typeface="Montserrat" pitchFamily="2" charset="0"/>
-                <a:ea typeface="+mn-ea"/>
-                <a:cs typeface="+mn-cs"/>
               </a:rPr>
-              <a:t>     16/01/2024 - a la fecha: </a:t>
-            </a:r>
-            <a:r>
-              <a:rPr lang="es-MX" sz="1000" b="0" kern="1200" baseline="0" dirty="0">
+              <a:t>     16/06/2025 - a la fecha: </a:t>
+            </a:r>
+            <a:r>
+              <a:rPr lang="es-MX" sz="2370" dirty="0">
                 <a:solidFill>
                   <a:srgbClr val="660033"/>
                 </a:solidFill>
-                <a:effectLst/>
                 <a:latin typeface="Montserrat" pitchFamily="2" charset="0"/>
-                <a:ea typeface="+mn-ea"/>
-                <a:cs typeface="+mn-cs"/>
               </a:rPr>
               <a:t>Titular de la Oficina de  Representación.</a:t>
             </a:r>
-          </a:p>
-          <a:p>
-            <a:pPr marL="171450" marR="0" indent="-171450" algn="l" defTabSz="914400" rtl="0" eaLnBrk="1" fontAlgn="auto" latinLnBrk="0" hangingPunct="1">
+            <a:endParaRPr lang="es-MX" sz="2370" b="1" dirty="0">
+              <a:solidFill>
+                <a:srgbClr val="660033"/>
+              </a:solidFill>
+              <a:latin typeface="Montserrat" pitchFamily="2" charset="0"/>
+            </a:endParaRPr>
+          </a:p>
+          <a:p>
+            <a:pPr marL="406405" indent="-406405" algn="just">
               <a:lnSpc>
                 <a:spcPct val="150000"/>
               </a:lnSpc>
-              <a:spcBef>
-                <a:spcPts val="0"/>
-              </a:spcBef>
-              <a:spcAft>
-                <a:spcPts val="0"/>
-              </a:spcAft>
-              <a:buClrTx/>
-              <a:buSzTx/>
               <a:buFont typeface="Wingdings" panose="05000000000000000000" pitchFamily="2" charset="2"/>
               <a:buChar char="§"/>
-              <a:tabLst/>
-              <a:defRPr/>
             </a:pPr>
             <a:r>
-              <a:rPr lang="es-MX" sz="1000" b="1" kern="1200" baseline="0" dirty="0">
+              <a:rPr lang="es-MX" sz="2370" b="1" dirty="0">
                 <a:solidFill>
                   <a:srgbClr val="660033"/>
                 </a:solidFill>
-                <a:effectLst/>
                 <a:latin typeface="Montserrat" pitchFamily="2" charset="0"/>
-                <a:ea typeface="+mn-ea"/>
-                <a:cs typeface="+mn-cs"/>
               </a:rPr>
-              <a:t>Dirección General de Control y Verificación Migratoria</a:t>
-            </a:r>
-          </a:p>
-          <a:p>
-            <a:pPr marL="182563" indent="-182563" algn="just">
+              <a:t>Oficina de Representación en el Estado de Puebla.</a:t>
+            </a:r>
+          </a:p>
+          <a:p>
+            <a:pPr marL="428983" indent="-428983" algn="just">
               <a:lnSpc>
                 <a:spcPct val="150000"/>
               </a:lnSpc>
-              <a:spcAft>
-                <a:spcPts val="0"/>
-              </a:spcAft>
             </a:pPr>
             <a:r>
-              <a:rPr lang="es-MX" sz="1000" b="1" kern="1200" baseline="0" dirty="0">
+              <a:rPr lang="es-MX" sz="2370" b="1" dirty="0">
                 <a:solidFill>
                   <a:srgbClr val="660033"/>
                 </a:solidFill>
-                <a:effectLst/>
                 <a:latin typeface="Montserrat" pitchFamily="2" charset="0"/>
-                <a:ea typeface="+mn-ea"/>
-                <a:cs typeface="+mn-cs"/>
               </a:rPr>
-              <a:t>     01/04/2022 – 15/04/2023: </a:t>
-            </a:r>
-            <a:r>
-              <a:rPr lang="es-MX" sz="1000" b="0" kern="1200" baseline="0" dirty="0">
+              <a:t>     01/01/2023 – 15/06/2025: </a:t>
+            </a:r>
+            <a:r>
+              <a:rPr lang="es-MX" sz="2370" dirty="0">
                 <a:solidFill>
                   <a:srgbClr val="660033"/>
                 </a:solidFill>
-                <a:effectLst/>
                 <a:latin typeface="Montserrat" pitchFamily="2" charset="0"/>
-                <a:ea typeface="+mn-ea"/>
-                <a:cs typeface="+mn-cs"/>
               </a:rPr>
-              <a:t>Coordinación de Información e  Investigación Migratoria.</a:t>
-            </a:r>
-          </a:p>
-          <a:p>
-            <a:pPr marL="182563" indent="-182563" algn="just">
+              <a:t>Titular de la Oficina de  Representación.</a:t>
+            </a:r>
+          </a:p>
+          <a:p>
+            <a:pPr marL="428983" indent="-428983" algn="just">
               <a:lnSpc>
                 <a:spcPct val="150000"/>
               </a:lnSpc>
-              <a:spcAft>
-                <a:spcPts val="0"/>
-              </a:spcAft>
               <a:buFont typeface="Wingdings" panose="05000000000000000000" pitchFamily="2" charset="2"/>
               <a:buChar char="§"/>
             </a:pPr>
             <a:r>
-              <a:rPr lang="es-MX" sz="1000" b="1" kern="1200" baseline="0" dirty="0">
+              <a:rPr lang="es-MX" sz="2370" b="1" dirty="0">
                 <a:solidFill>
                   <a:srgbClr val="660033"/>
                 </a:solidFill>
-                <a:effectLst/>
                 <a:latin typeface="Montserrat" pitchFamily="2" charset="0"/>
-                <a:ea typeface="+mn-ea"/>
-                <a:cs typeface="+mn-cs"/>
               </a:rPr>
-              <a:t>Dirección General de Administración</a:t>
-            </a:r>
-          </a:p>
-          <a:p>
-            <a:pPr marL="0" indent="0" algn="just">
+              <a:t>Oficina de Representación en el Estado de Tlaxcala.</a:t>
+            </a:r>
+          </a:p>
+          <a:p>
+            <a:pPr defTabSz="2167494">
               <a:lnSpc>
                 <a:spcPct val="150000"/>
               </a:lnSpc>
-              <a:spcAft>
-                <a:spcPts val="0"/>
-              </a:spcAft>
-              <a:buFont typeface="Wingdings" panose="05000000000000000000" pitchFamily="2" charset="2"/>
-              <a:buNone/>
+              <a:defRPr/>
             </a:pPr>
             <a:r>
-              <a:rPr lang="es-MX" sz="1000" b="1" kern="1200" baseline="0" dirty="0">
+              <a:rPr lang="es-MX" sz="2370" b="1" dirty="0">
                 <a:solidFill>
                   <a:srgbClr val="660033"/>
                 </a:solidFill>
-                <a:effectLst/>
                 <a:latin typeface="Montserrat" pitchFamily="2" charset="0"/>
-                <a:ea typeface="+mn-ea"/>
-                <a:cs typeface="+mn-cs"/>
               </a:rPr>
-              <a:t>     16/05/2019 – 31/03/2022: </a:t>
-            </a:r>
-            <a:r>
-              <a:rPr lang="es-MX" sz="1000" b="0" kern="1200" baseline="0" dirty="0">
+              <a:t>     16/01/2022 – 31/12/2022: </a:t>
+            </a:r>
+            <a:r>
+              <a:rPr lang="es-MX" sz="2370" dirty="0">
                 <a:solidFill>
                   <a:srgbClr val="660033"/>
                 </a:solidFill>
-                <a:effectLst/>
                 <a:latin typeface="Montserrat" pitchFamily="2" charset="0"/>
-                <a:ea typeface="+mn-ea"/>
-                <a:cs typeface="+mn-cs"/>
               </a:rPr>
-              <a:t>Titular de la Dirección General.</a:t>
-            </a:r>
-          </a:p>
-          <a:p>
-            <a:pPr marL="182563" indent="-182563" algn="just">
+              <a:t>Titular de la Oficina de  Representación.</a:t>
+            </a:r>
+          </a:p>
+          <a:p>
+            <a:pPr marL="406405" indent="-406405" defTabSz="2167494">
               <a:lnSpc>
                 <a:spcPct val="150000"/>
               </a:lnSpc>
-              <a:spcAft>
-                <a:spcPts val="0"/>
-              </a:spcAft>
               <a:buFont typeface="Wingdings" panose="05000000000000000000" pitchFamily="2" charset="2"/>
-              <a:buNone/>
+              <a:buChar char="§"/>
+              <a:defRPr/>
             </a:pPr>
             <a:r>
-              <a:rPr lang="es-MX" sz="1000" b="1" kern="1200" baseline="0" dirty="0">
+              <a:rPr lang="es-MX" sz="2370" b="1" dirty="0">
                 <a:solidFill>
                   <a:srgbClr val="660033"/>
                 </a:solidFill>
-                <a:effectLst/>
                 <a:latin typeface="Montserrat" pitchFamily="2" charset="0"/>
-                <a:ea typeface="+mn-ea"/>
-                <a:cs typeface="+mn-cs"/>
               </a:rPr>
-              <a:t>     01/12/2018 - 15/05/2019 – </a:t>
-            </a:r>
-            <a:r>
-              <a:rPr lang="es-MX" sz="1000" b="0" kern="1200" baseline="0" dirty="0">
-                <a:solidFill>
-                  <a:srgbClr val="660033"/>
-                </a:solidFill>
-                <a:effectLst/>
-                <a:latin typeface="Montserrat" pitchFamily="2" charset="0"/>
-                <a:ea typeface="+mn-ea"/>
-                <a:cs typeface="+mn-cs"/>
-              </a:rPr>
-              <a:t>Directora General Adjunta de la Dirección    General.</a:t>
-            </a:r>
-          </a:p>
-          <a:p>
-            <a:pPr marL="182563" indent="-182563" algn="just">
+              <a:t>Oficina de Representación en el Estado de Puebla.</a:t>
+            </a:r>
+          </a:p>
+          <a:p>
+            <a:pPr defTabSz="2167494">
               <a:lnSpc>
                 <a:spcPct val="150000"/>
               </a:lnSpc>
-              <a:spcAft>
-                <a:spcPts val="0"/>
-              </a:spcAft>
-              <a:buFont typeface="Wingdings" panose="05000000000000000000" pitchFamily="2" charset="2"/>
-              <a:buNone/>
+              <a:defRPr/>
             </a:pPr>
-            <a:endParaRPr lang="es-MX" sz="1000" b="0" kern="1200" baseline="0" dirty="0">
+            <a:r>
+              <a:rPr lang="es-MX" sz="2370" dirty="0">
+                <a:solidFill>
+                  <a:srgbClr val="660033"/>
+                </a:solidFill>
+                <a:latin typeface="Montserrat" pitchFamily="2" charset="0"/>
+              </a:rPr>
+              <a:t>     </a:t>
+            </a:r>
+            <a:r>
+              <a:rPr lang="es-MX" sz="2370" b="1" dirty="0">
+                <a:solidFill>
+                  <a:srgbClr val="660033"/>
+                </a:solidFill>
+                <a:latin typeface="Montserrat" pitchFamily="2" charset="0"/>
+              </a:rPr>
+              <a:t>16/06/2019 – 15/01/2022:</a:t>
+            </a:r>
+            <a:r>
+              <a:rPr lang="es-MX" sz="2370" dirty="0">
+                <a:solidFill>
+                  <a:srgbClr val="660033"/>
+                </a:solidFill>
+                <a:latin typeface="Montserrat" pitchFamily="2" charset="0"/>
+              </a:rPr>
+              <a:t> Representante Local Zona Norte.</a:t>
+            </a:r>
+          </a:p>
+          <a:p>
+            <a:pPr defTabSz="2167494">
+              <a:lnSpc>
+                <a:spcPct val="150000"/>
+              </a:lnSpc>
+              <a:defRPr/>
+            </a:pPr>
+            <a:endParaRPr lang="es-MX" sz="2370" dirty="0">
               <a:solidFill>
                 <a:srgbClr val="660033"/>
               </a:solidFill>
-              <a:effectLst/>
               <a:latin typeface="Montserrat" pitchFamily="2" charset="0"/>
-              <a:ea typeface="+mn-ea"/>
-              <a:cs typeface="+mn-cs"/>
             </a:endParaRPr>
           </a:p>
           <a:p>
-            <a:pPr marL="0" marR="0" lvl="0" indent="0" algn="just" defTabSz="914400" rtl="0" eaLnBrk="1" fontAlgn="auto" latinLnBrk="0" hangingPunct="1">
+            <a:pPr>
               <a:lnSpc>
                 <a:spcPct val="150000"/>
               </a:lnSpc>
-              <a:spcBef>
-                <a:spcPts val="0"/>
-              </a:spcBef>
-              <a:spcAft>
-                <a:spcPts val="0"/>
-              </a:spcAft>
-              <a:buClrTx/>
-              <a:buSzTx/>
-              <a:buFont typeface="Wingdings" panose="05000000000000000000" pitchFamily="2" charset="2"/>
-              <a:buNone/>
-              <a:tabLst/>
-              <a:defRPr/>
             </a:pPr>
             <a:r>
-              <a:rPr lang="es-MX" sz="1600" b="1" dirty="0">
+              <a:rPr lang="es-MX" sz="3793" b="1" dirty="0">
                 <a:solidFill>
                   <a:srgbClr val="DEC9A7"/>
                 </a:solidFill>
-                <a:effectLst/>
                 <a:latin typeface="Montserrat" pitchFamily="2" charset="0"/>
               </a:rPr>
               <a:t>CARRERA PROFESIONAL</a:t>
             </a:r>
           </a:p>
           <a:p>
-            <a:pPr marL="0" marR="0" lvl="0" indent="0" algn="just" defTabSz="914400" rtl="0" eaLnBrk="1" fontAlgn="auto" latinLnBrk="0" hangingPunct="1">
+            <a:pPr>
               <a:lnSpc>
                 <a:spcPct val="150000"/>
               </a:lnSpc>
-              <a:spcBef>
-                <a:spcPts val="0"/>
-              </a:spcBef>
-              <a:spcAft>
-                <a:spcPts val="0"/>
-              </a:spcAft>
-              <a:buClrTx/>
-              <a:buSzTx/>
-              <a:buFont typeface="Wingdings" panose="05000000000000000000" pitchFamily="2" charset="2"/>
-              <a:buNone/>
-              <a:tabLst/>
-              <a:defRPr/>
             </a:pPr>
-            <a:endParaRPr lang="es-MX" sz="900" b="1" dirty="0">
+            <a:endParaRPr lang="es-MX" sz="3319" b="1" dirty="0">
               <a:solidFill>
                 <a:srgbClr val="DEC9A7"/>
               </a:solidFill>
-              <a:effectLst/>
               <a:latin typeface="Montserrat" pitchFamily="2" charset="0"/>
             </a:endParaRPr>
           </a:p>
           <a:p>
-            <a:pPr marL="0" marR="0" lvl="0" indent="0" algn="just" defTabSz="914400" rtl="0" eaLnBrk="1" fontAlgn="auto" latinLnBrk="0" hangingPunct="1">
+            <a:pPr algn="just">
               <a:lnSpc>
                 <a:spcPct val="150000"/>
               </a:lnSpc>
-              <a:spcBef>
-                <a:spcPts val="0"/>
-              </a:spcBef>
-              <a:spcAft>
-                <a:spcPts val="0"/>
-              </a:spcAft>
-              <a:buClrTx/>
-              <a:buSzTx/>
-              <a:buFontTx/>
-              <a:buNone/>
-              <a:tabLst/>
-              <a:defRPr/>
             </a:pPr>
             <a:r>
-              <a:rPr lang="es-MX" sz="1000" b="1" kern="1200" dirty="0">
+              <a:rPr lang="es-MX" sz="2370" b="1" dirty="0">
                 <a:solidFill>
                   <a:srgbClr val="660033"/>
                 </a:solidFill>
-                <a:effectLst/>
                 <a:latin typeface="Montserrat" pitchFamily="2" charset="0"/>
-                <a:ea typeface="+mn-ea"/>
-                <a:cs typeface="+mn-cs"/>
               </a:rPr>
-              <a:t>Cuenta con más de 17 años de experiencia en la Administración Pública, ocupando los siguientes cargos, entre otros:</a:t>
-            </a:r>
-          </a:p>
-          <a:p>
-            <a:pPr marL="171450" marR="0" lvl="0" indent="-171450" algn="just" defTabSz="914400" rtl="0" eaLnBrk="1" fontAlgn="auto" latinLnBrk="0" hangingPunct="1">
+              <a:t>Cuenta con más de 15 años de experiencia en la Administración Pública, ocupando los siguientes puestos, entre otros:</a:t>
+            </a:r>
+          </a:p>
+          <a:p>
+            <a:pPr marL="406405" indent="-406405" algn="just">
               <a:lnSpc>
                 <a:spcPct val="150000"/>
               </a:lnSpc>
-              <a:spcBef>
-                <a:spcPts val="0"/>
-              </a:spcBef>
-              <a:spcAft>
-                <a:spcPts val="0"/>
-              </a:spcAft>
-              <a:buClrTx/>
-              <a:buSzTx/>
               <a:buFont typeface="Wingdings" panose="05000000000000000000" pitchFamily="2" charset="2"/>
               <a:buChar char="§"/>
-              <a:tabLst/>
-              <a:defRPr/>
             </a:pPr>
             <a:r>
-              <a:rPr lang="es-MX" sz="1000" b="1" kern="1200" dirty="0">
+              <a:rPr lang="es-MX" sz="2370" b="1" dirty="0">
                 <a:solidFill>
                   <a:srgbClr val="660033"/>
                 </a:solidFill>
-                <a:effectLst/>
                 <a:latin typeface="Montserrat" pitchFamily="2" charset="0"/>
-                <a:ea typeface="+mn-ea"/>
-                <a:cs typeface="+mn-cs"/>
               </a:rPr>
-              <a:t>Secretaría de Hacienda y Crédito Público: </a:t>
-            </a:r>
-            <a:r>
-              <a:rPr lang="es-MX" sz="1000" b="0" kern="1200" dirty="0">
+              <a:t>Gobierno del Estado de México: </a:t>
+            </a:r>
+            <a:r>
+              <a:rPr lang="es-MX" sz="2370" dirty="0">
                 <a:solidFill>
                   <a:srgbClr val="660033"/>
                 </a:solidFill>
-                <a:effectLst/>
                 <a:latin typeface="Montserrat" pitchFamily="2" charset="0"/>
-                <a:ea typeface="+mn-ea"/>
-                <a:cs typeface="+mn-cs"/>
               </a:rPr>
-              <a:t>Directora de Normatividad.</a:t>
-            </a:r>
-          </a:p>
-          <a:p>
-            <a:pPr marL="171450" marR="0" lvl="0" indent="-171450" algn="just" defTabSz="914400" rtl="0" eaLnBrk="1" fontAlgn="auto" latinLnBrk="0" hangingPunct="1">
+              <a:t>Subdirector de Licencias de Funcionamiento/Subdirector de Movilidad/Director de Apoyo Técnico del Sistema Estatal de Seguridad Pública/Subdirector General de Seguridad Pública y Vialidad;</a:t>
+            </a:r>
+          </a:p>
+          <a:p>
+            <a:pPr marL="406405" indent="-406405" algn="just" defTabSz="2167494">
               <a:lnSpc>
                 <a:spcPct val="150000"/>
               </a:lnSpc>
-              <a:spcBef>
-                <a:spcPts val="0"/>
-              </a:spcBef>
-              <a:spcAft>
-                <a:spcPts val="0"/>
-              </a:spcAft>
-              <a:buClrTx/>
-              <a:buSzTx/>
               <a:buFont typeface="Wingdings" panose="05000000000000000000" pitchFamily="2" charset="2"/>
               <a:buChar char="§"/>
-              <a:tabLst/>
               <a:defRPr/>
             </a:pPr>
             <a:r>
-              <a:rPr lang="es-MX" sz="1000" b="1" kern="1200" dirty="0">
+              <a:rPr lang="es-MX" sz="2370" b="1" dirty="0">
                 <a:solidFill>
                   <a:srgbClr val="660033"/>
                 </a:solidFill>
-                <a:effectLst/>
                 <a:latin typeface="Montserrat" pitchFamily="2" charset="0"/>
-                <a:ea typeface="+mn-ea"/>
-                <a:cs typeface="+mn-cs"/>
               </a:rPr>
-              <a:t>Consejo de la Judicatura Federal: </a:t>
-            </a:r>
-            <a:r>
-              <a:rPr lang="es-MX" sz="1000" b="0" kern="1200" dirty="0">
+              <a:t>Secretaría de Agricultura, Ganadería, Desarrollo Rural, Pesca y Alimentación. Apoyos y Servicios a la Comercialización Agropecuaria: </a:t>
+            </a:r>
+            <a:r>
+              <a:rPr lang="es-MX" sz="2370" dirty="0">
                 <a:solidFill>
                   <a:srgbClr val="660033"/>
                 </a:solidFill>
-                <a:effectLst/>
                 <a:latin typeface="Montserrat" pitchFamily="2" charset="0"/>
-                <a:ea typeface="+mn-ea"/>
-                <a:cs typeface="+mn-cs"/>
               </a:rPr>
-              <a:t>Directora de Adquisiciones.</a:t>
-            </a:r>
-          </a:p>
-          <a:p>
-            <a:pPr marL="171450" marR="0" lvl="0" indent="-171450" algn="just" defTabSz="914400" rtl="0" eaLnBrk="1" fontAlgn="auto" latinLnBrk="0" hangingPunct="1">
+              <a:t>Director General de Programación y Evaluación  de Apoyos Directos;</a:t>
+            </a:r>
+          </a:p>
+          <a:p>
+            <a:pPr marL="406405" indent="-406405" algn="just" defTabSz="2167494">
               <a:lnSpc>
                 <a:spcPct val="150000"/>
               </a:lnSpc>
-              <a:spcBef>
-                <a:spcPts val="0"/>
-              </a:spcBef>
-              <a:spcAft>
-                <a:spcPts val="0"/>
-              </a:spcAft>
-              <a:buClrTx/>
-              <a:buSzTx/>
               <a:buFont typeface="Wingdings" panose="05000000000000000000" pitchFamily="2" charset="2"/>
               <a:buChar char="§"/>
-              <a:tabLst/>
               <a:defRPr/>
             </a:pPr>
             <a:r>
-              <a:rPr lang="es-MX" sz="1000" b="1" kern="1200" dirty="0">
+              <a:rPr lang="es-MX" sz="2370" b="1" dirty="0">
                 <a:solidFill>
                   <a:srgbClr val="660033"/>
                 </a:solidFill>
-                <a:effectLst/>
                 <a:latin typeface="Montserrat" pitchFamily="2" charset="0"/>
-                <a:ea typeface="+mn-ea"/>
-                <a:cs typeface="+mn-cs"/>
               </a:rPr>
-              <a:t>Secretaría de Relaciones Exteriores: </a:t>
-            </a:r>
-            <a:r>
-              <a:rPr lang="es-MX" sz="1000" b="0" kern="1200" dirty="0">
+              <a:t>Gobierno del Estado de Tamaulipas: </a:t>
+            </a:r>
+            <a:r>
+              <a:rPr lang="es-MX" sz="2370" dirty="0">
                 <a:solidFill>
                   <a:srgbClr val="660033"/>
                 </a:solidFill>
-                <a:effectLst/>
                 <a:latin typeface="Montserrat" pitchFamily="2" charset="0"/>
-                <a:ea typeface="+mn-ea"/>
-                <a:cs typeface="+mn-cs"/>
               </a:rPr>
-              <a:t>Directora de</a:t>
-            </a:r>
-            <a:r>
-              <a:rPr lang="es-MX" sz="1000" b="0" kern="1200" baseline="0" dirty="0">
-                <a:solidFill>
-                  <a:srgbClr val="660033"/>
-                </a:solidFill>
-                <a:effectLst/>
-                <a:latin typeface="Montserrat" pitchFamily="2" charset="0"/>
-                <a:ea typeface="+mn-ea"/>
-                <a:cs typeface="+mn-cs"/>
-              </a:rPr>
-              <a:t> Adquisiciones  y Contrataciones.</a:t>
-            </a:r>
-          </a:p>
-          <a:p>
-            <a:pPr marL="171450" marR="0" lvl="0" indent="-171450" algn="just" defTabSz="914400" rtl="0" eaLnBrk="1" fontAlgn="auto" latinLnBrk="0" hangingPunct="1">
+              <a:t>Subdirector de la Policía Preventiva en Reynosa/Director de Seguridad Pública y Vialidad en Ciudad del Mante;</a:t>
+            </a:r>
+          </a:p>
+          <a:p>
+            <a:pPr marL="406405" indent="-406405" algn="just" defTabSz="2167494">
               <a:lnSpc>
                 <a:spcPct val="150000"/>
               </a:lnSpc>
-              <a:spcBef>
-                <a:spcPts val="0"/>
-              </a:spcBef>
-              <a:spcAft>
-                <a:spcPts val="0"/>
-              </a:spcAft>
-              <a:buClrTx/>
-              <a:buSzTx/>
               <a:buFont typeface="Wingdings" panose="05000000000000000000" pitchFamily="2" charset="2"/>
               <a:buChar char="§"/>
-              <a:tabLst/>
               <a:defRPr/>
             </a:pPr>
             <a:r>
-              <a:rPr lang="es-MX" sz="1000" b="1" kern="1200" baseline="0" dirty="0">
+              <a:rPr lang="es-MX" sz="2370" b="1" dirty="0">
                 <a:solidFill>
                   <a:srgbClr val="660033"/>
                 </a:solidFill>
-                <a:effectLst/>
                 <a:latin typeface="Montserrat" pitchFamily="2" charset="0"/>
-                <a:ea typeface="+mn-ea"/>
-                <a:cs typeface="+mn-cs"/>
               </a:rPr>
-              <a:t>Instituto Politécnico Nacional: </a:t>
-            </a:r>
-            <a:r>
-              <a:rPr lang="es-MX" sz="1000" b="0" kern="1200" baseline="0" dirty="0">
-                <a:solidFill>
-                  <a:srgbClr val="660033"/>
-                </a:solidFill>
-                <a:effectLst/>
-                <a:latin typeface="Montserrat" pitchFamily="2" charset="0"/>
-                <a:ea typeface="+mn-ea"/>
-                <a:cs typeface="+mn-cs"/>
-              </a:rPr>
-              <a:t>Coordinadora de Gestión/Jefa de Departamento de Recursos Materiales.</a:t>
-            </a:r>
-          </a:p>
-          <a:p>
-            <a:pPr marL="171450" marR="0" lvl="0" indent="-171450" algn="just" defTabSz="914400" rtl="0" eaLnBrk="1" fontAlgn="auto" latinLnBrk="0" hangingPunct="1">
+              <a:t>Entre otros cargos.</a:t>
+            </a:r>
+          </a:p>
+          <a:p>
+            <a:pPr defTabSz="2167494">
               <a:lnSpc>
                 <a:spcPct val="150000"/>
               </a:lnSpc>
-              <a:spcBef>
-                <a:spcPts val="0"/>
-              </a:spcBef>
-              <a:spcAft>
-                <a:spcPts val="0"/>
-              </a:spcAft>
-              <a:buClrTx/>
-              <a:buSzTx/>
-              <a:buFont typeface="Wingdings" panose="05000000000000000000" pitchFamily="2" charset="2"/>
-              <a:buChar char="§"/>
-              <a:tabLst/>
               <a:defRPr/>
             </a:pPr>
-            <a:r>
-              <a:rPr lang="es-MX" sz="1000" b="1" kern="1200" baseline="0" dirty="0">
-                <a:solidFill>
-                  <a:srgbClr val="660033"/>
-                </a:solidFill>
-                <a:effectLst/>
-                <a:latin typeface="Montserrat" pitchFamily="2" charset="0"/>
-                <a:ea typeface="+mn-ea"/>
-                <a:cs typeface="+mn-cs"/>
-              </a:rPr>
-              <a:t>Secretaría de Educación Pública: </a:t>
-            </a:r>
-            <a:r>
-              <a:rPr lang="es-MX" sz="1000" b="0" kern="1200" baseline="0" dirty="0">
-                <a:solidFill>
-                  <a:srgbClr val="660033"/>
-                </a:solidFill>
-                <a:effectLst/>
-                <a:latin typeface="Montserrat" pitchFamily="2" charset="0"/>
-                <a:ea typeface="+mn-ea"/>
-                <a:cs typeface="+mn-cs"/>
-              </a:rPr>
-              <a:t>Directora de Asesoría Legal en Adquisiciones.</a:t>
-            </a:r>
-            <a:endParaRPr lang="es-MX" sz="1000" b="1" kern="1200" dirty="0">
+            <a:endParaRPr lang="es-MX" sz="2607" dirty="0">
               <a:solidFill>
                 <a:srgbClr val="660033"/>
               </a:solidFill>
-              <a:effectLst/>
-              <a:latin typeface="Montserrat" pitchFamily="2" charset="0"/>
-              <a:ea typeface="+mn-ea"/>
-              <a:cs typeface="+mn-cs"/>
-            </a:endParaRPr>
-          </a:p>
-          <a:p>
-            <a:pPr marL="0" marR="0" lvl="0" indent="0" algn="just" defTabSz="914400" rtl="0" eaLnBrk="1" fontAlgn="auto" latinLnBrk="0" hangingPunct="1">
-              <a:lnSpc>
-                <a:spcPct val="150000"/>
-              </a:lnSpc>
-              <a:spcBef>
-                <a:spcPts val="0"/>
-              </a:spcBef>
-              <a:spcAft>
-                <a:spcPts val="0"/>
-              </a:spcAft>
-              <a:buClrTx/>
-              <a:buSzTx/>
-              <a:buFont typeface="Wingdings" panose="05000000000000000000" pitchFamily="2" charset="2"/>
-              <a:buNone/>
-              <a:tabLst/>
-              <a:defRPr/>
-            </a:pPr>
-            <a:endParaRPr lang="es-MX" sz="1100" b="0" baseline="0" dirty="0">
-              <a:solidFill>
-                <a:srgbClr val="660033"/>
-              </a:solidFill>
-              <a:effectLst/>
               <a:latin typeface="Montserrat" pitchFamily="2" charset="0"/>
             </a:endParaRPr>
           </a:p>
@@ -4796,8 +4310,8 @@
         </p:blipFill>
         <p:spPr>
           <a:xfrm>
-            <a:off x="2309764" y="299580"/>
-            <a:ext cx="4105469" cy="612140"/>
+            <a:off x="5474997" y="-5555218"/>
+            <a:ext cx="9731482" cy="1450999"/>
           </a:xfrm>
           <a:prstGeom prst="rect">
             <a:avLst/>
@@ -4809,10 +4323,10 @@
       </p:pic>
       <p:pic>
         <p:nvPicPr>
-          <p:cNvPr id="14" name="Picture 2" descr="W:\SDCO_Zona Sur\SUR\CV TITULARES DE LAS O R\SEMBLANZAS CURRICULARES TOR -JUNIO 2024\FOTOS\JALISCO- CARMEN IVONNE RAMÍREZ GARCÍA.png">
+          <p:cNvPr id="14" name="Picture 2" descr="W:\SDCO_Zona Sur\SUR\CV TITULARES DE LAS O R\SEMBLANZAS CURRICULARES TOR -JUNIO 2024\FOTOS\PUEBLA FIDEL GAONA URBINA.png">
             <a:extLst>
               <a:ext uri="{FF2B5EF4-FFF2-40B4-BE49-F238E27FC236}">
-                <a16:creationId xmlns:a16="http://schemas.microsoft.com/office/drawing/2014/main" id="{C2FFE67A-4B8B-4499-9672-986EC2D95F53}"/>
+                <a16:creationId xmlns:a16="http://schemas.microsoft.com/office/drawing/2014/main" id="{22F2DFD6-1608-4203-B9DB-3EDCF7A3D5B6}"/>
               </a:ext>
             </a:extLst>
           </p:cNvPr>
@@ -4821,7 +4335,7 @@
           </p:cNvPicPr>
           <p:nvPr/>
         </p:nvPicPr>
-        <p:blipFill>
+        <p:blipFill rotWithShape="1">
           <a:blip r:embed="rId5">
             <a:extLst>
               <a:ext uri="{28A0092B-C50C-407E-A947-70E740481C1C}">
@@ -4829,15 +4343,13 @@
               </a:ext>
             </a:extLst>
           </a:blip>
-          <a:srcRect/>
-          <a:stretch>
-            <a:fillRect/>
-          </a:stretch>
+          <a:srcRect l="7735" t="6068" r="5447" b="8458"/>
+          <a:stretch/>
         </p:blipFill>
         <p:spPr bwMode="auto">
           <a:xfrm>
-            <a:off x="756360" y="1006872"/>
-            <a:ext cx="879494" cy="972120"/>
+            <a:off x="2023496" y="-3863698"/>
+            <a:ext cx="2077158" cy="2042472"/>
           </a:xfrm>
           <a:prstGeom prst="rect">
             <a:avLst/>
@@ -4859,7 +4371,7 @@
           <p:cNvPr id="15" name="8 Rectángulo">
             <a:extLst>
               <a:ext uri="{FF2B5EF4-FFF2-40B4-BE49-F238E27FC236}">
-                <a16:creationId xmlns:a16="http://schemas.microsoft.com/office/drawing/2014/main" id="{9B248E14-89C5-4B0B-893A-375DCABE34C8}"/>
+                <a16:creationId xmlns:a16="http://schemas.microsoft.com/office/drawing/2014/main" id="{85A50674-F36E-4B68-89B8-2390C1A0157E}"/>
               </a:ext>
             </a:extLst>
           </p:cNvPr>
@@ -4868,8 +4380,8 @@
         </p:nvSpPr>
         <p:spPr>
           <a:xfrm>
-            <a:off x="559472" y="551487"/>
-            <a:ext cx="1279517" cy="369332"/>
+            <a:off x="576501" y="-5015737"/>
+            <a:ext cx="4898496" cy="748988"/>
           </a:xfrm>
           <a:prstGeom prst="rect">
             <a:avLst/>
@@ -4879,21 +4391,22 @@
           </a:ln>
         </p:spPr>
         <p:txBody>
-          <a:bodyPr wrap="none">
+          <a:bodyPr wrap="square">
             <a:spAutoFit/>
           </a:bodyPr>
           <a:lstStyle/>
           <a:p>
-            <a:r>
-              <a:rPr lang="es-ES" b="1" dirty="0">
+            <a:pPr algn="ctr"/>
+            <a:r>
+              <a:rPr lang="es-MX" sz="4267" b="1" dirty="0">
                 <a:solidFill>
                   <a:schemeClr val="bg1"/>
                 </a:solidFill>
                 <a:latin typeface="Montserrat" pitchFamily="2" charset="0"/>
               </a:rPr>
-              <a:t> JALISCO</a:t>
-            </a:r>
-            <a:endParaRPr lang="es-MX" dirty="0">
+              <a:t>JALISCO</a:t>
+            </a:r>
+            <a:endParaRPr lang="es-MX" sz="4267" dirty="0">
               <a:solidFill>
                 <a:schemeClr val="bg1"/>
               </a:solidFill>
@@ -4907,7 +4420,7 @@
           <p:cNvPr id="19" name="10 Rectángulo">
             <a:extLst>
               <a:ext uri="{FF2B5EF4-FFF2-40B4-BE49-F238E27FC236}">
-                <a16:creationId xmlns:a16="http://schemas.microsoft.com/office/drawing/2014/main" id="{DDF36E6B-60F3-48A2-BA3E-6038C16B6CCF}"/>
+                <a16:creationId xmlns:a16="http://schemas.microsoft.com/office/drawing/2014/main" id="{B5B16FB0-086A-4F96-853E-504EAB67A9BC}"/>
               </a:ext>
             </a:extLst>
           </p:cNvPr>
@@ -4916,8 +4429,8 @@
         </p:nvSpPr>
         <p:spPr>
           <a:xfrm>
-            <a:off x="-127523" y="2144854"/>
-            <a:ext cx="2736304" cy="553998"/>
+            <a:off x="448993" y="-1271459"/>
+            <a:ext cx="5006777" cy="1113895"/>
           </a:xfrm>
           <a:prstGeom prst="rect">
             <a:avLst/>
@@ -4934,24 +4447,27 @@
           <a:p>
             <a:pPr algn="ctr"/>
             <a:r>
-              <a:rPr lang="es-ES" sz="1400" b="1" dirty="0">
+              <a:rPr lang="es-ES" sz="3319" b="1" dirty="0">
                 <a:solidFill>
                   <a:schemeClr val="bg1"/>
                 </a:solidFill>
                 <a:latin typeface="Montserrat" pitchFamily="2" charset="0"/>
               </a:rPr>
-              <a:t>Dra. Carmen Ivonne Ramírez García</a:t>
-            </a:r>
-            <a:r>
-              <a:rPr lang="es-ES" sz="1500" b="1" dirty="0">
+              <a:t>Mtro. Fidel Gaona</a:t>
+            </a:r>
+          </a:p>
+          <a:p>
+            <a:pPr algn="ctr"/>
+            <a:r>
+              <a:rPr lang="es-ES" sz="3319" b="1" dirty="0">
                 <a:solidFill>
                   <a:schemeClr val="bg1"/>
                 </a:solidFill>
                 <a:latin typeface="Montserrat" pitchFamily="2" charset="0"/>
               </a:rPr>
-              <a:t>  </a:t>
-            </a:r>
-            <a:endParaRPr lang="es-MX" sz="1500" dirty="0">
+              <a:t>Urbina</a:t>
+            </a:r>
+            <a:endParaRPr lang="es-MX" sz="3319" dirty="0">
               <a:solidFill>
                 <a:schemeClr val="bg1"/>
               </a:solidFill>
@@ -4981,8 +4497,8 @@
         </p:blipFill>
         <p:spPr>
           <a:xfrm>
-            <a:off x="28061" y="8360377"/>
-            <a:ext cx="6829939" cy="724300"/>
+            <a:off x="66516" y="13495361"/>
+            <a:ext cx="16189485" cy="1716859"/>
           </a:xfrm>
           <a:prstGeom prst="rect">
             <a:avLst/>
@@ -5003,9 +4519,9 @@
 </file>
 
 <file path=ppt/theme/theme1.xml><?xml version="1.0" encoding="utf-8"?>
-<a:theme xmlns:a="http://schemas.openxmlformats.org/drawingml/2006/main" name="Tema de Office">
+<a:theme xmlns:a="http://schemas.openxmlformats.org/drawingml/2006/main" name="Office 2013 - Tema de 2022">
   <a:themeElements>
-    <a:clrScheme name="Office">
+    <a:clrScheme name="Office 2013 - Tema de 2022">
       <a:dk1>
         <a:sysClr val="windowText" lastClr="000000"/>
       </a:dk1>
@@ -5043,7 +4559,7 @@
         <a:srgbClr val="954F72"/>
       </a:folHlink>
     </a:clrScheme>
-    <a:fontScheme name="Office">
+    <a:fontScheme name="Office 2013 - Tema de 2022">
       <a:majorFont>
         <a:latin typeface="Calibri Light" panose="020F0302020204030204"/>
         <a:ea typeface=""/>
@@ -5078,23 +4594,6 @@
         <a:font script="Viet" typeface="Times New Roman"/>
         <a:font script="Uigh" typeface="Microsoft Uighur"/>
         <a:font script="Geor" typeface="Sylfaen"/>
-        <a:font script="Armn" typeface="Arial"/>
-        <a:font script="Bugi" typeface="Leelawadee UI"/>
-        <a:font script="Bopo" typeface="Microsoft JhengHei"/>
-        <a:font script="Java" typeface="Javanese Text"/>
-        <a:font script="Lisu" typeface="Segoe UI"/>
-        <a:font script="Mymr" typeface="Myanmar Text"/>
-        <a:font script="Nkoo" typeface="Ebrima"/>
-        <a:font script="Olck" typeface="Nirmala UI"/>
-        <a:font script="Osma" typeface="Ebrima"/>
-        <a:font script="Phag" typeface="Phagspa"/>
-        <a:font script="Syrn" typeface="Estrangelo Edessa"/>
-        <a:font script="Syrj" typeface="Estrangelo Edessa"/>
-        <a:font script="Syre" typeface="Estrangelo Edessa"/>
-        <a:font script="Sora" typeface="Nirmala UI"/>
-        <a:font script="Tale" typeface="Microsoft Tai Le"/>
-        <a:font script="Talu" typeface="Microsoft New Tai Lue"/>
-        <a:font script="Tfng" typeface="Ebrima"/>
       </a:majorFont>
       <a:minorFont>
         <a:latin typeface="Calibri" panose="020F0502020204030204"/>
@@ -5130,26 +4629,9 @@
         <a:font script="Viet" typeface="Arial"/>
         <a:font script="Uigh" typeface="Microsoft Uighur"/>
         <a:font script="Geor" typeface="Sylfaen"/>
-        <a:font script="Armn" typeface="Arial"/>
-        <a:font script="Bugi" typeface="Leelawadee UI"/>
-        <a:font script="Bopo" typeface="Microsoft JhengHei"/>
-        <a:font script="Java" typeface="Javanese Text"/>
-        <a:font script="Lisu" typeface="Segoe UI"/>
-        <a:font script="Mymr" typeface="Myanmar Text"/>
-        <a:font script="Nkoo" typeface="Ebrima"/>
-        <a:font script="Olck" typeface="Nirmala UI"/>
-        <a:font script="Osma" typeface="Ebrima"/>
-        <a:font script="Phag" typeface="Phagspa"/>
-        <a:font script="Syrn" typeface="Estrangelo Edessa"/>
-        <a:font script="Syrj" typeface="Estrangelo Edessa"/>
-        <a:font script="Syre" typeface="Estrangelo Edessa"/>
-        <a:font script="Sora" typeface="Nirmala UI"/>
-        <a:font script="Tale" typeface="Microsoft Tai Le"/>
-        <a:font script="Talu" typeface="Microsoft New Tai Lue"/>
-        <a:font script="Tfng" typeface="Ebrima"/>
       </a:minorFont>
     </a:fontScheme>
-    <a:fmtScheme name="Office">
+    <a:fmtScheme name="Office 2013 - Tema de 2022">
       <a:fillStyleLst>
         <a:solidFill>
           <a:schemeClr val="phClr"/>
@@ -5291,7 +4773,7 @@
   <a:extraClrSchemeLst/>
   <a:extLst>
     <a:ext uri="{05A4C25C-085E-4340-85A3-A5531E510DB2}">
-      <thm15:themeFamily xmlns:thm15="http://schemas.microsoft.com/office/thememl/2012/main" name="Office Theme" id="{62F939B6-93AF-4DB8-9C6B-D6C7DFDC589F}" vid="{4A3C46E8-61CC-4603-A589-7422A47A8E4A}"/>
+      <thm15:themeFamily xmlns:thm15="http://schemas.microsoft.com/office/thememl/2012/main" name="Office 2013 - 2022 Theme" id="{62F939B6-93AF-4DB8-9C6B-D6C7DFDC589F}" vid="{4A3C46E8-61CC-4603-A589-7422A47A8E4A}"/>
     </a:ext>
   </a:extLst>
 </a:theme>
